--- a/4/РОП/Практики_1-8/Презентации/РОП_Практическая_5_АлбахтинИВ.pptx
+++ b/4/РОП/Практики_1-8/Презентации/РОП_Практическая_5_АлбахтинИВ.pptx
@@ -2,18 +2,18 @@
 <file path=ppt/presentation.xml><?xml version="1.0" encoding="utf-8"?>
 <p:presentation xmlns:p="http://schemas.openxmlformats.org/presentationml/2006/main">
   <p:sldMasterIdLst>
-    <p:sldMasterId xmlns:r="http://schemas.openxmlformats.org/officeDocument/2006/relationships" id="2147483648" r:id="Rcc0c088c354c4050"/>
+    <p:sldMasterId xmlns:r="http://schemas.openxmlformats.org/officeDocument/2006/relationships" id="2147483648" r:id="R3b355868a12148be"/>
   </p:sldMasterIdLst>
   <p:notesMasterIdLst>
-    <p:notesMasterId xmlns:r="http://schemas.openxmlformats.org/officeDocument/2006/relationships" r:id="R374209ecdc0e4620"/>
+    <p:notesMasterId xmlns:r="http://schemas.openxmlformats.org/officeDocument/2006/relationships" r:id="Rd05b772f255d4d5e"/>
   </p:notesMasterIdLst>
   <p:sldIdLst>
-    <p:sldId xmlns:r="http://schemas.openxmlformats.org/officeDocument/2006/relationships" id="256" r:id="R597995d9b8be408e"/>
-    <p:sldId xmlns:r="http://schemas.openxmlformats.org/officeDocument/2006/relationships" id="257" r:id="R4d90037991e24fe6"/>
-    <p:sldId xmlns:r="http://schemas.openxmlformats.org/officeDocument/2006/relationships" id="258" r:id="R1045a451383d49dc"/>
-    <p:sldId xmlns:r="http://schemas.openxmlformats.org/officeDocument/2006/relationships" id="259" r:id="Re2dd20a8b62f4eb4"/>
-    <p:sldId xmlns:r="http://schemas.openxmlformats.org/officeDocument/2006/relationships" id="260" r:id="R7107f24eca4c4f4a"/>
-    <p:sldId xmlns:r="http://schemas.openxmlformats.org/officeDocument/2006/relationships" id="261" r:id="R4885f71b167d457a"/>
+    <p:sldId xmlns:r="http://schemas.openxmlformats.org/officeDocument/2006/relationships" id="256" r:id="R4f6a235666bf4fcc"/>
+    <p:sldId xmlns:r="http://schemas.openxmlformats.org/officeDocument/2006/relationships" id="257" r:id="R7365e3a801e14519"/>
+    <p:sldId xmlns:r="http://schemas.openxmlformats.org/officeDocument/2006/relationships" id="258" r:id="Rd8fbc8d545604be6"/>
+    <p:sldId xmlns:r="http://schemas.openxmlformats.org/officeDocument/2006/relationships" id="259" r:id="Rdad171491c204eaa"/>
+    <p:sldId xmlns:r="http://schemas.openxmlformats.org/officeDocument/2006/relationships" id="260" r:id="Raa4b75c129144faa"/>
+    <p:sldId xmlns:r="http://schemas.openxmlformats.org/officeDocument/2006/relationships" id="261" r:id="R2d9d1459c38246b7"/>
   </p:sldIdLst>
   <p:sldSz cx="12192000" cy="6858000"/>
   <p:notesSz cx="6858000" cy="9144000"/>
@@ -895,7 +895,7 @@
   </p:cSld>
   <p:clrMap bg1="lt1" tx1="dk1" bg2="lt2" tx2="dk2" accent1="accent1" accent2="accent2" accent3="accent3" accent4="accent4" accent5="accent5" accent6="accent6" hlink="hlink" folHlink="folHlink"/>
   <p:sldLayoutIdLst>
-    <p:sldLayoutId xmlns:r="http://schemas.openxmlformats.org/officeDocument/2006/relationships" id="2147483649" r:id="R0721a03e40e24733"/>
+    <p:sldLayoutId xmlns:r="http://schemas.openxmlformats.org/officeDocument/2006/relationships" id="2147483649" r:id="R1b0cce1a1ee1463c"/>
   </p:sldLayoutIdLst>
   <p:txStyles>
     <p:titleStyle>
@@ -1446,7 +1446,7 @@
           <p:cNvPr id="5" name="">
             <a:extLst xmlns:a="http://schemas.openxmlformats.org/drawingml/2006/main">
               <a:ext uri="{FF2B5EF4-FFF2-40B4-BE49-F238E27FC236}">
-                <a16:creationId xmlns:a16="http://schemas.microsoft.com/office/drawing/2014/main" id="{D2E7BA27-C548-4775-9B4E-DC4B295F3BB1}"/>
+                <a16:creationId xmlns:a16="http://schemas.microsoft.com/office/drawing/2014/main" id="{A82833D2-4480-427B-8ADB-DCEE43779779}"/>
               </a:ext>
             </a:extLst>
           </p:cNvPr>
@@ -1457,8 +1457,8 @@
         </p:nvSpPr>
         <p:spPr>
           <a:xfrm xmlns:a="http://schemas.openxmlformats.org/drawingml/2006/main">
-            <a:off x="552450" y="333375"/>
-            <a:ext cx="11049000" cy="857250"/>
+            <a:off x="552450" y="266700"/>
+            <a:ext cx="11049000" cy="742950"/>
           </a:xfrm>
           <a:prstGeom xmlns:a="http://schemas.openxmlformats.org/drawingml/2006/main" prst="rect">
             <a:avLst/>
@@ -1469,13 +1469,13 @@
           </a:ln>
         </p:spPr>
         <p:txBody>
-          <a:bodyPr xmlns:a="http://schemas.openxmlformats.org/drawingml/2006/main">
+          <a:bodyPr xmlns:a="http://schemas.openxmlformats.org/drawingml/2006/main" anchor="ctr">
             <a:noAutofit/>
           </a:bodyPr>
           <a:lstStyle xmlns:a="http://schemas.openxmlformats.org/drawingml/2006/main"/>
           <a:p xmlns:a="http://schemas.openxmlformats.org/drawingml/2006/main">
-            <a:pPr>
-              <a:defRPr sz="3150" b="1">
+            <a:pPr algn="l">
+              <a:defRPr sz="2700" b="1">
                 <a:solidFill>
                   <a:srgbClr val="161616"/>
                 </a:solidFill>
@@ -1485,7 +1485,7 @@
               </a:defRPr>
             </a:pPr>
             <a:r>
-              <a:rPr sz="3150" b="1">
+              <a:rPr sz="2700" b="1">
                 <a:solidFill>
                   <a:srgbClr val="161616"/>
                 </a:solidFill>
@@ -1503,7 +1503,7 @@
           <p:cNvPr id="2" name="">
             <a:extLst xmlns:a="http://schemas.openxmlformats.org/drawingml/2006/main">
               <a:ext uri="{FF2B5EF4-FFF2-40B4-BE49-F238E27FC236}">
-                <a16:creationId xmlns:a16="http://schemas.microsoft.com/office/drawing/2014/main" id="{CCDA8815-884A-4083-9C6B-2918957217E1}"/>
+                <a16:creationId xmlns:a16="http://schemas.microsoft.com/office/drawing/2014/main" id="{09576707-F1E3-4A91-9A6A-A93ECE528E04}"/>
               </a:ext>
             </a:extLst>
           </p:cNvPr>
@@ -1560,7 +1560,7 @@
           <p:cNvPr id="3" name="">
             <a:extLst xmlns:a="http://schemas.openxmlformats.org/drawingml/2006/main">
               <a:ext uri="{FF2B5EF4-FFF2-40B4-BE49-F238E27FC236}">
-                <a16:creationId xmlns:a16="http://schemas.microsoft.com/office/drawing/2014/main" id="{1EAB6711-A23F-471F-92F6-2CF1AE224CB9}"/>
+                <a16:creationId xmlns:a16="http://schemas.microsoft.com/office/drawing/2014/main" id="{2564D6C5-0261-4241-AF64-5B389F2163FD}"/>
               </a:ext>
             </a:extLst>
           </p:cNvPr>
@@ -1607,7 +1607,7 @@
                 <a:ea typeface="Arial"/>
                 <a:cs typeface="Arial"/>
               </a:rPr>
-              <a:t>Цена, масса и выбор предложений рассчитываются для конкретной версии BOM.</a:t>
+              <a:t>Цена, масса и выбор предложений рассчитываются для конкретной версии модельного ряда.</a:t>
             </a:r>
           </a:p>
         </p:txBody>
@@ -1617,7 +1617,7 @@
           <p:cNvPr id="4" name="">
             <a:extLst xmlns:a="http://schemas.openxmlformats.org/drawingml/2006/main">
               <a:ext uri="{FF2B5EF4-FFF2-40B4-BE49-F238E27FC236}">
-                <a16:creationId xmlns:a16="http://schemas.microsoft.com/office/drawing/2014/main" id="{3B608839-3B5C-4609-B3BA-81D049B3A023}"/>
+                <a16:creationId xmlns:a16="http://schemas.microsoft.com/office/drawing/2014/main" id="{D3EA0D80-530C-43CB-9CAC-18E015F82C37}"/>
               </a:ext>
             </a:extLst>
           </p:cNvPr>
@@ -1695,7 +1695,7 @@
     </p:spTree>
     <p:extLst>
       <p:ext uri="{BB962C8B-B14F-4D97-AF65-F5344CB8AC3E}">
-        <p14:creationId xmlns:p14="http://schemas.microsoft.com/office/powerpoint/2010/main" val="1428632969"/>
+        <p14:creationId xmlns:p14="http://schemas.microsoft.com/office/powerpoint/2010/main" val="1526349525"/>
       </p:ext>
     </p:extLst>
   </p:cSld>
@@ -1726,7 +1726,7 @@
           <p:cNvPr id="3" name="">
             <a:extLst xmlns:a="http://schemas.openxmlformats.org/drawingml/2006/main">
               <a:ext uri="{FF2B5EF4-FFF2-40B4-BE49-F238E27FC236}">
-                <a16:creationId xmlns:a16="http://schemas.microsoft.com/office/drawing/2014/main" id="{44B70990-CFE5-4081-AEB3-BCCDC5766D3D}"/>
+                <a16:creationId xmlns:a16="http://schemas.microsoft.com/office/drawing/2014/main" id="{02EF1080-F637-43F8-997D-BE8BD035C322}"/>
               </a:ext>
             </a:extLst>
           </p:cNvPr>
@@ -1737,8 +1737,8 @@
         </p:nvSpPr>
         <p:spPr>
           <a:xfrm xmlns:a="http://schemas.openxmlformats.org/drawingml/2006/main">
-            <a:off x="552450" y="333375"/>
-            <a:ext cx="11049000" cy="857250"/>
+            <a:off x="552450" y="266700"/>
+            <a:ext cx="11049000" cy="742950"/>
           </a:xfrm>
           <a:prstGeom xmlns:a="http://schemas.openxmlformats.org/drawingml/2006/main" prst="rect">
             <a:avLst/>
@@ -1749,13 +1749,13 @@
           </a:ln>
         </p:spPr>
         <p:txBody>
-          <a:bodyPr xmlns:a="http://schemas.openxmlformats.org/drawingml/2006/main">
+          <a:bodyPr xmlns:a="http://schemas.openxmlformats.org/drawingml/2006/main" anchor="ctr">
             <a:noAutofit/>
           </a:bodyPr>
           <a:lstStyle xmlns:a="http://schemas.openxmlformats.org/drawingml/2006/main"/>
           <a:p xmlns:a="http://schemas.openxmlformats.org/drawingml/2006/main">
-            <a:pPr>
-              <a:defRPr sz="3150" b="1">
+            <a:pPr algn="l">
+              <a:defRPr sz="2700" b="1">
                 <a:solidFill>
                   <a:srgbClr val="161616"/>
                 </a:solidFill>
@@ -1765,7 +1765,7 @@
               </a:defRPr>
             </a:pPr>
             <a:r>
-              <a:rPr sz="3150" b="1">
+              <a:rPr sz="2700" b="1">
                 <a:solidFill>
                   <a:srgbClr val="161616"/>
                 </a:solidFill>
@@ -2103,7 +2103,7 @@
     </p:spTree>
     <p:extLst>
       <p:ext uri="{BB962C8B-B14F-4D97-AF65-F5344CB8AC3E}">
-        <p14:creationId xmlns:p14="http://schemas.microsoft.com/office/powerpoint/2010/main" val="1516609393"/>
+        <p14:creationId xmlns:p14="http://schemas.microsoft.com/office/powerpoint/2010/main" val="1255064789"/>
       </p:ext>
     </p:extLst>
   </p:cSld>
@@ -2134,7 +2134,7 @@
           <p:cNvPr id="6" name="">
             <a:extLst xmlns:a="http://schemas.openxmlformats.org/drawingml/2006/main">
               <a:ext uri="{FF2B5EF4-FFF2-40B4-BE49-F238E27FC236}">
-                <a16:creationId xmlns:a16="http://schemas.microsoft.com/office/drawing/2014/main" id="{98947D40-1B66-4245-AED4-9DE899F2F54E}"/>
+                <a16:creationId xmlns:a16="http://schemas.microsoft.com/office/drawing/2014/main" id="{CD966D70-B22A-4374-8476-53AA8EE2FD32}"/>
               </a:ext>
             </a:extLst>
           </p:cNvPr>
@@ -2145,8 +2145,8 @@
         </p:nvSpPr>
         <p:spPr>
           <a:xfrm xmlns:a="http://schemas.openxmlformats.org/drawingml/2006/main">
-            <a:off x="552450" y="333375"/>
-            <a:ext cx="11049000" cy="857250"/>
+            <a:off x="552450" y="266700"/>
+            <a:ext cx="11049000" cy="742950"/>
           </a:xfrm>
           <a:prstGeom xmlns:a="http://schemas.openxmlformats.org/drawingml/2006/main" prst="rect">
             <a:avLst/>
@@ -2157,13 +2157,13 @@
           </a:ln>
         </p:spPr>
         <p:txBody>
-          <a:bodyPr xmlns:a="http://schemas.openxmlformats.org/drawingml/2006/main">
+          <a:bodyPr xmlns:a="http://schemas.openxmlformats.org/drawingml/2006/main" anchor="ctr">
             <a:noAutofit/>
           </a:bodyPr>
           <a:lstStyle xmlns:a="http://schemas.openxmlformats.org/drawingml/2006/main"/>
           <a:p xmlns:a="http://schemas.openxmlformats.org/drawingml/2006/main">
-            <a:pPr>
-              <a:defRPr sz="3150" b="1">
+            <a:pPr algn="l">
+              <a:defRPr sz="2700" b="1">
                 <a:solidFill>
                   <a:srgbClr val="161616"/>
                 </a:solidFill>
@@ -2173,7 +2173,7 @@
               </a:defRPr>
             </a:pPr>
             <a:r>
-              <a:rPr sz="3150" b="1">
+              <a:rPr sz="2700" b="1">
                 <a:solidFill>
                   <a:srgbClr val="161616"/>
                 </a:solidFill>
@@ -2191,7 +2191,7 @@
           <p:cNvPr id="2" name="">
             <a:extLst xmlns:a="http://schemas.openxmlformats.org/drawingml/2006/main">
               <a:ext uri="{FF2B5EF4-FFF2-40B4-BE49-F238E27FC236}">
-                <a16:creationId xmlns:a16="http://schemas.microsoft.com/office/drawing/2014/main" id="{E28CDA8E-1E3F-4631-B885-0F60DA4E8D46}"/>
+                <a16:creationId xmlns:a16="http://schemas.microsoft.com/office/drawing/2014/main" id="{1762B8D3-793D-42C9-8E77-D04C061C0605}"/>
               </a:ext>
             </a:extLst>
           </p:cNvPr>
@@ -2248,7 +2248,7 @@
           <p:cNvPr id="3" name="">
             <a:extLst xmlns:a="http://schemas.openxmlformats.org/drawingml/2006/main">
               <a:ext uri="{FF2B5EF4-FFF2-40B4-BE49-F238E27FC236}">
-                <a16:creationId xmlns:a16="http://schemas.microsoft.com/office/drawing/2014/main" id="{15B48A6B-0452-46B7-A68D-AB987D0DE789}"/>
+                <a16:creationId xmlns:a16="http://schemas.microsoft.com/office/drawing/2014/main" id="{51326388-880A-488F-A14E-1F7D18EA9E4C}"/>
               </a:ext>
             </a:extLst>
           </p:cNvPr>
@@ -2305,7 +2305,7 @@
           <p:cNvPr id="4" name="">
             <a:extLst xmlns:a="http://schemas.openxmlformats.org/drawingml/2006/main">
               <a:ext uri="{FF2B5EF4-FFF2-40B4-BE49-F238E27FC236}">
-                <a16:creationId xmlns:a16="http://schemas.microsoft.com/office/drawing/2014/main" id="{080B599F-656A-4F15-906B-17F66706EED9}"/>
+                <a16:creationId xmlns:a16="http://schemas.microsoft.com/office/drawing/2014/main" id="{F5A67C97-7916-4544-B263-7C286C719D5B}"/>
               </a:ext>
             </a:extLst>
           </p:cNvPr>
@@ -2362,7 +2362,7 @@
           <p:cNvPr id="5" name="">
             <a:extLst xmlns:a="http://schemas.openxmlformats.org/drawingml/2006/main">
               <a:ext uri="{FF2B5EF4-FFF2-40B4-BE49-F238E27FC236}">
-                <a16:creationId xmlns:a16="http://schemas.microsoft.com/office/drawing/2014/main" id="{25395D52-0DF8-43E3-8140-2221EE5F0023}"/>
+                <a16:creationId xmlns:a16="http://schemas.microsoft.com/office/drawing/2014/main" id="{17914AD3-D8F7-428B-89CD-34990176BB5F}"/>
               </a:ext>
             </a:extLst>
           </p:cNvPr>
@@ -2417,7 +2417,7 @@
     </p:spTree>
     <p:extLst>
       <p:ext uri="{BB962C8B-B14F-4D97-AF65-F5344CB8AC3E}">
-        <p14:creationId xmlns:p14="http://schemas.microsoft.com/office/powerpoint/2010/main" val="545991519"/>
+        <p14:creationId xmlns:p14="http://schemas.microsoft.com/office/powerpoint/2010/main" val="1968409545"/>
       </p:ext>
     </p:extLst>
   </p:cSld>
@@ -2448,7 +2448,7 @@
           <p:cNvPr id="10" name="">
             <a:extLst xmlns:a="http://schemas.openxmlformats.org/drawingml/2006/main">
               <a:ext uri="{FF2B5EF4-FFF2-40B4-BE49-F238E27FC236}">
-                <a16:creationId xmlns:a16="http://schemas.microsoft.com/office/drawing/2014/main" id="{DE012B86-147E-4A0C-8A0C-68C47BAD1ADE}"/>
+                <a16:creationId xmlns:a16="http://schemas.microsoft.com/office/drawing/2014/main" id="{4EF38108-DAC8-4535-A822-45A25C2EACF5}"/>
               </a:ext>
             </a:extLst>
           </p:cNvPr>
@@ -2459,8 +2459,8 @@
         </p:nvSpPr>
         <p:spPr>
           <a:xfrm xmlns:a="http://schemas.openxmlformats.org/drawingml/2006/main">
-            <a:off x="552450" y="333375"/>
-            <a:ext cx="11049000" cy="857250"/>
+            <a:off x="552450" y="266700"/>
+            <a:ext cx="11049000" cy="742950"/>
           </a:xfrm>
           <a:prstGeom xmlns:a="http://schemas.openxmlformats.org/drawingml/2006/main" prst="rect">
             <a:avLst/>
@@ -2471,13 +2471,13 @@
           </a:ln>
         </p:spPr>
         <p:txBody>
-          <a:bodyPr xmlns:a="http://schemas.openxmlformats.org/drawingml/2006/main">
+          <a:bodyPr xmlns:a="http://schemas.openxmlformats.org/drawingml/2006/main" anchor="ctr">
             <a:noAutofit/>
           </a:bodyPr>
           <a:lstStyle xmlns:a="http://schemas.openxmlformats.org/drawingml/2006/main"/>
           <a:p xmlns:a="http://schemas.openxmlformats.org/drawingml/2006/main">
-            <a:pPr>
-              <a:defRPr sz="3150" b="1">
+            <a:pPr algn="l">
+              <a:defRPr sz="2700" b="1">
                 <a:solidFill>
                   <a:srgbClr val="161616"/>
                 </a:solidFill>
@@ -2487,7 +2487,7 @@
               </a:defRPr>
             </a:pPr>
             <a:r>
-              <a:rPr sz="3150" b="1">
+              <a:rPr sz="2700" b="1">
                 <a:solidFill>
                   <a:srgbClr val="161616"/>
                 </a:solidFill>
@@ -2505,7 +2505,7 @@
           <p:cNvPr id="2" name="">
             <a:extLst xmlns:a="http://schemas.openxmlformats.org/drawingml/2006/main">
               <a:ext uri="{FF2B5EF4-FFF2-40B4-BE49-F238E27FC236}">
-                <a16:creationId xmlns:a16="http://schemas.microsoft.com/office/drawing/2014/main" id="{D615F25B-7647-40EA-9E4A-64AF301439F6}"/>
+                <a16:creationId xmlns:a16="http://schemas.microsoft.com/office/drawing/2014/main" id="{4D7DE98E-316E-445F-8431-EBB1F58F26F4}"/>
               </a:ext>
             </a:extLst>
           </p:cNvPr>
@@ -2589,7 +2589,7 @@
           <p:cNvPr id="3" name="">
             <a:extLst xmlns:a="http://schemas.openxmlformats.org/drawingml/2006/main">
               <a:ext uri="{FF2B5EF4-FFF2-40B4-BE49-F238E27FC236}">
-                <a16:creationId xmlns:a16="http://schemas.microsoft.com/office/drawing/2014/main" id="{268E564C-6D58-47C1-A0AE-6E30FBCC25D4}"/>
+                <a16:creationId xmlns:a16="http://schemas.microsoft.com/office/drawing/2014/main" id="{4D90DFAA-CCEA-47E5-AE7D-FCDFD5293ECF}"/>
               </a:ext>
             </a:extLst>
           </p:cNvPr>
@@ -2619,7 +2619,7 @@
           <p:cNvPr id="4" name="">
             <a:extLst xmlns:a="http://schemas.openxmlformats.org/drawingml/2006/main">
               <a:ext uri="{FF2B5EF4-FFF2-40B4-BE49-F238E27FC236}">
-                <a16:creationId xmlns:a16="http://schemas.microsoft.com/office/drawing/2014/main" id="{7EFE058F-F98D-414C-8C77-B60B7EFF2F11}"/>
+                <a16:creationId xmlns:a16="http://schemas.microsoft.com/office/drawing/2014/main" id="{930E8EDB-30DF-419B-BCDB-6B16F061B8A4}"/>
               </a:ext>
             </a:extLst>
           </p:cNvPr>
@@ -2703,7 +2703,7 @@
           <p:cNvPr id="5" name="">
             <a:extLst xmlns:a="http://schemas.openxmlformats.org/drawingml/2006/main">
               <a:ext uri="{FF2B5EF4-FFF2-40B4-BE49-F238E27FC236}">
-                <a16:creationId xmlns:a16="http://schemas.microsoft.com/office/drawing/2014/main" id="{893D0FA8-7EDF-4B97-B765-BFA879880D9B}"/>
+                <a16:creationId xmlns:a16="http://schemas.microsoft.com/office/drawing/2014/main" id="{6C10AEBB-9EBA-4469-A04F-48CF6327FD21}"/>
               </a:ext>
             </a:extLst>
           </p:cNvPr>
@@ -2733,7 +2733,7 @@
           <p:cNvPr id="6" name="">
             <a:extLst xmlns:a="http://schemas.openxmlformats.org/drawingml/2006/main">
               <a:ext uri="{FF2B5EF4-FFF2-40B4-BE49-F238E27FC236}">
-                <a16:creationId xmlns:a16="http://schemas.microsoft.com/office/drawing/2014/main" id="{1DE76AA9-C23B-4A08-B180-99551C887B06}"/>
+                <a16:creationId xmlns:a16="http://schemas.microsoft.com/office/drawing/2014/main" id="{FA6C31C4-C96B-43ED-8E5B-D433F24B70BA}"/>
               </a:ext>
             </a:extLst>
           </p:cNvPr>
@@ -2817,7 +2817,7 @@
           <p:cNvPr id="7" name="">
             <a:extLst xmlns:a="http://schemas.openxmlformats.org/drawingml/2006/main">
               <a:ext uri="{FF2B5EF4-FFF2-40B4-BE49-F238E27FC236}">
-                <a16:creationId xmlns:a16="http://schemas.microsoft.com/office/drawing/2014/main" id="{F16BDD05-EAD7-4306-A928-4C55C0964389}"/>
+                <a16:creationId xmlns:a16="http://schemas.microsoft.com/office/drawing/2014/main" id="{C79C4B95-FBBC-48BB-91D4-C5DB4AF7183A}"/>
               </a:ext>
             </a:extLst>
           </p:cNvPr>
@@ -2847,7 +2847,7 @@
           <p:cNvPr id="8" name="">
             <a:extLst xmlns:a="http://schemas.openxmlformats.org/drawingml/2006/main">
               <a:ext uri="{FF2B5EF4-FFF2-40B4-BE49-F238E27FC236}">
-                <a16:creationId xmlns:a16="http://schemas.microsoft.com/office/drawing/2014/main" id="{F33DC723-7F79-4404-AC68-3108A3E9E197}"/>
+                <a16:creationId xmlns:a16="http://schemas.microsoft.com/office/drawing/2014/main" id="{F9D8510E-DAE3-42AE-8FDB-28E3ED000938}"/>
               </a:ext>
             </a:extLst>
           </p:cNvPr>
@@ -2931,7 +2931,7 @@
           <p:cNvPr id="9" name="">
             <a:extLst xmlns:a="http://schemas.openxmlformats.org/drawingml/2006/main">
               <a:ext uri="{FF2B5EF4-FFF2-40B4-BE49-F238E27FC236}">
-                <a16:creationId xmlns:a16="http://schemas.microsoft.com/office/drawing/2014/main" id="{9527509E-09F6-4132-8B3D-A48329E1EBE8}"/>
+                <a16:creationId xmlns:a16="http://schemas.microsoft.com/office/drawing/2014/main" id="{45564341-9A5F-476F-9736-9504DF8A0DF6}"/>
               </a:ext>
             </a:extLst>
           </p:cNvPr>
@@ -2986,7 +2986,7 @@
     </p:spTree>
     <p:extLst>
       <p:ext uri="{BB962C8B-B14F-4D97-AF65-F5344CB8AC3E}">
-        <p14:creationId xmlns:p14="http://schemas.microsoft.com/office/powerpoint/2010/main" val="1916132112"/>
+        <p14:creationId xmlns:p14="http://schemas.microsoft.com/office/powerpoint/2010/main" val="1254341610"/>
       </p:ext>
     </p:extLst>
   </p:cSld>
@@ -3017,7 +3017,7 @@
           <p:cNvPr id="10" name="">
             <a:extLst xmlns:a="http://schemas.openxmlformats.org/drawingml/2006/main">
               <a:ext uri="{FF2B5EF4-FFF2-40B4-BE49-F238E27FC236}">
-                <a16:creationId xmlns:a16="http://schemas.microsoft.com/office/drawing/2014/main" id="{639001BB-9F00-4056-A3B1-7EC0193E3C98}"/>
+                <a16:creationId xmlns:a16="http://schemas.microsoft.com/office/drawing/2014/main" id="{7288B47F-D584-493F-ADA9-EE85020B5DD7}"/>
               </a:ext>
             </a:extLst>
           </p:cNvPr>
@@ -3028,8 +3028,8 @@
         </p:nvSpPr>
         <p:spPr>
           <a:xfrm xmlns:a="http://schemas.openxmlformats.org/drawingml/2006/main">
-            <a:off x="552450" y="333375"/>
-            <a:ext cx="11049000" cy="857250"/>
+            <a:off x="552450" y="266700"/>
+            <a:ext cx="11049000" cy="742950"/>
           </a:xfrm>
           <a:prstGeom xmlns:a="http://schemas.openxmlformats.org/drawingml/2006/main" prst="rect">
             <a:avLst/>
@@ -3040,13 +3040,13 @@
           </a:ln>
         </p:spPr>
         <p:txBody>
-          <a:bodyPr xmlns:a="http://schemas.openxmlformats.org/drawingml/2006/main">
+          <a:bodyPr xmlns:a="http://schemas.openxmlformats.org/drawingml/2006/main" anchor="ctr">
             <a:noAutofit/>
           </a:bodyPr>
           <a:lstStyle xmlns:a="http://schemas.openxmlformats.org/drawingml/2006/main"/>
           <a:p xmlns:a="http://schemas.openxmlformats.org/drawingml/2006/main">
-            <a:pPr>
-              <a:defRPr sz="3150" b="1">
+            <a:pPr algn="l">
+              <a:defRPr sz="2700" b="1">
                 <a:solidFill>
                   <a:srgbClr val="161616"/>
                 </a:solidFill>
@@ -3056,7 +3056,7 @@
               </a:defRPr>
             </a:pPr>
             <a:r>
-              <a:rPr sz="3150" b="1">
+              <a:rPr sz="2700" b="1">
                 <a:solidFill>
                   <a:srgbClr val="161616"/>
                 </a:solidFill>
@@ -3074,7 +3074,7 @@
           <p:cNvPr id="2" name="">
             <a:extLst xmlns:a="http://schemas.openxmlformats.org/drawingml/2006/main">
               <a:ext uri="{FF2B5EF4-FFF2-40B4-BE49-F238E27FC236}">
-                <a16:creationId xmlns:a16="http://schemas.microsoft.com/office/drawing/2014/main" id="{9C847A88-9990-4F98-B580-69EEAAB19D11}"/>
+                <a16:creationId xmlns:a16="http://schemas.microsoft.com/office/drawing/2014/main" id="{BD16A4A8-707A-4219-9F39-5732C9C1F6D5}"/>
               </a:ext>
             </a:extLst>
           </p:cNvPr>
@@ -3135,7 +3135,7 @@
           <p:cNvPr id="3" name="">
             <a:extLst xmlns:a="http://schemas.openxmlformats.org/drawingml/2006/main">
               <a:ext uri="{FF2B5EF4-FFF2-40B4-BE49-F238E27FC236}">
-                <a16:creationId xmlns:a16="http://schemas.microsoft.com/office/drawing/2014/main" id="{34570A59-4034-4126-B6E6-FADD5966B754}"/>
+                <a16:creationId xmlns:a16="http://schemas.microsoft.com/office/drawing/2014/main" id="{1C3B4A7D-6B28-43E2-9771-2B524B8E313B}"/>
               </a:ext>
             </a:extLst>
           </p:cNvPr>
@@ -3165,7 +3165,7 @@
           <p:cNvPr id="4" name="">
             <a:extLst xmlns:a="http://schemas.openxmlformats.org/drawingml/2006/main">
               <a:ext uri="{FF2B5EF4-FFF2-40B4-BE49-F238E27FC236}">
-                <a16:creationId xmlns:a16="http://schemas.microsoft.com/office/drawing/2014/main" id="{DFF87532-E5D9-4EA7-96B3-274CBFF175E0}"/>
+                <a16:creationId xmlns:a16="http://schemas.microsoft.com/office/drawing/2014/main" id="{36696420-63EC-46D7-80A5-AD0CEB87592C}"/>
               </a:ext>
             </a:extLst>
           </p:cNvPr>
@@ -3226,7 +3226,7 @@
           <p:cNvPr id="5" name="">
             <a:extLst xmlns:a="http://schemas.openxmlformats.org/drawingml/2006/main">
               <a:ext uri="{FF2B5EF4-FFF2-40B4-BE49-F238E27FC236}">
-                <a16:creationId xmlns:a16="http://schemas.microsoft.com/office/drawing/2014/main" id="{BE75D6C2-D204-49DC-B33F-32546841242B}"/>
+                <a16:creationId xmlns:a16="http://schemas.microsoft.com/office/drawing/2014/main" id="{7F69C5C9-38AA-4845-A3EF-0E217E3DBEDD}"/>
               </a:ext>
             </a:extLst>
           </p:cNvPr>
@@ -3256,7 +3256,7 @@
           <p:cNvPr id="6" name="">
             <a:extLst xmlns:a="http://schemas.openxmlformats.org/drawingml/2006/main">
               <a:ext uri="{FF2B5EF4-FFF2-40B4-BE49-F238E27FC236}">
-                <a16:creationId xmlns:a16="http://schemas.microsoft.com/office/drawing/2014/main" id="{3212CD8E-5F10-4C6C-B047-870438DFB836}"/>
+                <a16:creationId xmlns:a16="http://schemas.microsoft.com/office/drawing/2014/main" id="{9387304D-DF4F-4CA2-A010-EF4DF2EBA231}"/>
               </a:ext>
             </a:extLst>
           </p:cNvPr>
@@ -3340,7 +3340,7 @@
           <p:cNvPr id="7" name="">
             <a:extLst xmlns:a="http://schemas.openxmlformats.org/drawingml/2006/main">
               <a:ext uri="{FF2B5EF4-FFF2-40B4-BE49-F238E27FC236}">
-                <a16:creationId xmlns:a16="http://schemas.microsoft.com/office/drawing/2014/main" id="{70508F5B-1036-42D6-A800-A56C9B3DABEE}"/>
+                <a16:creationId xmlns:a16="http://schemas.microsoft.com/office/drawing/2014/main" id="{7F781E2F-A504-4120-A2E9-11AF2C6E1D3F}"/>
               </a:ext>
             </a:extLst>
           </p:cNvPr>
@@ -3370,7 +3370,7 @@
           <p:cNvPr id="8" name="">
             <a:extLst xmlns:a="http://schemas.openxmlformats.org/drawingml/2006/main">
               <a:ext uri="{FF2B5EF4-FFF2-40B4-BE49-F238E27FC236}">
-                <a16:creationId xmlns:a16="http://schemas.microsoft.com/office/drawing/2014/main" id="{167A2E5D-D1B6-45C7-A66E-F52D1B598BA6}"/>
+                <a16:creationId xmlns:a16="http://schemas.microsoft.com/office/drawing/2014/main" id="{6DF7849F-4CFC-4B76-874A-17D98A6C971D}"/>
               </a:ext>
             </a:extLst>
           </p:cNvPr>
@@ -3421,7 +3421,7 @@
                 <a:ea typeface="Arial"/>
                 <a:cs typeface="Arial"/>
               </a:rPr>
-              <a:t>Новая BOM</a:t>
+              <a:t>Новая версия</a:t>
             </a:r>
           </a:p>
           <a:p xmlns:a="http://schemas.openxmlformats.org/drawingml/2006/main">
@@ -3454,7 +3454,7 @@
           <p:cNvPr id="9" name="">
             <a:extLst xmlns:a="http://schemas.openxmlformats.org/drawingml/2006/main">
               <a:ext uri="{FF2B5EF4-FFF2-40B4-BE49-F238E27FC236}">
-                <a16:creationId xmlns:a16="http://schemas.microsoft.com/office/drawing/2014/main" id="{BF050F54-8D55-4674-BC31-4B9FB296CF68}"/>
+                <a16:creationId xmlns:a16="http://schemas.microsoft.com/office/drawing/2014/main" id="{4CFE2317-B0B0-4D68-A93B-E21B3AD0F9AF}"/>
               </a:ext>
             </a:extLst>
           </p:cNvPr>
@@ -3501,7 +3501,7 @@
                 <a:ea typeface="Arial"/>
                 <a:cs typeface="Arial"/>
               </a:rPr>
-              <a:t>Одна транзакция на BOM. Конфликт откатывает только её изменение. Успешные карточки становятся STALE.</a:t>
+              <a:t>Одна транзакция на модельный ряд. Конфликт откатывает только её изменение. Карточки изменённых рядов становятся STALE.</a:t>
             </a:r>
           </a:p>
         </p:txBody>
@@ -3509,7 +3509,7 @@
     </p:spTree>
     <p:extLst>
       <p:ext uri="{BB962C8B-B14F-4D97-AF65-F5344CB8AC3E}">
-        <p14:creationId xmlns:p14="http://schemas.microsoft.com/office/powerpoint/2010/main" val="1946760524"/>
+        <p14:creationId xmlns:p14="http://schemas.microsoft.com/office/powerpoint/2010/main" val="1429075156"/>
       </p:ext>
     </p:extLst>
   </p:cSld>
@@ -3540,7 +3540,7 @@
           <p:cNvPr id="6" name="">
             <a:extLst xmlns:a="http://schemas.openxmlformats.org/drawingml/2006/main">
               <a:ext uri="{FF2B5EF4-FFF2-40B4-BE49-F238E27FC236}">
-                <a16:creationId xmlns:a16="http://schemas.microsoft.com/office/drawing/2014/main" id="{59D81765-A7F3-4E2B-80A5-0A807893E8E9}"/>
+                <a16:creationId xmlns:a16="http://schemas.microsoft.com/office/drawing/2014/main" id="{69449C04-0452-4DA6-882F-EA876D964390}"/>
               </a:ext>
             </a:extLst>
           </p:cNvPr>
@@ -3551,8 +3551,8 @@
         </p:nvSpPr>
         <p:spPr>
           <a:xfrm xmlns:a="http://schemas.openxmlformats.org/drawingml/2006/main">
-            <a:off x="552450" y="333375"/>
-            <a:ext cx="11049000" cy="857250"/>
+            <a:off x="552450" y="266700"/>
+            <a:ext cx="11049000" cy="742950"/>
           </a:xfrm>
           <a:prstGeom xmlns:a="http://schemas.openxmlformats.org/drawingml/2006/main" prst="rect">
             <a:avLst/>
@@ -3563,13 +3563,13 @@
           </a:ln>
         </p:spPr>
         <p:txBody>
-          <a:bodyPr xmlns:a="http://schemas.openxmlformats.org/drawingml/2006/main">
+          <a:bodyPr xmlns:a="http://schemas.openxmlformats.org/drawingml/2006/main" anchor="ctr">
             <a:noAutofit/>
           </a:bodyPr>
           <a:lstStyle xmlns:a="http://schemas.openxmlformats.org/drawingml/2006/main"/>
           <a:p xmlns:a="http://schemas.openxmlformats.org/drawingml/2006/main">
-            <a:pPr>
-              <a:defRPr sz="3150" b="1">
+            <a:pPr algn="l">
+              <a:defRPr sz="2700" b="1">
                 <a:solidFill>
                   <a:srgbClr val="161616"/>
                 </a:solidFill>
@@ -3579,7 +3579,7 @@
               </a:defRPr>
             </a:pPr>
             <a:r>
-              <a:rPr sz="3150" b="1">
+              <a:rPr sz="2700" b="1">
                 <a:solidFill>
                   <a:srgbClr val="161616"/>
                 </a:solidFill>
@@ -3597,7 +3597,7 @@
           <p:cNvPr id="2" name="">
             <a:extLst xmlns:a="http://schemas.openxmlformats.org/drawingml/2006/main">
               <a:ext uri="{FF2B5EF4-FFF2-40B4-BE49-F238E27FC236}">
-                <a16:creationId xmlns:a16="http://schemas.microsoft.com/office/drawing/2014/main" id="{50AC948F-3908-4275-A158-1E027D3AFC93}"/>
+                <a16:creationId xmlns:a16="http://schemas.microsoft.com/office/drawing/2014/main" id="{603701E8-0AE4-45B3-B9FA-48133CFAF376}"/>
               </a:ext>
             </a:extLst>
           </p:cNvPr>
@@ -3654,7 +3654,7 @@
           <p:cNvPr id="3" name="">
             <a:extLst xmlns:a="http://schemas.openxmlformats.org/drawingml/2006/main">
               <a:ext uri="{FF2B5EF4-FFF2-40B4-BE49-F238E27FC236}">
-                <a16:creationId xmlns:a16="http://schemas.microsoft.com/office/drawing/2014/main" id="{9D62A969-9591-4E8E-ACA4-23F805382D0E}"/>
+                <a16:creationId xmlns:a16="http://schemas.microsoft.com/office/drawing/2014/main" id="{C4E88922-8B62-41FC-A4FF-87E410DFF536}"/>
               </a:ext>
             </a:extLst>
           </p:cNvPr>
@@ -3711,7 +3711,7 @@
           <p:cNvPr id="4" name="">
             <a:extLst xmlns:a="http://schemas.openxmlformats.org/drawingml/2006/main">
               <a:ext uri="{FF2B5EF4-FFF2-40B4-BE49-F238E27FC236}">
-                <a16:creationId xmlns:a16="http://schemas.microsoft.com/office/drawing/2014/main" id="{5E6A1F93-C54A-46AE-84A6-3D204EE761A2}"/>
+                <a16:creationId xmlns:a16="http://schemas.microsoft.com/office/drawing/2014/main" id="{42D72821-E23A-49F0-B23D-E985FAFED1FB}"/>
               </a:ext>
             </a:extLst>
           </p:cNvPr>
@@ -3768,7 +3768,7 @@
           <p:cNvPr id="5" name="">
             <a:extLst xmlns:a="http://schemas.openxmlformats.org/drawingml/2006/main">
               <a:ext uri="{FF2B5EF4-FFF2-40B4-BE49-F238E27FC236}">
-                <a16:creationId xmlns:a16="http://schemas.microsoft.com/office/drawing/2014/main" id="{7F2A4EDD-A1C3-4C8C-85EA-C39EC8764925}"/>
+                <a16:creationId xmlns:a16="http://schemas.microsoft.com/office/drawing/2014/main" id="{591F7C11-F093-4D10-ACD2-2EF1DE5EAFD4}"/>
               </a:ext>
             </a:extLst>
           </p:cNvPr>
@@ -3815,7 +3815,7 @@
                 <a:ea typeface="Arial"/>
                 <a:cs typeface="Arial"/>
               </a:rPr>
-              <a:t>Производительность пакета 1000 BOM пока является целевым требованием.</a:t>
+              <a:t>Производительность пакета 1000 модельных рядов пока является целевым требованием.</a:t>
             </a:r>
           </a:p>
         </p:txBody>
@@ -3823,7 +3823,7 @@
     </p:spTree>
     <p:extLst>
       <p:ext uri="{BB962C8B-B14F-4D97-AF65-F5344CB8AC3E}">
-        <p14:creationId xmlns:p14="http://schemas.microsoft.com/office/powerpoint/2010/main" val="158597662"/>
+        <p14:creationId xmlns:p14="http://schemas.microsoft.com/office/powerpoint/2010/main" val="220510501"/>
       </p:ext>
     </p:extLst>
   </p:cSld>

--- a/4/РОП/Практики_1-8/Презентации/РОП_Практическая_5_АлбахтинИВ.pptx
+++ b/4/РОП/Практики_1-8/Презентации/РОП_Практическая_5_АлбахтинИВ.pptx
@@ -2,18 +2,18 @@
 <file path=ppt/presentation.xml><?xml version="1.0" encoding="utf-8"?>
 <p:presentation xmlns:p="http://schemas.openxmlformats.org/presentationml/2006/main">
   <p:sldMasterIdLst>
-    <p:sldMasterId xmlns:r="http://schemas.openxmlformats.org/officeDocument/2006/relationships" id="2147483648" r:id="R3b355868a12148be"/>
+    <p:sldMasterId xmlns:r="http://schemas.openxmlformats.org/officeDocument/2006/relationships" id="2147483648" r:id="Red26b6e6350c4c49"/>
   </p:sldMasterIdLst>
   <p:notesMasterIdLst>
-    <p:notesMasterId xmlns:r="http://schemas.openxmlformats.org/officeDocument/2006/relationships" r:id="Rd05b772f255d4d5e"/>
+    <p:notesMasterId xmlns:r="http://schemas.openxmlformats.org/officeDocument/2006/relationships" r:id="Re5a2a64c5e604f51"/>
   </p:notesMasterIdLst>
   <p:sldIdLst>
-    <p:sldId xmlns:r="http://schemas.openxmlformats.org/officeDocument/2006/relationships" id="256" r:id="R4f6a235666bf4fcc"/>
-    <p:sldId xmlns:r="http://schemas.openxmlformats.org/officeDocument/2006/relationships" id="257" r:id="R7365e3a801e14519"/>
-    <p:sldId xmlns:r="http://schemas.openxmlformats.org/officeDocument/2006/relationships" id="258" r:id="Rd8fbc8d545604be6"/>
-    <p:sldId xmlns:r="http://schemas.openxmlformats.org/officeDocument/2006/relationships" id="259" r:id="Rdad171491c204eaa"/>
-    <p:sldId xmlns:r="http://schemas.openxmlformats.org/officeDocument/2006/relationships" id="260" r:id="Raa4b75c129144faa"/>
-    <p:sldId xmlns:r="http://schemas.openxmlformats.org/officeDocument/2006/relationships" id="261" r:id="R2d9d1459c38246b7"/>
+    <p:sldId xmlns:r="http://schemas.openxmlformats.org/officeDocument/2006/relationships" id="256" r:id="Rcee9f854388b4feb"/>
+    <p:sldId xmlns:r="http://schemas.openxmlformats.org/officeDocument/2006/relationships" id="257" r:id="R04e783fc58e24c75"/>
+    <p:sldId xmlns:r="http://schemas.openxmlformats.org/officeDocument/2006/relationships" id="258" r:id="R7495e236b4994150"/>
+    <p:sldId xmlns:r="http://schemas.openxmlformats.org/officeDocument/2006/relationships" id="259" r:id="R1b0b0cfdf8d640c9"/>
+    <p:sldId xmlns:r="http://schemas.openxmlformats.org/officeDocument/2006/relationships" id="260" r:id="R76f2d81365bd4528"/>
+    <p:sldId xmlns:r="http://schemas.openxmlformats.org/officeDocument/2006/relationships" id="261" r:id="R96c385fb2c9e4ce1"/>
   </p:sldIdLst>
   <p:sldSz cx="12192000" cy="6858000"/>
   <p:notesSz cx="6858000" cy="9144000"/>
@@ -203,16 +203,16 @@
         <a:srgbClr val="96607D"/>
       </a:folHlink>
     </a:clrScheme>
-    <a:fontScheme name="Office">
+    <a:fontScheme name="">
       <a:majorFont>
-        <a:latin typeface="Calibri Light"/>
-        <a:ea typeface="Calibri Light"/>
-        <a:cs typeface="Calibri Light"/>
+        <a:latin typeface="Aptos"/>
+        <a:ea typeface=""/>
+        <a:cs typeface=""/>
       </a:majorFont>
       <a:minorFont>
-        <a:latin typeface="Calibri"/>
-        <a:ea typeface="Calibri"/>
-        <a:cs typeface="Calibri"/>
+        <a:latin typeface="Aptos"/>
+        <a:ea typeface=""/>
+        <a:cs typeface=""/>
       </a:minorFont>
     </a:fontScheme>
     <a:fmtScheme name="ChatGPT">
@@ -869,6 +869,1661 @@
       <p:grpSpPr>
         <a:xfrm xmlns:a="http://schemas.openxmlformats.org/drawingml/2006/main"/>
       </p:grpSpPr>
+      <p:sp>
+        <p:nvSpPr>
+          <p:cNvPr id="3" name="Title">
+            <a:extLst xmlns:a="http://schemas.openxmlformats.org/drawingml/2006/main">
+              <a:ext uri="{FF2B5EF4-FFF2-40B4-BE49-F238E27FC236}">
+                <a16:creationId xmlns:a16="http://schemas.microsoft.com/office/drawing/2014/main" id="{65C1E95F-8DA4-4217-9AF8-62D18472E2D6}"/>
+              </a:ext>
+            </a:extLst>
+          </p:cNvPr>
+          <p:cNvSpPr>
+            <a:spLocks xmlns:a="http://schemas.openxmlformats.org/drawingml/2006/main" noGrp="1"/>
+          </p:cNvSpPr>
+          <p:nvPr>
+            <p:ph type="title" idx="0"/>
+          </p:nvPr>
+        </p:nvSpPr>
+        <p:spPr>
+          <a:xfrm xmlns:a="http://schemas.openxmlformats.org/drawingml/2006/main">
+            <a:off x="1219200" y="2590800"/>
+            <a:ext cx="9753600" cy="990600"/>
+          </a:xfrm>
+          <a:prstGeom xmlns:a="http://schemas.openxmlformats.org/drawingml/2006/main" prst="rect">
+            <a:avLst/>
+          </a:prstGeom>
+          <a:noFill xmlns:a="http://schemas.openxmlformats.org/drawingml/2006/main"/>
+          <a:ln xmlns:a="http://schemas.openxmlformats.org/drawingml/2006/main">
+            <a:noFill/>
+            <a:prstDash val="solid"/>
+          </a:ln>
+        </p:spPr>
+        <p:txBody>
+          <a:bodyPr xmlns:a="http://schemas.openxmlformats.org/drawingml/2006/main" wrap="square" lIns="0" tIns="0" rIns="0" bIns="0" anchor="ctr">
+            <a:normAutofit/>
+          </a:bodyPr>
+          <a:lstStyle xmlns:a="http://schemas.openxmlformats.org/drawingml/2006/main">
+            <a:defPPr algn="ctr">
+              <a:defRPr sz="4800" b="1">
+                <a:solidFill>
+                  <a:schemeClr val="tx1"/>
+                </a:solidFill>
+                <a:latin typeface="+mj-lt"/>
+                <a:ea typeface="+mj-lt"/>
+                <a:cs typeface="+mj-lt"/>
+              </a:defRPr>
+            </a:defPPr>
+            <a:lvl1pPr marL="0" indent="0">
+              <a:lnSpc>
+                <a:spcPct val="110000"/>
+              </a:lnSpc>
+              <a:spcBef>
+                <a:spcPts val="0"/>
+              </a:spcBef>
+              <a:spcAft>
+                <a:spcPts val="0"/>
+              </a:spcAft>
+              <a:buNone/>
+            </a:lvl1pPr>
+            <a:lvl2pPr marL="0" indent="0">
+              <a:lnSpc>
+                <a:spcPct val="110000"/>
+              </a:lnSpc>
+              <a:spcBef>
+                <a:spcPts val="0"/>
+              </a:spcBef>
+              <a:spcAft>
+                <a:spcPts val="0"/>
+              </a:spcAft>
+              <a:buNone/>
+            </a:lvl2pPr>
+            <a:lvl3pPr marL="0" indent="0">
+              <a:lnSpc>
+                <a:spcPct val="110000"/>
+              </a:lnSpc>
+              <a:spcBef>
+                <a:spcPts val="0"/>
+              </a:spcBef>
+              <a:spcAft>
+                <a:spcPts val="0"/>
+              </a:spcAft>
+              <a:buNone/>
+            </a:lvl3pPr>
+            <a:lvl4pPr marL="0" indent="0">
+              <a:lnSpc>
+                <a:spcPct val="110000"/>
+              </a:lnSpc>
+              <a:spcBef>
+                <a:spcPts val="0"/>
+              </a:spcBef>
+              <a:spcAft>
+                <a:spcPts val="0"/>
+              </a:spcAft>
+              <a:buNone/>
+            </a:lvl4pPr>
+            <a:lvl5pPr marL="0" indent="0">
+              <a:lnSpc>
+                <a:spcPct val="110000"/>
+              </a:lnSpc>
+              <a:spcBef>
+                <a:spcPts val="0"/>
+              </a:spcBef>
+              <a:spcAft>
+                <a:spcPts val="0"/>
+              </a:spcAft>
+              <a:buNone/>
+            </a:lvl5pPr>
+            <a:lvl6pPr marL="0" indent="0">
+              <a:lnSpc>
+                <a:spcPct val="110000"/>
+              </a:lnSpc>
+              <a:spcBef>
+                <a:spcPts val="0"/>
+              </a:spcBef>
+              <a:spcAft>
+                <a:spcPts val="0"/>
+              </a:spcAft>
+              <a:buNone/>
+            </a:lvl6pPr>
+            <a:lvl7pPr marL="0" indent="0">
+              <a:lnSpc>
+                <a:spcPct val="110000"/>
+              </a:lnSpc>
+              <a:spcBef>
+                <a:spcPts val="0"/>
+              </a:spcBef>
+              <a:spcAft>
+                <a:spcPts val="0"/>
+              </a:spcAft>
+              <a:buNone/>
+            </a:lvl7pPr>
+            <a:lvl8pPr marL="0" indent="0">
+              <a:lnSpc>
+                <a:spcPct val="110000"/>
+              </a:lnSpc>
+              <a:spcBef>
+                <a:spcPts val="0"/>
+              </a:spcBef>
+              <a:spcAft>
+                <a:spcPts val="0"/>
+              </a:spcAft>
+              <a:buNone/>
+            </a:lvl8pPr>
+            <a:lvl9pPr marL="0" indent="0">
+              <a:lnSpc>
+                <a:spcPct val="110000"/>
+              </a:lnSpc>
+              <a:spcBef>
+                <a:spcPts val="0"/>
+              </a:spcBef>
+              <a:spcAft>
+                <a:spcPts val="0"/>
+              </a:spcAft>
+              <a:buNone/>
+            </a:lvl9pPr>
+          </a:lstStyle>
+          <a:p xmlns:a="http://schemas.openxmlformats.org/drawingml/2006/main"/>
+        </p:txBody>
+      </p:sp>
+      <p:sp>
+        <p:nvSpPr>
+          <p:cNvPr id="2" name="Subtitle">
+            <a:extLst xmlns:a="http://schemas.openxmlformats.org/drawingml/2006/main">
+              <a:ext uri="{FF2B5EF4-FFF2-40B4-BE49-F238E27FC236}">
+                <a16:creationId xmlns:a16="http://schemas.microsoft.com/office/drawing/2014/main" id="{40DEA636-B5E0-4F7F-AE1A-7A7AD49743C0}"/>
+              </a:ext>
+            </a:extLst>
+          </p:cNvPr>
+          <p:cNvSpPr>
+            <a:spLocks xmlns:a="http://schemas.openxmlformats.org/drawingml/2006/main" noGrp="1"/>
+          </p:cNvSpPr>
+          <p:nvPr>
+            <p:ph type="subTitle" idx="1"/>
+          </p:nvPr>
+        </p:nvSpPr>
+        <p:spPr>
+          <a:xfrm xmlns:a="http://schemas.openxmlformats.org/drawingml/2006/main">
+            <a:off x="1828800" y="3771900"/>
+            <a:ext cx="8534400" cy="762000"/>
+          </a:xfrm>
+          <a:prstGeom xmlns:a="http://schemas.openxmlformats.org/drawingml/2006/main" prst="rect">
+            <a:avLst/>
+          </a:prstGeom>
+          <a:noFill xmlns:a="http://schemas.openxmlformats.org/drawingml/2006/main"/>
+          <a:ln xmlns:a="http://schemas.openxmlformats.org/drawingml/2006/main">
+            <a:noFill/>
+            <a:prstDash val="solid"/>
+          </a:ln>
+        </p:spPr>
+        <p:txBody>
+          <a:bodyPr xmlns:a="http://schemas.openxmlformats.org/drawingml/2006/main" wrap="square" lIns="0" tIns="0" rIns="0" bIns="0" anchor="ctr">
+            <a:normAutofit/>
+          </a:bodyPr>
+          <a:lstStyle xmlns:a="http://schemas.openxmlformats.org/drawingml/2006/main">
+            <a:defPPr algn="ctr">
+              <a:defRPr sz="2100" b="0">
+                <a:solidFill>
+                  <a:schemeClr val="tx1"/>
+                </a:solidFill>
+                <a:latin typeface="+mn-lt"/>
+                <a:ea typeface="+mn-lt"/>
+                <a:cs typeface="+mn-lt"/>
+              </a:defRPr>
+            </a:defPPr>
+            <a:lvl1pPr marL="0" indent="0">
+              <a:lnSpc>
+                <a:spcPct val="110000"/>
+              </a:lnSpc>
+              <a:spcBef>
+                <a:spcPts val="0"/>
+              </a:spcBef>
+              <a:spcAft>
+                <a:spcPts val="0"/>
+              </a:spcAft>
+              <a:buNone/>
+            </a:lvl1pPr>
+            <a:lvl2pPr marL="0" indent="0">
+              <a:lnSpc>
+                <a:spcPct val="110000"/>
+              </a:lnSpc>
+              <a:spcBef>
+                <a:spcPts val="0"/>
+              </a:spcBef>
+              <a:spcAft>
+                <a:spcPts val="0"/>
+              </a:spcAft>
+              <a:buNone/>
+            </a:lvl2pPr>
+            <a:lvl3pPr marL="0" indent="0">
+              <a:lnSpc>
+                <a:spcPct val="110000"/>
+              </a:lnSpc>
+              <a:spcBef>
+                <a:spcPts val="0"/>
+              </a:spcBef>
+              <a:spcAft>
+                <a:spcPts val="0"/>
+              </a:spcAft>
+              <a:buNone/>
+            </a:lvl3pPr>
+            <a:lvl4pPr marL="0" indent="0">
+              <a:lnSpc>
+                <a:spcPct val="110000"/>
+              </a:lnSpc>
+              <a:spcBef>
+                <a:spcPts val="0"/>
+              </a:spcBef>
+              <a:spcAft>
+                <a:spcPts val="0"/>
+              </a:spcAft>
+              <a:buNone/>
+            </a:lvl4pPr>
+            <a:lvl5pPr marL="0" indent="0">
+              <a:lnSpc>
+                <a:spcPct val="110000"/>
+              </a:lnSpc>
+              <a:spcBef>
+                <a:spcPts val="0"/>
+              </a:spcBef>
+              <a:spcAft>
+                <a:spcPts val="0"/>
+              </a:spcAft>
+              <a:buNone/>
+            </a:lvl5pPr>
+            <a:lvl6pPr marL="0" indent="0">
+              <a:lnSpc>
+                <a:spcPct val="110000"/>
+              </a:lnSpc>
+              <a:spcBef>
+                <a:spcPts val="0"/>
+              </a:spcBef>
+              <a:spcAft>
+                <a:spcPts val="0"/>
+              </a:spcAft>
+              <a:buNone/>
+            </a:lvl6pPr>
+            <a:lvl7pPr marL="0" indent="0">
+              <a:lnSpc>
+                <a:spcPct val="110000"/>
+              </a:lnSpc>
+              <a:spcBef>
+                <a:spcPts val="0"/>
+              </a:spcBef>
+              <a:spcAft>
+                <a:spcPts val="0"/>
+              </a:spcAft>
+              <a:buNone/>
+            </a:lvl7pPr>
+            <a:lvl8pPr marL="0" indent="0">
+              <a:lnSpc>
+                <a:spcPct val="110000"/>
+              </a:lnSpc>
+              <a:spcBef>
+                <a:spcPts val="0"/>
+              </a:spcBef>
+              <a:spcAft>
+                <a:spcPts val="0"/>
+              </a:spcAft>
+              <a:buNone/>
+            </a:lvl8pPr>
+            <a:lvl9pPr marL="0" indent="0">
+              <a:lnSpc>
+                <a:spcPct val="110000"/>
+              </a:lnSpc>
+              <a:spcBef>
+                <a:spcPts val="0"/>
+              </a:spcBef>
+              <a:spcAft>
+                <a:spcPts val="0"/>
+              </a:spcAft>
+              <a:buNone/>
+            </a:lvl9pPr>
+          </a:lstStyle>
+          <a:p xmlns:a="http://schemas.openxmlformats.org/drawingml/2006/main"/>
+        </p:txBody>
+      </p:sp>
+    </p:spTree>
+  </p:cSld>
+</p:sldLayout>
+</file>
+
+<file path=ppt/slideLayouts/slideLayout2.xml><?xml version="1.0" encoding="utf-8"?>
+<p:sldLayout xmlns:p="http://schemas.openxmlformats.org/presentationml/2006/main">
+  <p:cSld name="Section Header">
+    <p:spTree>
+      <p:nvGrpSpPr>
+        <p:cNvPr id="1" name=""/>
+        <p:cNvGrpSpPr/>
+        <p:nvPr/>
+      </p:nvGrpSpPr>
+      <p:grpSpPr>
+        <a:xfrm xmlns:a="http://schemas.openxmlformats.org/drawingml/2006/main"/>
+      </p:grpSpPr>
+      <p:sp>
+        <p:nvSpPr>
+          <p:cNvPr id="2" name="Section title">
+            <a:extLst xmlns:a="http://schemas.openxmlformats.org/drawingml/2006/main">
+              <a:ext uri="{FF2B5EF4-FFF2-40B4-BE49-F238E27FC236}">
+                <a16:creationId xmlns:a16="http://schemas.microsoft.com/office/drawing/2014/main" id="{9F140BDF-280D-4B00-B2E3-4FD79433BBA2}"/>
+              </a:ext>
+            </a:extLst>
+          </p:cNvPr>
+          <p:cNvSpPr>
+            <a:spLocks xmlns:a="http://schemas.openxmlformats.org/drawingml/2006/main" noGrp="1"/>
+          </p:cNvSpPr>
+          <p:nvPr>
+            <p:ph type="title" idx="0"/>
+          </p:nvPr>
+        </p:nvSpPr>
+        <p:spPr>
+          <a:xfrm xmlns:a="http://schemas.openxmlformats.org/drawingml/2006/main">
+            <a:off x="1219200" y="2857500"/>
+            <a:ext cx="9753600" cy="1143000"/>
+          </a:xfrm>
+          <a:prstGeom xmlns:a="http://schemas.openxmlformats.org/drawingml/2006/main" prst="rect">
+            <a:avLst/>
+          </a:prstGeom>
+          <a:noFill xmlns:a="http://schemas.openxmlformats.org/drawingml/2006/main"/>
+          <a:ln xmlns:a="http://schemas.openxmlformats.org/drawingml/2006/main">
+            <a:noFill/>
+            <a:prstDash val="solid"/>
+          </a:ln>
+        </p:spPr>
+        <p:txBody>
+          <a:bodyPr xmlns:a="http://schemas.openxmlformats.org/drawingml/2006/main" wrap="square" lIns="0" tIns="0" rIns="0" bIns="0" anchor="ctr">
+            <a:normAutofit/>
+          </a:bodyPr>
+          <a:lstStyle xmlns:a="http://schemas.openxmlformats.org/drawingml/2006/main">
+            <a:defPPr algn="ctr">
+              <a:defRPr sz="4200" b="1">
+                <a:solidFill>
+                  <a:schemeClr val="tx1"/>
+                </a:solidFill>
+                <a:latin typeface="+mj-lt"/>
+                <a:ea typeface="+mj-lt"/>
+                <a:cs typeface="+mj-lt"/>
+              </a:defRPr>
+            </a:defPPr>
+            <a:lvl1pPr marL="0" indent="0">
+              <a:lnSpc>
+                <a:spcPct val="110000"/>
+              </a:lnSpc>
+              <a:spcBef>
+                <a:spcPts val="0"/>
+              </a:spcBef>
+              <a:spcAft>
+                <a:spcPts val="0"/>
+              </a:spcAft>
+              <a:buNone/>
+            </a:lvl1pPr>
+            <a:lvl2pPr marL="0" indent="0">
+              <a:lnSpc>
+                <a:spcPct val="110000"/>
+              </a:lnSpc>
+              <a:spcBef>
+                <a:spcPts val="0"/>
+              </a:spcBef>
+              <a:spcAft>
+                <a:spcPts val="0"/>
+              </a:spcAft>
+              <a:buNone/>
+            </a:lvl2pPr>
+            <a:lvl3pPr marL="0" indent="0">
+              <a:lnSpc>
+                <a:spcPct val="110000"/>
+              </a:lnSpc>
+              <a:spcBef>
+                <a:spcPts val="0"/>
+              </a:spcBef>
+              <a:spcAft>
+                <a:spcPts val="0"/>
+              </a:spcAft>
+              <a:buNone/>
+            </a:lvl3pPr>
+            <a:lvl4pPr marL="0" indent="0">
+              <a:lnSpc>
+                <a:spcPct val="110000"/>
+              </a:lnSpc>
+              <a:spcBef>
+                <a:spcPts val="0"/>
+              </a:spcBef>
+              <a:spcAft>
+                <a:spcPts val="0"/>
+              </a:spcAft>
+              <a:buNone/>
+            </a:lvl4pPr>
+            <a:lvl5pPr marL="0" indent="0">
+              <a:lnSpc>
+                <a:spcPct val="110000"/>
+              </a:lnSpc>
+              <a:spcBef>
+                <a:spcPts val="0"/>
+              </a:spcBef>
+              <a:spcAft>
+                <a:spcPts val="0"/>
+              </a:spcAft>
+              <a:buNone/>
+            </a:lvl5pPr>
+            <a:lvl6pPr marL="0" indent="0">
+              <a:lnSpc>
+                <a:spcPct val="110000"/>
+              </a:lnSpc>
+              <a:spcBef>
+                <a:spcPts val="0"/>
+              </a:spcBef>
+              <a:spcAft>
+                <a:spcPts val="0"/>
+              </a:spcAft>
+              <a:buNone/>
+            </a:lvl6pPr>
+            <a:lvl7pPr marL="0" indent="0">
+              <a:lnSpc>
+                <a:spcPct val="110000"/>
+              </a:lnSpc>
+              <a:spcBef>
+                <a:spcPts val="0"/>
+              </a:spcBef>
+              <a:spcAft>
+                <a:spcPts val="0"/>
+              </a:spcAft>
+              <a:buNone/>
+            </a:lvl7pPr>
+            <a:lvl8pPr marL="0" indent="0">
+              <a:lnSpc>
+                <a:spcPct val="110000"/>
+              </a:lnSpc>
+              <a:spcBef>
+                <a:spcPts val="0"/>
+              </a:spcBef>
+              <a:spcAft>
+                <a:spcPts val="0"/>
+              </a:spcAft>
+              <a:buNone/>
+            </a:lvl8pPr>
+            <a:lvl9pPr marL="0" indent="0">
+              <a:lnSpc>
+                <a:spcPct val="110000"/>
+              </a:lnSpc>
+              <a:spcBef>
+                <a:spcPts val="0"/>
+              </a:spcBef>
+              <a:spcAft>
+                <a:spcPts val="0"/>
+              </a:spcAft>
+              <a:buNone/>
+            </a:lvl9pPr>
+          </a:lstStyle>
+          <a:p xmlns:a="http://schemas.openxmlformats.org/drawingml/2006/main"/>
+        </p:txBody>
+      </p:sp>
+    </p:spTree>
+  </p:cSld>
+</p:sldLayout>
+</file>
+
+<file path=ppt/slideLayouts/slideLayout3.xml><?xml version="1.0" encoding="utf-8"?>
+<p:sldLayout xmlns:p="http://schemas.openxmlformats.org/presentationml/2006/main">
+  <p:cSld name="Title and Body">
+    <p:spTree>
+      <p:nvGrpSpPr>
+        <p:cNvPr id="1" name=""/>
+        <p:cNvGrpSpPr/>
+        <p:nvPr/>
+      </p:nvGrpSpPr>
+      <p:grpSpPr>
+        <a:xfrm xmlns:a="http://schemas.openxmlformats.org/drawingml/2006/main"/>
+      </p:grpSpPr>
+      <p:sp>
+        <p:nvSpPr>
+          <p:cNvPr id="3" name="Title">
+            <a:extLst xmlns:a="http://schemas.openxmlformats.org/drawingml/2006/main">
+              <a:ext uri="{FF2B5EF4-FFF2-40B4-BE49-F238E27FC236}">
+                <a16:creationId xmlns:a16="http://schemas.microsoft.com/office/drawing/2014/main" id="{4526BF8E-72E1-4834-B293-AC17E42A34E6}"/>
+              </a:ext>
+            </a:extLst>
+          </p:cNvPr>
+          <p:cNvSpPr>
+            <a:spLocks xmlns:a="http://schemas.openxmlformats.org/drawingml/2006/main" noGrp="1"/>
+          </p:cNvSpPr>
+          <p:nvPr>
+            <p:ph type="title" idx="0"/>
+          </p:nvPr>
+        </p:nvSpPr>
+        <p:spPr>
+          <a:xfrm xmlns:a="http://schemas.openxmlformats.org/drawingml/2006/main">
+            <a:off x="685800" y="533400"/>
+            <a:ext cx="10820400" cy="838200"/>
+          </a:xfrm>
+          <a:prstGeom xmlns:a="http://schemas.openxmlformats.org/drawingml/2006/main" prst="rect">
+            <a:avLst/>
+          </a:prstGeom>
+          <a:noFill xmlns:a="http://schemas.openxmlformats.org/drawingml/2006/main"/>
+          <a:ln xmlns:a="http://schemas.openxmlformats.org/drawingml/2006/main">
+            <a:noFill/>
+            <a:prstDash val="solid"/>
+          </a:ln>
+        </p:spPr>
+        <p:txBody>
+          <a:bodyPr xmlns:a="http://schemas.openxmlformats.org/drawingml/2006/main" wrap="square" lIns="0" tIns="0" rIns="0" bIns="0" anchor="t">
+            <a:normAutofit/>
+          </a:bodyPr>
+          <a:lstStyle xmlns:a="http://schemas.openxmlformats.org/drawingml/2006/main">
+            <a:defPPr algn="l">
+              <a:defRPr sz="3300" b="1">
+                <a:solidFill>
+                  <a:schemeClr val="tx1"/>
+                </a:solidFill>
+                <a:latin typeface="+mj-lt"/>
+                <a:ea typeface="+mj-lt"/>
+                <a:cs typeface="+mj-lt"/>
+              </a:defRPr>
+            </a:defPPr>
+            <a:lvl1pPr marL="0" indent="0">
+              <a:lnSpc>
+                <a:spcPct val="110000"/>
+              </a:lnSpc>
+              <a:spcBef>
+                <a:spcPts val="0"/>
+              </a:spcBef>
+              <a:spcAft>
+                <a:spcPts val="0"/>
+              </a:spcAft>
+              <a:buNone/>
+            </a:lvl1pPr>
+            <a:lvl2pPr marL="0" indent="0">
+              <a:lnSpc>
+                <a:spcPct val="110000"/>
+              </a:lnSpc>
+              <a:spcBef>
+                <a:spcPts val="0"/>
+              </a:spcBef>
+              <a:spcAft>
+                <a:spcPts val="0"/>
+              </a:spcAft>
+              <a:buNone/>
+            </a:lvl2pPr>
+            <a:lvl3pPr marL="0" indent="0">
+              <a:lnSpc>
+                <a:spcPct val="110000"/>
+              </a:lnSpc>
+              <a:spcBef>
+                <a:spcPts val="0"/>
+              </a:spcBef>
+              <a:spcAft>
+                <a:spcPts val="0"/>
+              </a:spcAft>
+              <a:buNone/>
+            </a:lvl3pPr>
+            <a:lvl4pPr marL="0" indent="0">
+              <a:lnSpc>
+                <a:spcPct val="110000"/>
+              </a:lnSpc>
+              <a:spcBef>
+                <a:spcPts val="0"/>
+              </a:spcBef>
+              <a:spcAft>
+                <a:spcPts val="0"/>
+              </a:spcAft>
+              <a:buNone/>
+            </a:lvl4pPr>
+            <a:lvl5pPr marL="0" indent="0">
+              <a:lnSpc>
+                <a:spcPct val="110000"/>
+              </a:lnSpc>
+              <a:spcBef>
+                <a:spcPts val="0"/>
+              </a:spcBef>
+              <a:spcAft>
+                <a:spcPts val="0"/>
+              </a:spcAft>
+              <a:buNone/>
+            </a:lvl5pPr>
+            <a:lvl6pPr marL="0" indent="0">
+              <a:lnSpc>
+                <a:spcPct val="110000"/>
+              </a:lnSpc>
+              <a:spcBef>
+                <a:spcPts val="0"/>
+              </a:spcBef>
+              <a:spcAft>
+                <a:spcPts val="0"/>
+              </a:spcAft>
+              <a:buNone/>
+            </a:lvl6pPr>
+            <a:lvl7pPr marL="0" indent="0">
+              <a:lnSpc>
+                <a:spcPct val="110000"/>
+              </a:lnSpc>
+              <a:spcBef>
+                <a:spcPts val="0"/>
+              </a:spcBef>
+              <a:spcAft>
+                <a:spcPts val="0"/>
+              </a:spcAft>
+              <a:buNone/>
+            </a:lvl7pPr>
+            <a:lvl8pPr marL="0" indent="0">
+              <a:lnSpc>
+                <a:spcPct val="110000"/>
+              </a:lnSpc>
+              <a:spcBef>
+                <a:spcPts val="0"/>
+              </a:spcBef>
+              <a:spcAft>
+                <a:spcPts val="0"/>
+              </a:spcAft>
+              <a:buNone/>
+            </a:lvl8pPr>
+            <a:lvl9pPr marL="0" indent="0">
+              <a:lnSpc>
+                <a:spcPct val="110000"/>
+              </a:lnSpc>
+              <a:spcBef>
+                <a:spcPts val="0"/>
+              </a:spcBef>
+              <a:spcAft>
+                <a:spcPts val="0"/>
+              </a:spcAft>
+              <a:buNone/>
+            </a:lvl9pPr>
+          </a:lstStyle>
+          <a:p xmlns:a="http://schemas.openxmlformats.org/drawingml/2006/main"/>
+        </p:txBody>
+      </p:sp>
+      <p:sp>
+        <p:nvSpPr>
+          <p:cNvPr id="2" name="Body">
+            <a:extLst xmlns:a="http://schemas.openxmlformats.org/drawingml/2006/main">
+              <a:ext uri="{FF2B5EF4-FFF2-40B4-BE49-F238E27FC236}">
+                <a16:creationId xmlns:a16="http://schemas.microsoft.com/office/drawing/2014/main" id="{36F104CC-07DC-4E87-8D7F-29233A769817}"/>
+              </a:ext>
+            </a:extLst>
+          </p:cNvPr>
+          <p:cNvSpPr>
+            <a:spLocks xmlns:a="http://schemas.openxmlformats.org/drawingml/2006/main" noGrp="1"/>
+          </p:cNvSpPr>
+          <p:nvPr>
+            <p:ph type="body" idx="1"/>
+          </p:nvPr>
+        </p:nvSpPr>
+        <p:spPr>
+          <a:xfrm xmlns:a="http://schemas.openxmlformats.org/drawingml/2006/main">
+            <a:off x="685800" y="1905000"/>
+            <a:ext cx="10820400" cy="4267200"/>
+          </a:xfrm>
+          <a:prstGeom xmlns:a="http://schemas.openxmlformats.org/drawingml/2006/main" prst="rect">
+            <a:avLst/>
+          </a:prstGeom>
+          <a:noFill xmlns:a="http://schemas.openxmlformats.org/drawingml/2006/main"/>
+          <a:ln xmlns:a="http://schemas.openxmlformats.org/drawingml/2006/main">
+            <a:noFill/>
+            <a:prstDash val="solid"/>
+          </a:ln>
+        </p:spPr>
+        <p:txBody>
+          <a:bodyPr xmlns:a="http://schemas.openxmlformats.org/drawingml/2006/main" wrap="square" lIns="0" tIns="0" rIns="0" bIns="0" anchor="t">
+            <a:normAutofit/>
+          </a:bodyPr>
+          <a:lstStyle xmlns:a="http://schemas.openxmlformats.org/drawingml/2006/main">
+            <a:defPPr algn="l">
+              <a:defRPr sz="2250" b="0">
+                <a:solidFill>
+                  <a:schemeClr val="tx1"/>
+                </a:solidFill>
+                <a:latin typeface="+mn-lt"/>
+                <a:ea typeface="+mn-lt"/>
+                <a:cs typeface="+mn-lt"/>
+              </a:defRPr>
+            </a:defPPr>
+            <a:lvl1pPr marL="228600" indent="-228600">
+              <a:lnSpc>
+                <a:spcPct val="110000"/>
+              </a:lnSpc>
+              <a:spcBef>
+                <a:spcPts val="0"/>
+              </a:spcBef>
+              <a:spcAft>
+                <a:spcPts val="1200"/>
+              </a:spcAft>
+              <a:buChar char="•"/>
+            </a:lvl1pPr>
+            <a:lvl2pPr marL="533400" indent="-228600">
+              <a:lnSpc>
+                <a:spcPct val="110000"/>
+              </a:lnSpc>
+              <a:spcBef>
+                <a:spcPts val="0"/>
+              </a:spcBef>
+              <a:spcAft>
+                <a:spcPts val="1200"/>
+              </a:spcAft>
+              <a:buChar char="•"/>
+            </a:lvl2pPr>
+            <a:lvl3pPr marL="838200" indent="-228600">
+              <a:lnSpc>
+                <a:spcPct val="110000"/>
+              </a:lnSpc>
+              <a:spcBef>
+                <a:spcPts val="0"/>
+              </a:spcBef>
+              <a:spcAft>
+                <a:spcPts val="1200"/>
+              </a:spcAft>
+              <a:buChar char="•"/>
+            </a:lvl3pPr>
+            <a:lvl4pPr marL="1143000" indent="-228600">
+              <a:lnSpc>
+                <a:spcPct val="110000"/>
+              </a:lnSpc>
+              <a:spcBef>
+                <a:spcPts val="0"/>
+              </a:spcBef>
+              <a:spcAft>
+                <a:spcPts val="1200"/>
+              </a:spcAft>
+              <a:buChar char="•"/>
+            </a:lvl4pPr>
+            <a:lvl5pPr marL="1447800" indent="-228600">
+              <a:lnSpc>
+                <a:spcPct val="110000"/>
+              </a:lnSpc>
+              <a:spcBef>
+                <a:spcPts val="0"/>
+              </a:spcBef>
+              <a:spcAft>
+                <a:spcPts val="1200"/>
+              </a:spcAft>
+              <a:buChar char="•"/>
+            </a:lvl5pPr>
+            <a:lvl6pPr marL="1752600" indent="-228600">
+              <a:lnSpc>
+                <a:spcPct val="110000"/>
+              </a:lnSpc>
+              <a:spcBef>
+                <a:spcPts val="0"/>
+              </a:spcBef>
+              <a:spcAft>
+                <a:spcPts val="1200"/>
+              </a:spcAft>
+              <a:buChar char="•"/>
+            </a:lvl6pPr>
+            <a:lvl7pPr marL="2057400" indent="-228600">
+              <a:lnSpc>
+                <a:spcPct val="110000"/>
+              </a:lnSpc>
+              <a:spcBef>
+                <a:spcPts val="0"/>
+              </a:spcBef>
+              <a:spcAft>
+                <a:spcPts val="1200"/>
+              </a:spcAft>
+              <a:buChar char="•"/>
+            </a:lvl7pPr>
+            <a:lvl8pPr marL="2362200" indent="-228600">
+              <a:lnSpc>
+                <a:spcPct val="110000"/>
+              </a:lnSpc>
+              <a:spcBef>
+                <a:spcPts val="0"/>
+              </a:spcBef>
+              <a:spcAft>
+                <a:spcPts val="1200"/>
+              </a:spcAft>
+              <a:buChar char="•"/>
+            </a:lvl8pPr>
+            <a:lvl9pPr marL="2667000" indent="-228600">
+              <a:lnSpc>
+                <a:spcPct val="110000"/>
+              </a:lnSpc>
+              <a:spcBef>
+                <a:spcPts val="0"/>
+              </a:spcBef>
+              <a:spcAft>
+                <a:spcPts val="1200"/>
+              </a:spcAft>
+              <a:buChar char="•"/>
+            </a:lvl9pPr>
+          </a:lstStyle>
+          <a:p xmlns:a="http://schemas.openxmlformats.org/drawingml/2006/main"/>
+        </p:txBody>
+      </p:sp>
+    </p:spTree>
+  </p:cSld>
+</p:sldLayout>
+</file>
+
+<file path=ppt/slideLayouts/slideLayout4.xml><?xml version="1.0" encoding="utf-8"?>
+<p:sldLayout xmlns:p="http://schemas.openxmlformats.org/presentationml/2006/main">
+  <p:cSld name="Title and Two Column">
+    <p:spTree>
+      <p:nvGrpSpPr>
+        <p:cNvPr id="1" name=""/>
+        <p:cNvGrpSpPr/>
+        <p:nvPr/>
+      </p:nvGrpSpPr>
+      <p:grpSpPr>
+        <a:xfrm xmlns:a="http://schemas.openxmlformats.org/drawingml/2006/main"/>
+      </p:grpSpPr>
+      <p:sp>
+        <p:nvSpPr>
+          <p:cNvPr id="4" name="Title">
+            <a:extLst xmlns:a="http://schemas.openxmlformats.org/drawingml/2006/main">
+              <a:ext uri="{FF2B5EF4-FFF2-40B4-BE49-F238E27FC236}">
+                <a16:creationId xmlns:a16="http://schemas.microsoft.com/office/drawing/2014/main" id="{402A3E8B-C163-4509-BB4F-D185D1122329}"/>
+              </a:ext>
+            </a:extLst>
+          </p:cNvPr>
+          <p:cNvSpPr>
+            <a:spLocks xmlns:a="http://schemas.openxmlformats.org/drawingml/2006/main" noGrp="1"/>
+          </p:cNvSpPr>
+          <p:nvPr>
+            <p:ph type="title" idx="0"/>
+          </p:nvPr>
+        </p:nvSpPr>
+        <p:spPr>
+          <a:xfrm xmlns:a="http://schemas.openxmlformats.org/drawingml/2006/main">
+            <a:off x="685800" y="533400"/>
+            <a:ext cx="10820400" cy="838200"/>
+          </a:xfrm>
+          <a:prstGeom xmlns:a="http://schemas.openxmlformats.org/drawingml/2006/main" prst="rect">
+            <a:avLst/>
+          </a:prstGeom>
+          <a:noFill xmlns:a="http://schemas.openxmlformats.org/drawingml/2006/main"/>
+          <a:ln xmlns:a="http://schemas.openxmlformats.org/drawingml/2006/main">
+            <a:noFill/>
+            <a:prstDash val="solid"/>
+          </a:ln>
+        </p:spPr>
+        <p:txBody>
+          <a:bodyPr xmlns:a="http://schemas.openxmlformats.org/drawingml/2006/main" wrap="square" lIns="0" tIns="0" rIns="0" bIns="0" anchor="t">
+            <a:normAutofit/>
+          </a:bodyPr>
+          <a:lstStyle xmlns:a="http://schemas.openxmlformats.org/drawingml/2006/main">
+            <a:defPPr algn="l">
+              <a:defRPr sz="3300" b="1">
+                <a:solidFill>
+                  <a:schemeClr val="tx1"/>
+                </a:solidFill>
+                <a:latin typeface="+mj-lt"/>
+                <a:ea typeface="+mj-lt"/>
+                <a:cs typeface="+mj-lt"/>
+              </a:defRPr>
+            </a:defPPr>
+            <a:lvl1pPr marL="0" indent="0">
+              <a:lnSpc>
+                <a:spcPct val="110000"/>
+              </a:lnSpc>
+              <a:spcBef>
+                <a:spcPts val="0"/>
+              </a:spcBef>
+              <a:spcAft>
+                <a:spcPts val="0"/>
+              </a:spcAft>
+              <a:buNone/>
+            </a:lvl1pPr>
+            <a:lvl2pPr marL="0" indent="0">
+              <a:lnSpc>
+                <a:spcPct val="110000"/>
+              </a:lnSpc>
+              <a:spcBef>
+                <a:spcPts val="0"/>
+              </a:spcBef>
+              <a:spcAft>
+                <a:spcPts val="0"/>
+              </a:spcAft>
+              <a:buNone/>
+            </a:lvl2pPr>
+            <a:lvl3pPr marL="0" indent="0">
+              <a:lnSpc>
+                <a:spcPct val="110000"/>
+              </a:lnSpc>
+              <a:spcBef>
+                <a:spcPts val="0"/>
+              </a:spcBef>
+              <a:spcAft>
+                <a:spcPts val="0"/>
+              </a:spcAft>
+              <a:buNone/>
+            </a:lvl3pPr>
+            <a:lvl4pPr marL="0" indent="0">
+              <a:lnSpc>
+                <a:spcPct val="110000"/>
+              </a:lnSpc>
+              <a:spcBef>
+                <a:spcPts val="0"/>
+              </a:spcBef>
+              <a:spcAft>
+                <a:spcPts val="0"/>
+              </a:spcAft>
+              <a:buNone/>
+            </a:lvl4pPr>
+            <a:lvl5pPr marL="0" indent="0">
+              <a:lnSpc>
+                <a:spcPct val="110000"/>
+              </a:lnSpc>
+              <a:spcBef>
+                <a:spcPts val="0"/>
+              </a:spcBef>
+              <a:spcAft>
+                <a:spcPts val="0"/>
+              </a:spcAft>
+              <a:buNone/>
+            </a:lvl5pPr>
+            <a:lvl6pPr marL="0" indent="0">
+              <a:lnSpc>
+                <a:spcPct val="110000"/>
+              </a:lnSpc>
+              <a:spcBef>
+                <a:spcPts val="0"/>
+              </a:spcBef>
+              <a:spcAft>
+                <a:spcPts val="0"/>
+              </a:spcAft>
+              <a:buNone/>
+            </a:lvl6pPr>
+            <a:lvl7pPr marL="0" indent="0">
+              <a:lnSpc>
+                <a:spcPct val="110000"/>
+              </a:lnSpc>
+              <a:spcBef>
+                <a:spcPts val="0"/>
+              </a:spcBef>
+              <a:spcAft>
+                <a:spcPts val="0"/>
+              </a:spcAft>
+              <a:buNone/>
+            </a:lvl7pPr>
+            <a:lvl8pPr marL="0" indent="0">
+              <a:lnSpc>
+                <a:spcPct val="110000"/>
+              </a:lnSpc>
+              <a:spcBef>
+                <a:spcPts val="0"/>
+              </a:spcBef>
+              <a:spcAft>
+                <a:spcPts val="0"/>
+              </a:spcAft>
+              <a:buNone/>
+            </a:lvl8pPr>
+            <a:lvl9pPr marL="0" indent="0">
+              <a:lnSpc>
+                <a:spcPct val="110000"/>
+              </a:lnSpc>
+              <a:spcBef>
+                <a:spcPts val="0"/>
+              </a:spcBef>
+              <a:spcAft>
+                <a:spcPts val="0"/>
+              </a:spcAft>
+              <a:buNone/>
+            </a:lvl9pPr>
+          </a:lstStyle>
+          <a:p xmlns:a="http://schemas.openxmlformats.org/drawingml/2006/main"/>
+        </p:txBody>
+      </p:sp>
+      <p:sp>
+        <p:nvSpPr>
+          <p:cNvPr id="2" name="Left column">
+            <a:extLst xmlns:a="http://schemas.openxmlformats.org/drawingml/2006/main">
+              <a:ext uri="{FF2B5EF4-FFF2-40B4-BE49-F238E27FC236}">
+                <a16:creationId xmlns:a16="http://schemas.microsoft.com/office/drawing/2014/main" id="{0F3A8DFD-5E76-4212-9497-C1D091B3B770}"/>
+              </a:ext>
+            </a:extLst>
+          </p:cNvPr>
+          <p:cNvSpPr>
+            <a:spLocks xmlns:a="http://schemas.openxmlformats.org/drawingml/2006/main" noGrp="1"/>
+          </p:cNvSpPr>
+          <p:nvPr>
+            <p:ph type="body" idx="1"/>
+          </p:nvPr>
+        </p:nvSpPr>
+        <p:spPr>
+          <a:xfrm xmlns:a="http://schemas.openxmlformats.org/drawingml/2006/main">
+            <a:off x="685800" y="1905000"/>
+            <a:ext cx="5029200" cy="4267200"/>
+          </a:xfrm>
+          <a:prstGeom xmlns:a="http://schemas.openxmlformats.org/drawingml/2006/main" prst="rect">
+            <a:avLst/>
+          </a:prstGeom>
+          <a:noFill xmlns:a="http://schemas.openxmlformats.org/drawingml/2006/main"/>
+          <a:ln xmlns:a="http://schemas.openxmlformats.org/drawingml/2006/main">
+            <a:noFill/>
+            <a:prstDash val="solid"/>
+          </a:ln>
+        </p:spPr>
+        <p:txBody>
+          <a:bodyPr xmlns:a="http://schemas.openxmlformats.org/drawingml/2006/main" wrap="square" lIns="0" tIns="0" rIns="0" bIns="0" anchor="t">
+            <a:normAutofit/>
+          </a:bodyPr>
+          <a:lstStyle xmlns:a="http://schemas.openxmlformats.org/drawingml/2006/main">
+            <a:defPPr algn="l">
+              <a:defRPr sz="2100" b="0">
+                <a:solidFill>
+                  <a:schemeClr val="tx1"/>
+                </a:solidFill>
+                <a:latin typeface="+mn-lt"/>
+                <a:ea typeface="+mn-lt"/>
+                <a:cs typeface="+mn-lt"/>
+              </a:defRPr>
+            </a:defPPr>
+            <a:lvl1pPr marL="228600" indent="-228600">
+              <a:lnSpc>
+                <a:spcPct val="110000"/>
+              </a:lnSpc>
+              <a:spcBef>
+                <a:spcPts val="0"/>
+              </a:spcBef>
+              <a:spcAft>
+                <a:spcPts val="1200"/>
+              </a:spcAft>
+              <a:buChar char="•"/>
+            </a:lvl1pPr>
+            <a:lvl2pPr marL="533400" indent="-228600">
+              <a:lnSpc>
+                <a:spcPct val="110000"/>
+              </a:lnSpc>
+              <a:spcBef>
+                <a:spcPts val="0"/>
+              </a:spcBef>
+              <a:spcAft>
+                <a:spcPts val="1200"/>
+              </a:spcAft>
+              <a:buChar char="•"/>
+            </a:lvl2pPr>
+            <a:lvl3pPr marL="838200" indent="-228600">
+              <a:lnSpc>
+                <a:spcPct val="110000"/>
+              </a:lnSpc>
+              <a:spcBef>
+                <a:spcPts val="0"/>
+              </a:spcBef>
+              <a:spcAft>
+                <a:spcPts val="1200"/>
+              </a:spcAft>
+              <a:buChar char="•"/>
+            </a:lvl3pPr>
+            <a:lvl4pPr marL="1143000" indent="-228600">
+              <a:lnSpc>
+                <a:spcPct val="110000"/>
+              </a:lnSpc>
+              <a:spcBef>
+                <a:spcPts val="0"/>
+              </a:spcBef>
+              <a:spcAft>
+                <a:spcPts val="1200"/>
+              </a:spcAft>
+              <a:buChar char="•"/>
+            </a:lvl4pPr>
+            <a:lvl5pPr marL="1447800" indent="-228600">
+              <a:lnSpc>
+                <a:spcPct val="110000"/>
+              </a:lnSpc>
+              <a:spcBef>
+                <a:spcPts val="0"/>
+              </a:spcBef>
+              <a:spcAft>
+                <a:spcPts val="1200"/>
+              </a:spcAft>
+              <a:buChar char="•"/>
+            </a:lvl5pPr>
+            <a:lvl6pPr marL="1752600" indent="-228600">
+              <a:lnSpc>
+                <a:spcPct val="110000"/>
+              </a:lnSpc>
+              <a:spcBef>
+                <a:spcPts val="0"/>
+              </a:spcBef>
+              <a:spcAft>
+                <a:spcPts val="1200"/>
+              </a:spcAft>
+              <a:buChar char="•"/>
+            </a:lvl6pPr>
+            <a:lvl7pPr marL="2057400" indent="-228600">
+              <a:lnSpc>
+                <a:spcPct val="110000"/>
+              </a:lnSpc>
+              <a:spcBef>
+                <a:spcPts val="0"/>
+              </a:spcBef>
+              <a:spcAft>
+                <a:spcPts val="1200"/>
+              </a:spcAft>
+              <a:buChar char="•"/>
+            </a:lvl7pPr>
+            <a:lvl8pPr marL="2362200" indent="-228600">
+              <a:lnSpc>
+                <a:spcPct val="110000"/>
+              </a:lnSpc>
+              <a:spcBef>
+                <a:spcPts val="0"/>
+              </a:spcBef>
+              <a:spcAft>
+                <a:spcPts val="1200"/>
+              </a:spcAft>
+              <a:buChar char="•"/>
+            </a:lvl8pPr>
+            <a:lvl9pPr marL="2667000" indent="-228600">
+              <a:lnSpc>
+                <a:spcPct val="110000"/>
+              </a:lnSpc>
+              <a:spcBef>
+                <a:spcPts val="0"/>
+              </a:spcBef>
+              <a:spcAft>
+                <a:spcPts val="1200"/>
+              </a:spcAft>
+              <a:buChar char="•"/>
+            </a:lvl9pPr>
+          </a:lstStyle>
+          <a:p xmlns:a="http://schemas.openxmlformats.org/drawingml/2006/main"/>
+        </p:txBody>
+      </p:sp>
+      <p:sp>
+        <p:nvSpPr>
+          <p:cNvPr id="3" name="Right column">
+            <a:extLst xmlns:a="http://schemas.openxmlformats.org/drawingml/2006/main">
+              <a:ext uri="{FF2B5EF4-FFF2-40B4-BE49-F238E27FC236}">
+                <a16:creationId xmlns:a16="http://schemas.microsoft.com/office/drawing/2014/main" id="{69DDB450-3A99-4F22-904F-1D652CF8E1B0}"/>
+              </a:ext>
+            </a:extLst>
+          </p:cNvPr>
+          <p:cNvSpPr>
+            <a:spLocks xmlns:a="http://schemas.openxmlformats.org/drawingml/2006/main" noGrp="1"/>
+          </p:cNvSpPr>
+          <p:nvPr>
+            <p:ph type="body" idx="2"/>
+          </p:nvPr>
+        </p:nvSpPr>
+        <p:spPr>
+          <a:xfrm xmlns:a="http://schemas.openxmlformats.org/drawingml/2006/main">
+            <a:off x="6477000" y="1905000"/>
+            <a:ext cx="5029200" cy="4267200"/>
+          </a:xfrm>
+          <a:prstGeom xmlns:a="http://schemas.openxmlformats.org/drawingml/2006/main" prst="rect">
+            <a:avLst/>
+          </a:prstGeom>
+          <a:noFill xmlns:a="http://schemas.openxmlformats.org/drawingml/2006/main"/>
+          <a:ln xmlns:a="http://schemas.openxmlformats.org/drawingml/2006/main">
+            <a:noFill/>
+            <a:prstDash val="solid"/>
+          </a:ln>
+        </p:spPr>
+        <p:txBody>
+          <a:bodyPr xmlns:a="http://schemas.openxmlformats.org/drawingml/2006/main" wrap="square" lIns="0" tIns="0" rIns="0" bIns="0" anchor="t">
+            <a:normAutofit/>
+          </a:bodyPr>
+          <a:lstStyle xmlns:a="http://schemas.openxmlformats.org/drawingml/2006/main">
+            <a:defPPr algn="l">
+              <a:defRPr sz="2100" b="0">
+                <a:solidFill>
+                  <a:schemeClr val="tx1"/>
+                </a:solidFill>
+                <a:latin typeface="+mn-lt"/>
+                <a:ea typeface="+mn-lt"/>
+                <a:cs typeface="+mn-lt"/>
+              </a:defRPr>
+            </a:defPPr>
+            <a:lvl1pPr marL="228600" indent="-228600">
+              <a:lnSpc>
+                <a:spcPct val="110000"/>
+              </a:lnSpc>
+              <a:spcBef>
+                <a:spcPts val="0"/>
+              </a:spcBef>
+              <a:spcAft>
+                <a:spcPts val="1200"/>
+              </a:spcAft>
+              <a:buChar char="•"/>
+            </a:lvl1pPr>
+            <a:lvl2pPr marL="533400" indent="-228600">
+              <a:lnSpc>
+                <a:spcPct val="110000"/>
+              </a:lnSpc>
+              <a:spcBef>
+                <a:spcPts val="0"/>
+              </a:spcBef>
+              <a:spcAft>
+                <a:spcPts val="1200"/>
+              </a:spcAft>
+              <a:buChar char="•"/>
+            </a:lvl2pPr>
+            <a:lvl3pPr marL="838200" indent="-228600">
+              <a:lnSpc>
+                <a:spcPct val="110000"/>
+              </a:lnSpc>
+              <a:spcBef>
+                <a:spcPts val="0"/>
+              </a:spcBef>
+              <a:spcAft>
+                <a:spcPts val="1200"/>
+              </a:spcAft>
+              <a:buChar char="•"/>
+            </a:lvl3pPr>
+            <a:lvl4pPr marL="1143000" indent="-228600">
+              <a:lnSpc>
+                <a:spcPct val="110000"/>
+              </a:lnSpc>
+              <a:spcBef>
+                <a:spcPts val="0"/>
+              </a:spcBef>
+              <a:spcAft>
+                <a:spcPts val="1200"/>
+              </a:spcAft>
+              <a:buChar char="•"/>
+            </a:lvl4pPr>
+            <a:lvl5pPr marL="1447800" indent="-228600">
+              <a:lnSpc>
+                <a:spcPct val="110000"/>
+              </a:lnSpc>
+              <a:spcBef>
+                <a:spcPts val="0"/>
+              </a:spcBef>
+              <a:spcAft>
+                <a:spcPts val="1200"/>
+              </a:spcAft>
+              <a:buChar char="•"/>
+            </a:lvl5pPr>
+            <a:lvl6pPr marL="1752600" indent="-228600">
+              <a:lnSpc>
+                <a:spcPct val="110000"/>
+              </a:lnSpc>
+              <a:spcBef>
+                <a:spcPts val="0"/>
+              </a:spcBef>
+              <a:spcAft>
+                <a:spcPts val="1200"/>
+              </a:spcAft>
+              <a:buChar char="•"/>
+            </a:lvl6pPr>
+            <a:lvl7pPr marL="2057400" indent="-228600">
+              <a:lnSpc>
+                <a:spcPct val="110000"/>
+              </a:lnSpc>
+              <a:spcBef>
+                <a:spcPts val="0"/>
+              </a:spcBef>
+              <a:spcAft>
+                <a:spcPts val="1200"/>
+              </a:spcAft>
+              <a:buChar char="•"/>
+            </a:lvl7pPr>
+            <a:lvl8pPr marL="2362200" indent="-228600">
+              <a:lnSpc>
+                <a:spcPct val="110000"/>
+              </a:lnSpc>
+              <a:spcBef>
+                <a:spcPts val="0"/>
+              </a:spcBef>
+              <a:spcAft>
+                <a:spcPts val="1200"/>
+              </a:spcAft>
+              <a:buChar char="•"/>
+            </a:lvl8pPr>
+            <a:lvl9pPr marL="2667000" indent="-228600">
+              <a:lnSpc>
+                <a:spcPct val="110000"/>
+              </a:lnSpc>
+              <a:spcBef>
+                <a:spcPts val="0"/>
+              </a:spcBef>
+              <a:spcAft>
+                <a:spcPts val="1200"/>
+              </a:spcAft>
+              <a:buChar char="•"/>
+            </a:lvl9pPr>
+          </a:lstStyle>
+          <a:p xmlns:a="http://schemas.openxmlformats.org/drawingml/2006/main"/>
+        </p:txBody>
+      </p:sp>
+    </p:spTree>
+  </p:cSld>
+</p:sldLayout>
+</file>
+
+<file path=ppt/slideLayouts/slideLayout5.xml><?xml version="1.0" encoding="utf-8"?>
+<p:sldLayout xmlns:p="http://schemas.openxmlformats.org/presentationml/2006/main">
+  <p:cSld name="Title and One Column">
+    <p:spTree>
+      <p:nvGrpSpPr>
+        <p:cNvPr id="1" name=""/>
+        <p:cNvGrpSpPr/>
+        <p:nvPr/>
+      </p:nvGrpSpPr>
+      <p:grpSpPr>
+        <a:xfrm xmlns:a="http://schemas.openxmlformats.org/drawingml/2006/main"/>
+      </p:grpSpPr>
+      <p:sp>
+        <p:nvSpPr>
+          <p:cNvPr id="3" name="Title">
+            <a:extLst xmlns:a="http://schemas.openxmlformats.org/drawingml/2006/main">
+              <a:ext uri="{FF2B5EF4-FFF2-40B4-BE49-F238E27FC236}">
+                <a16:creationId xmlns:a16="http://schemas.microsoft.com/office/drawing/2014/main" id="{C8AAB7E3-15A1-4711-8986-83E5A15E8214}"/>
+              </a:ext>
+            </a:extLst>
+          </p:cNvPr>
+          <p:cNvSpPr>
+            <a:spLocks xmlns:a="http://schemas.openxmlformats.org/drawingml/2006/main" noGrp="1"/>
+          </p:cNvSpPr>
+          <p:nvPr>
+            <p:ph type="title" idx="0"/>
+          </p:nvPr>
+        </p:nvSpPr>
+        <p:spPr>
+          <a:xfrm xmlns:a="http://schemas.openxmlformats.org/drawingml/2006/main">
+            <a:off x="685800" y="533400"/>
+            <a:ext cx="10820400" cy="838200"/>
+          </a:xfrm>
+          <a:prstGeom xmlns:a="http://schemas.openxmlformats.org/drawingml/2006/main" prst="rect">
+            <a:avLst/>
+          </a:prstGeom>
+          <a:noFill xmlns:a="http://schemas.openxmlformats.org/drawingml/2006/main"/>
+          <a:ln xmlns:a="http://schemas.openxmlformats.org/drawingml/2006/main">
+            <a:noFill/>
+            <a:prstDash val="solid"/>
+          </a:ln>
+        </p:spPr>
+        <p:txBody>
+          <a:bodyPr xmlns:a="http://schemas.openxmlformats.org/drawingml/2006/main" wrap="square" lIns="0" tIns="0" rIns="0" bIns="0" anchor="t">
+            <a:normAutofit/>
+          </a:bodyPr>
+          <a:lstStyle xmlns:a="http://schemas.openxmlformats.org/drawingml/2006/main">
+            <a:defPPr algn="l">
+              <a:defRPr sz="3300" b="1">
+                <a:solidFill>
+                  <a:schemeClr val="tx1"/>
+                </a:solidFill>
+                <a:latin typeface="+mj-lt"/>
+                <a:ea typeface="+mj-lt"/>
+                <a:cs typeface="+mj-lt"/>
+              </a:defRPr>
+            </a:defPPr>
+            <a:lvl1pPr marL="0" indent="0">
+              <a:lnSpc>
+                <a:spcPct val="110000"/>
+              </a:lnSpc>
+              <a:spcBef>
+                <a:spcPts val="0"/>
+              </a:spcBef>
+              <a:spcAft>
+                <a:spcPts val="0"/>
+              </a:spcAft>
+              <a:buNone/>
+            </a:lvl1pPr>
+            <a:lvl2pPr marL="0" indent="0">
+              <a:lnSpc>
+                <a:spcPct val="110000"/>
+              </a:lnSpc>
+              <a:spcBef>
+                <a:spcPts val="0"/>
+              </a:spcBef>
+              <a:spcAft>
+                <a:spcPts val="0"/>
+              </a:spcAft>
+              <a:buNone/>
+            </a:lvl2pPr>
+            <a:lvl3pPr marL="0" indent="0">
+              <a:lnSpc>
+                <a:spcPct val="110000"/>
+              </a:lnSpc>
+              <a:spcBef>
+                <a:spcPts val="0"/>
+              </a:spcBef>
+              <a:spcAft>
+                <a:spcPts val="0"/>
+              </a:spcAft>
+              <a:buNone/>
+            </a:lvl3pPr>
+            <a:lvl4pPr marL="0" indent="0">
+              <a:lnSpc>
+                <a:spcPct val="110000"/>
+              </a:lnSpc>
+              <a:spcBef>
+                <a:spcPts val="0"/>
+              </a:spcBef>
+              <a:spcAft>
+                <a:spcPts val="0"/>
+              </a:spcAft>
+              <a:buNone/>
+            </a:lvl4pPr>
+            <a:lvl5pPr marL="0" indent="0">
+              <a:lnSpc>
+                <a:spcPct val="110000"/>
+              </a:lnSpc>
+              <a:spcBef>
+                <a:spcPts val="0"/>
+              </a:spcBef>
+              <a:spcAft>
+                <a:spcPts val="0"/>
+              </a:spcAft>
+              <a:buNone/>
+            </a:lvl5pPr>
+            <a:lvl6pPr marL="0" indent="0">
+              <a:lnSpc>
+                <a:spcPct val="110000"/>
+              </a:lnSpc>
+              <a:spcBef>
+                <a:spcPts val="0"/>
+              </a:spcBef>
+              <a:spcAft>
+                <a:spcPts val="0"/>
+              </a:spcAft>
+              <a:buNone/>
+            </a:lvl6pPr>
+            <a:lvl7pPr marL="0" indent="0">
+              <a:lnSpc>
+                <a:spcPct val="110000"/>
+              </a:lnSpc>
+              <a:spcBef>
+                <a:spcPts val="0"/>
+              </a:spcBef>
+              <a:spcAft>
+                <a:spcPts val="0"/>
+              </a:spcAft>
+              <a:buNone/>
+            </a:lvl7pPr>
+            <a:lvl8pPr marL="0" indent="0">
+              <a:lnSpc>
+                <a:spcPct val="110000"/>
+              </a:lnSpc>
+              <a:spcBef>
+                <a:spcPts val="0"/>
+              </a:spcBef>
+              <a:spcAft>
+                <a:spcPts val="0"/>
+              </a:spcAft>
+              <a:buNone/>
+            </a:lvl8pPr>
+            <a:lvl9pPr marL="0" indent="0">
+              <a:lnSpc>
+                <a:spcPct val="110000"/>
+              </a:lnSpc>
+              <a:spcBef>
+                <a:spcPts val="0"/>
+              </a:spcBef>
+              <a:spcAft>
+                <a:spcPts val="0"/>
+              </a:spcAft>
+              <a:buNone/>
+            </a:lvl9pPr>
+          </a:lstStyle>
+          <a:p xmlns:a="http://schemas.openxmlformats.org/drawingml/2006/main"/>
+        </p:txBody>
+      </p:sp>
+      <p:sp>
+        <p:nvSpPr>
+          <p:cNvPr id="2" name="Left column">
+            <a:extLst xmlns:a="http://schemas.openxmlformats.org/drawingml/2006/main">
+              <a:ext uri="{FF2B5EF4-FFF2-40B4-BE49-F238E27FC236}">
+                <a16:creationId xmlns:a16="http://schemas.microsoft.com/office/drawing/2014/main" id="{A1C2E920-6C40-4452-B602-9EAC1AC2D49B}"/>
+              </a:ext>
+            </a:extLst>
+          </p:cNvPr>
+          <p:cNvSpPr>
+            <a:spLocks xmlns:a="http://schemas.openxmlformats.org/drawingml/2006/main" noGrp="1"/>
+          </p:cNvSpPr>
+          <p:nvPr>
+            <p:ph type="body" idx="1"/>
+          </p:nvPr>
+        </p:nvSpPr>
+        <p:spPr>
+          <a:xfrm xmlns:a="http://schemas.openxmlformats.org/drawingml/2006/main">
+            <a:off x="685800" y="1905000"/>
+            <a:ext cx="5029200" cy="4267200"/>
+          </a:xfrm>
+          <a:prstGeom xmlns:a="http://schemas.openxmlformats.org/drawingml/2006/main" prst="rect">
+            <a:avLst/>
+          </a:prstGeom>
+          <a:noFill xmlns:a="http://schemas.openxmlformats.org/drawingml/2006/main"/>
+          <a:ln xmlns:a="http://schemas.openxmlformats.org/drawingml/2006/main">
+            <a:noFill/>
+            <a:prstDash val="solid"/>
+          </a:ln>
+        </p:spPr>
+        <p:txBody>
+          <a:bodyPr xmlns:a="http://schemas.openxmlformats.org/drawingml/2006/main" wrap="square" lIns="0" tIns="0" rIns="0" bIns="0" anchor="t">
+            <a:normAutofit/>
+          </a:bodyPr>
+          <a:lstStyle xmlns:a="http://schemas.openxmlformats.org/drawingml/2006/main">
+            <a:defPPr algn="l">
+              <a:defRPr sz="2250" b="0">
+                <a:solidFill>
+                  <a:schemeClr val="tx1"/>
+                </a:solidFill>
+                <a:latin typeface="+mn-lt"/>
+                <a:ea typeface="+mn-lt"/>
+                <a:cs typeface="+mn-lt"/>
+              </a:defRPr>
+            </a:defPPr>
+            <a:lvl1pPr marL="228600" indent="-228600">
+              <a:lnSpc>
+                <a:spcPct val="110000"/>
+              </a:lnSpc>
+              <a:spcBef>
+                <a:spcPts val="0"/>
+              </a:spcBef>
+              <a:spcAft>
+                <a:spcPts val="1200"/>
+              </a:spcAft>
+              <a:buChar char="•"/>
+            </a:lvl1pPr>
+            <a:lvl2pPr marL="533400" indent="-228600">
+              <a:lnSpc>
+                <a:spcPct val="110000"/>
+              </a:lnSpc>
+              <a:spcBef>
+                <a:spcPts val="0"/>
+              </a:spcBef>
+              <a:spcAft>
+                <a:spcPts val="1200"/>
+              </a:spcAft>
+              <a:buChar char="•"/>
+            </a:lvl2pPr>
+            <a:lvl3pPr marL="838200" indent="-228600">
+              <a:lnSpc>
+                <a:spcPct val="110000"/>
+              </a:lnSpc>
+              <a:spcBef>
+                <a:spcPts val="0"/>
+              </a:spcBef>
+              <a:spcAft>
+                <a:spcPts val="1200"/>
+              </a:spcAft>
+              <a:buChar char="•"/>
+            </a:lvl3pPr>
+            <a:lvl4pPr marL="1143000" indent="-228600">
+              <a:lnSpc>
+                <a:spcPct val="110000"/>
+              </a:lnSpc>
+              <a:spcBef>
+                <a:spcPts val="0"/>
+              </a:spcBef>
+              <a:spcAft>
+                <a:spcPts val="1200"/>
+              </a:spcAft>
+              <a:buChar char="•"/>
+            </a:lvl4pPr>
+            <a:lvl5pPr marL="1447800" indent="-228600">
+              <a:lnSpc>
+                <a:spcPct val="110000"/>
+              </a:lnSpc>
+              <a:spcBef>
+                <a:spcPts val="0"/>
+              </a:spcBef>
+              <a:spcAft>
+                <a:spcPts val="1200"/>
+              </a:spcAft>
+              <a:buChar char="•"/>
+            </a:lvl5pPr>
+            <a:lvl6pPr marL="1752600" indent="-228600">
+              <a:lnSpc>
+                <a:spcPct val="110000"/>
+              </a:lnSpc>
+              <a:spcBef>
+                <a:spcPts val="0"/>
+              </a:spcBef>
+              <a:spcAft>
+                <a:spcPts val="1200"/>
+              </a:spcAft>
+              <a:buChar char="•"/>
+            </a:lvl6pPr>
+            <a:lvl7pPr marL="2057400" indent="-228600">
+              <a:lnSpc>
+                <a:spcPct val="110000"/>
+              </a:lnSpc>
+              <a:spcBef>
+                <a:spcPts val="0"/>
+              </a:spcBef>
+              <a:spcAft>
+                <a:spcPts val="1200"/>
+              </a:spcAft>
+              <a:buChar char="•"/>
+            </a:lvl7pPr>
+            <a:lvl8pPr marL="2362200" indent="-228600">
+              <a:lnSpc>
+                <a:spcPct val="110000"/>
+              </a:lnSpc>
+              <a:spcBef>
+                <a:spcPts val="0"/>
+              </a:spcBef>
+              <a:spcAft>
+                <a:spcPts val="1200"/>
+              </a:spcAft>
+              <a:buChar char="•"/>
+            </a:lvl8pPr>
+            <a:lvl9pPr marL="2667000" indent="-228600">
+              <a:lnSpc>
+                <a:spcPct val="110000"/>
+              </a:lnSpc>
+              <a:spcBef>
+                <a:spcPts val="0"/>
+              </a:spcBef>
+              <a:spcAft>
+                <a:spcPts val="1200"/>
+              </a:spcAft>
+              <a:buChar char="•"/>
+            </a:lvl9pPr>
+          </a:lstStyle>
+          <a:p xmlns:a="http://schemas.openxmlformats.org/drawingml/2006/main"/>
+        </p:txBody>
+      </p:sp>
+    </p:spTree>
+  </p:cSld>
+</p:sldLayout>
+</file>
+
+<file path=ppt/slideLayouts/slideLayout6.xml><?xml version="1.0" encoding="utf-8"?>
+<p:sldLayout xmlns:p="http://schemas.openxmlformats.org/presentationml/2006/main" type="blank">
+  <p:cSld name="Blank">
+    <p:spTree>
+      <p:nvGrpSpPr>
+        <p:cNvPr id="1" name=""/>
+        <p:cNvGrpSpPr/>
+        <p:nvPr/>
+      </p:nvGrpSpPr>
+      <p:grpSpPr>
+        <a:xfrm xmlns:a="http://schemas.openxmlformats.org/drawingml/2006/main"/>
+      </p:grpSpPr>
     </p:spTree>
   </p:cSld>
 </p:sldLayout>
@@ -895,7 +2550,12 @@
   </p:cSld>
   <p:clrMap bg1="lt1" tx1="dk1" bg2="lt2" tx2="dk2" accent1="accent1" accent2="accent2" accent3="accent3" accent4="accent4" accent5="accent5" accent6="accent6" hlink="hlink" folHlink="folHlink"/>
   <p:sldLayoutIdLst>
-    <p:sldLayoutId xmlns:r="http://schemas.openxmlformats.org/officeDocument/2006/relationships" id="2147483649" r:id="R1b0cce1a1ee1463c"/>
+    <p:sldLayoutId xmlns:r="http://schemas.openxmlformats.org/officeDocument/2006/relationships" id="2147483649" r:id="Rafe57e9d30b046b8"/>
+    <p:sldLayoutId xmlns:r="http://schemas.openxmlformats.org/officeDocument/2006/relationships" id="2147483650" r:id="Red3381695fc641a3"/>
+    <p:sldLayoutId xmlns:r="http://schemas.openxmlformats.org/officeDocument/2006/relationships" id="2147483651" r:id="Rc08e6aae2fb74837"/>
+    <p:sldLayoutId xmlns:r="http://schemas.openxmlformats.org/officeDocument/2006/relationships" id="2147483652" r:id="Rb787ae732bfa4b13"/>
+    <p:sldLayoutId xmlns:r="http://schemas.openxmlformats.org/officeDocument/2006/relationships" id="2147483653" r:id="R4a8663778be6408c"/>
+    <p:sldLayoutId xmlns:r="http://schemas.openxmlformats.org/officeDocument/2006/relationships" id="2147483654" r:id="Ra48dc3495f5d4f96"/>
   </p:sldLayoutIdLst>
   <p:txStyles>
     <p:titleStyle>
@@ -1218,16 +2878,16 @@
         <a:srgbClr val="96607D"/>
       </a:folHlink>
     </a:clrScheme>
-    <a:fontScheme name="Office">
+    <a:fontScheme name="">
       <a:majorFont>
-        <a:latin typeface="Calibri Light"/>
-        <a:ea typeface="Calibri Light"/>
-        <a:cs typeface="Calibri Light"/>
+        <a:latin typeface="Aptos"/>
+        <a:ea typeface=""/>
+        <a:cs typeface=""/>
       </a:majorFont>
       <a:minorFont>
-        <a:latin typeface="Calibri"/>
-        <a:ea typeface="Calibri"/>
-        <a:cs typeface="Calibri"/>
+        <a:latin typeface="Aptos"/>
+        <a:ea typeface=""/>
+        <a:cs typeface=""/>
       </a:minorFont>
     </a:fontScheme>
     <a:fmtScheme name="ChatGPT">
@@ -1446,7 +3106,7 @@
           <p:cNvPr id="5" name="">
             <a:extLst xmlns:a="http://schemas.openxmlformats.org/drawingml/2006/main">
               <a:ext uri="{FF2B5EF4-FFF2-40B4-BE49-F238E27FC236}">
-                <a16:creationId xmlns:a16="http://schemas.microsoft.com/office/drawing/2014/main" id="{A82833D2-4480-427B-8ADB-DCEE43779779}"/>
+                <a16:creationId xmlns:a16="http://schemas.microsoft.com/office/drawing/2014/main" id="{12DFFE1E-56ED-437C-9782-348D61A9085D}"/>
               </a:ext>
             </a:extLst>
           </p:cNvPr>
@@ -1472,7 +3132,18 @@
           <a:bodyPr xmlns:a="http://schemas.openxmlformats.org/drawingml/2006/main" anchor="ctr">
             <a:noAutofit/>
           </a:bodyPr>
-          <a:lstStyle xmlns:a="http://schemas.openxmlformats.org/drawingml/2006/main"/>
+          <a:lstStyle xmlns:a="http://schemas.openxmlformats.org/drawingml/2006/main">
+            <a:defPPr algn="l">
+              <a:defRPr sz="2700" b="1">
+                <a:solidFill>
+                  <a:srgbClr val="161616"/>
+                </a:solidFill>
+                <a:latin typeface="Arial"/>
+                <a:ea typeface="Arial"/>
+                <a:cs typeface="Arial"/>
+              </a:defRPr>
+            </a:defPPr>
+          </a:lstStyle>
           <a:p xmlns:a="http://schemas.openxmlformats.org/drawingml/2006/main">
             <a:pPr algn="l">
               <a:defRPr sz="2700" b="1">
@@ -1503,7 +3174,7 @@
           <p:cNvPr id="2" name="">
             <a:extLst xmlns:a="http://schemas.openxmlformats.org/drawingml/2006/main">
               <a:ext uri="{FF2B5EF4-FFF2-40B4-BE49-F238E27FC236}">
-                <a16:creationId xmlns:a16="http://schemas.microsoft.com/office/drawing/2014/main" id="{09576707-F1E3-4A91-9A6A-A93ECE528E04}"/>
+                <a16:creationId xmlns:a16="http://schemas.microsoft.com/office/drawing/2014/main" id="{1BE8B3F6-BC0B-406E-9198-FE2AB741B522}"/>
               </a:ext>
             </a:extLst>
           </p:cNvPr>
@@ -1529,7 +3200,18 @@
           <a:bodyPr xmlns:a="http://schemas.openxmlformats.org/drawingml/2006/main">
             <a:noAutofit/>
           </a:bodyPr>
-          <a:lstStyle xmlns:a="http://schemas.openxmlformats.org/drawingml/2006/main"/>
+          <a:lstStyle xmlns:a="http://schemas.openxmlformats.org/drawingml/2006/main">
+            <a:defPPr>
+              <a:defRPr sz="3750" b="1">
+                <a:solidFill>
+                  <a:srgbClr val="161616"/>
+                </a:solidFill>
+                <a:latin typeface="Arial"/>
+                <a:ea typeface="Arial"/>
+                <a:cs typeface="Arial"/>
+              </a:defRPr>
+            </a:defPPr>
+          </a:lstStyle>
           <a:p xmlns:a="http://schemas.openxmlformats.org/drawingml/2006/main">
             <a:pPr>
               <a:defRPr sz="3750" b="1">
@@ -1560,7 +3242,7 @@
           <p:cNvPr id="3" name="">
             <a:extLst xmlns:a="http://schemas.openxmlformats.org/drawingml/2006/main">
               <a:ext uri="{FF2B5EF4-FFF2-40B4-BE49-F238E27FC236}">
-                <a16:creationId xmlns:a16="http://schemas.microsoft.com/office/drawing/2014/main" id="{2564D6C5-0261-4241-AF64-5B389F2163FD}"/>
+                <a16:creationId xmlns:a16="http://schemas.microsoft.com/office/drawing/2014/main" id="{3813F9D1-A4E2-4DBE-801A-D55C24ED1430}"/>
               </a:ext>
             </a:extLst>
           </p:cNvPr>
@@ -1586,7 +3268,18 @@
           <a:bodyPr xmlns:a="http://schemas.openxmlformats.org/drawingml/2006/main">
             <a:noAutofit/>
           </a:bodyPr>
-          <a:lstStyle xmlns:a="http://schemas.openxmlformats.org/drawingml/2006/main"/>
+          <a:lstStyle xmlns:a="http://schemas.openxmlformats.org/drawingml/2006/main">
+            <a:defPPr>
+              <a:defRPr sz="2250" b="0">
+                <a:solidFill>
+                  <a:srgbClr val="161616"/>
+                </a:solidFill>
+                <a:latin typeface="Arial"/>
+                <a:ea typeface="Arial"/>
+                <a:cs typeface="Arial"/>
+              </a:defRPr>
+            </a:defPPr>
+          </a:lstStyle>
           <a:p xmlns:a="http://schemas.openxmlformats.org/drawingml/2006/main">
             <a:pPr>
               <a:defRPr sz="2250" b="0">
@@ -1617,7 +3310,7 @@
           <p:cNvPr id="4" name="">
             <a:extLst xmlns:a="http://schemas.openxmlformats.org/drawingml/2006/main">
               <a:ext uri="{FF2B5EF4-FFF2-40B4-BE49-F238E27FC236}">
-                <a16:creationId xmlns:a16="http://schemas.microsoft.com/office/drawing/2014/main" id="{D3EA0D80-530C-43CB-9CAC-18E015F82C37}"/>
+                <a16:creationId xmlns:a16="http://schemas.microsoft.com/office/drawing/2014/main" id="{D420B8E5-94E2-4B66-9599-9880C061E03D}"/>
               </a:ext>
             </a:extLst>
           </p:cNvPr>
@@ -1643,7 +3336,18 @@
           <a:bodyPr xmlns:a="http://schemas.openxmlformats.org/drawingml/2006/main">
             <a:noAutofit/>
           </a:bodyPr>
-          <a:lstStyle xmlns:a="http://schemas.openxmlformats.org/drawingml/2006/main"/>
+          <a:lstStyle xmlns:a="http://schemas.openxmlformats.org/drawingml/2006/main">
+            <a:defPPr>
+              <a:defRPr sz="1800" b="0">
+                <a:solidFill>
+                  <a:srgbClr val="161616"/>
+                </a:solidFill>
+                <a:latin typeface="Arial"/>
+                <a:ea typeface="Arial"/>
+                <a:cs typeface="Arial"/>
+              </a:defRPr>
+            </a:defPPr>
+          </a:lstStyle>
           <a:p xmlns:a="http://schemas.openxmlformats.org/drawingml/2006/main">
             <a:pPr>
               <a:defRPr sz="1800" b="0">
@@ -1695,7 +3399,7 @@
     </p:spTree>
     <p:extLst>
       <p:ext uri="{BB962C8B-B14F-4D97-AF65-F5344CB8AC3E}">
-        <p14:creationId xmlns:p14="http://schemas.microsoft.com/office/powerpoint/2010/main" val="1526349525"/>
+        <p14:creationId xmlns:p14="http://schemas.microsoft.com/office/powerpoint/2010/main" val="1739394495"/>
       </p:ext>
     </p:extLst>
   </p:cSld>
@@ -1726,7 +3430,7 @@
           <p:cNvPr id="3" name="">
             <a:extLst xmlns:a="http://schemas.openxmlformats.org/drawingml/2006/main">
               <a:ext uri="{FF2B5EF4-FFF2-40B4-BE49-F238E27FC236}">
-                <a16:creationId xmlns:a16="http://schemas.microsoft.com/office/drawing/2014/main" id="{02EF1080-F637-43F8-997D-BE8BD035C322}"/>
+                <a16:creationId xmlns:a16="http://schemas.microsoft.com/office/drawing/2014/main" id="{0A2B53A4-6A41-4EBA-B2B1-A83095B47B88}"/>
               </a:ext>
             </a:extLst>
           </p:cNvPr>
@@ -1752,7 +3456,18 @@
           <a:bodyPr xmlns:a="http://schemas.openxmlformats.org/drawingml/2006/main" anchor="ctr">
             <a:noAutofit/>
           </a:bodyPr>
-          <a:lstStyle xmlns:a="http://schemas.openxmlformats.org/drawingml/2006/main"/>
+          <a:lstStyle xmlns:a="http://schemas.openxmlformats.org/drawingml/2006/main">
+            <a:defPPr algn="l">
+              <a:defRPr sz="2700" b="1">
+                <a:solidFill>
+                  <a:srgbClr val="161616"/>
+                </a:solidFill>
+                <a:latin typeface="Arial"/>
+                <a:ea typeface="Arial"/>
+                <a:cs typeface="Arial"/>
+              </a:defRPr>
+            </a:defPPr>
+          </a:lstStyle>
           <a:p xmlns:a="http://schemas.openxmlformats.org/drawingml/2006/main">
             <a:pPr algn="l">
               <a:defRPr sz="2700" b="1">
@@ -1780,7 +3495,13 @@
       </p:sp>
       <p:graphicFrame>
         <p:nvGraphicFramePr>
-          <p:cNvPr id="4" name=""/>
+          <p:cNvPr id="2" name="">
+            <a:extLst xmlns:a="http://schemas.openxmlformats.org/drawingml/2006/main">
+              <a:ext uri="{FF2B5EF4-FFF2-40B4-BE49-F238E27FC236}">
+                <a16:creationId xmlns:a16="http://schemas.microsoft.com/office/drawing/2014/main" id="{090B157B-20F0-4D85-B8BC-3896E10352EF}"/>
+              </a:ext>
+            </a:extLst>
+          </p:cNvPr>
           <p:cNvGraphicFramePr/>
           <p:nvPr/>
         </p:nvGraphicFramePr>
@@ -1816,6 +3537,30 @@
                     </a:p>
                   </a:txBody>
                   <a:tcPr marL="91440" marR="91440" marT="45720" marB="45720">
+                    <a:lnL w="9525">
+                      <a:solidFill>
+                        <a:srgbClr val="888888"/>
+                      </a:solidFill>
+                      <a:prstDash val="solid"/>
+                    </a:lnL>
+                    <a:lnR w="9525">
+                      <a:solidFill>
+                        <a:srgbClr val="888888"/>
+                      </a:solidFill>
+                      <a:prstDash val="solid"/>
+                    </a:lnR>
+                    <a:lnT w="9525">
+                      <a:solidFill>
+                        <a:srgbClr val="888888"/>
+                      </a:solidFill>
+                      <a:prstDash val="solid"/>
+                    </a:lnT>
+                    <a:lnB w="9525">
+                      <a:solidFill>
+                        <a:srgbClr val="888888"/>
+                      </a:solidFill>
+                      <a:prstDash val="solid"/>
+                    </a:lnB>
                     <a:solidFill>
                       <a:srgbClr val="F1F1F1"/>
                     </a:solidFill>
@@ -1840,6 +3585,24 @@
                     </a:p>
                   </a:txBody>
                   <a:tcPr marL="91440" marR="91440" marT="45720" marB="45720">
+                    <a:lnR w="9525">
+                      <a:solidFill>
+                        <a:srgbClr val="888888"/>
+                      </a:solidFill>
+                      <a:prstDash val="solid"/>
+                    </a:lnR>
+                    <a:lnT w="9525">
+                      <a:solidFill>
+                        <a:srgbClr val="888888"/>
+                      </a:solidFill>
+                      <a:prstDash val="solid"/>
+                    </a:lnT>
+                    <a:lnB w="9525">
+                      <a:solidFill>
+                        <a:srgbClr val="888888"/>
+                      </a:solidFill>
+                      <a:prstDash val="solid"/>
+                    </a:lnB>
                     <a:solidFill>
                       <a:srgbClr val="F1F1F1"/>
                     </a:solidFill>
@@ -1866,6 +3629,24 @@
                     </a:p>
                   </a:txBody>
                   <a:tcPr marL="91440" marR="91440" marT="45720" marB="45720">
+                    <a:lnL w="9525">
+                      <a:solidFill>
+                        <a:srgbClr val="888888"/>
+                      </a:solidFill>
+                      <a:prstDash val="solid"/>
+                    </a:lnL>
+                    <a:lnR w="9525">
+                      <a:solidFill>
+                        <a:srgbClr val="888888"/>
+                      </a:solidFill>
+                      <a:prstDash val="solid"/>
+                    </a:lnR>
+                    <a:lnB w="9525">
+                      <a:solidFill>
+                        <a:srgbClr val="888888"/>
+                      </a:solidFill>
+                      <a:prstDash val="solid"/>
+                    </a:lnB>
                     <a:solidFill>
                       <a:srgbClr val="FFFFFF"/>
                     </a:solidFill>
@@ -1890,6 +3671,18 @@
                     </a:p>
                   </a:txBody>
                   <a:tcPr marL="91440" marR="91440" marT="45720" marB="45720">
+                    <a:lnR w="9525">
+                      <a:solidFill>
+                        <a:srgbClr val="888888"/>
+                      </a:solidFill>
+                      <a:prstDash val="solid"/>
+                    </a:lnR>
+                    <a:lnB w="9525">
+                      <a:solidFill>
+                        <a:srgbClr val="888888"/>
+                      </a:solidFill>
+                      <a:prstDash val="solid"/>
+                    </a:lnB>
                     <a:solidFill>
                       <a:srgbClr val="FFFFFF"/>
                     </a:solidFill>
@@ -1916,6 +3709,24 @@
                     </a:p>
                   </a:txBody>
                   <a:tcPr marL="91440" marR="91440" marT="45720" marB="45720">
+                    <a:lnL w="9525">
+                      <a:solidFill>
+                        <a:srgbClr val="888888"/>
+                      </a:solidFill>
+                      <a:prstDash val="solid"/>
+                    </a:lnL>
+                    <a:lnR w="9525">
+                      <a:solidFill>
+                        <a:srgbClr val="888888"/>
+                      </a:solidFill>
+                      <a:prstDash val="solid"/>
+                    </a:lnR>
+                    <a:lnB w="9525">
+                      <a:solidFill>
+                        <a:srgbClr val="888888"/>
+                      </a:solidFill>
+                      <a:prstDash val="solid"/>
+                    </a:lnB>
                     <a:solidFill>
                       <a:srgbClr val="FFFFFF"/>
                     </a:solidFill>
@@ -1940,6 +3751,18 @@
                     </a:p>
                   </a:txBody>
                   <a:tcPr marL="91440" marR="91440" marT="45720" marB="45720">
+                    <a:lnR w="9525">
+                      <a:solidFill>
+                        <a:srgbClr val="888888"/>
+                      </a:solidFill>
+                      <a:prstDash val="solid"/>
+                    </a:lnR>
+                    <a:lnB w="9525">
+                      <a:solidFill>
+                        <a:srgbClr val="888888"/>
+                      </a:solidFill>
+                      <a:prstDash val="solid"/>
+                    </a:lnB>
                     <a:solidFill>
                       <a:srgbClr val="FFFFFF"/>
                     </a:solidFill>
@@ -1966,6 +3789,24 @@
                     </a:p>
                   </a:txBody>
                   <a:tcPr marL="91440" marR="91440" marT="45720" marB="45720">
+                    <a:lnL w="9525">
+                      <a:solidFill>
+                        <a:srgbClr val="888888"/>
+                      </a:solidFill>
+                      <a:prstDash val="solid"/>
+                    </a:lnL>
+                    <a:lnR w="9525">
+                      <a:solidFill>
+                        <a:srgbClr val="888888"/>
+                      </a:solidFill>
+                      <a:prstDash val="solid"/>
+                    </a:lnR>
+                    <a:lnB w="9525">
+                      <a:solidFill>
+                        <a:srgbClr val="888888"/>
+                      </a:solidFill>
+                      <a:prstDash val="solid"/>
+                    </a:lnB>
                     <a:solidFill>
                       <a:srgbClr val="FFFFFF"/>
                     </a:solidFill>
@@ -1990,6 +3831,18 @@
                     </a:p>
                   </a:txBody>
                   <a:tcPr marL="91440" marR="91440" marT="45720" marB="45720">
+                    <a:lnR w="9525">
+                      <a:solidFill>
+                        <a:srgbClr val="888888"/>
+                      </a:solidFill>
+                      <a:prstDash val="solid"/>
+                    </a:lnR>
+                    <a:lnB w="9525">
+                      <a:solidFill>
+                        <a:srgbClr val="888888"/>
+                      </a:solidFill>
+                      <a:prstDash val="solid"/>
+                    </a:lnB>
                     <a:solidFill>
                       <a:srgbClr val="FFFFFF"/>
                     </a:solidFill>
@@ -2016,6 +3869,24 @@
                     </a:p>
                   </a:txBody>
                   <a:tcPr marL="91440" marR="91440" marT="45720" marB="45720">
+                    <a:lnL w="9525">
+                      <a:solidFill>
+                        <a:srgbClr val="888888"/>
+                      </a:solidFill>
+                      <a:prstDash val="solid"/>
+                    </a:lnL>
+                    <a:lnR w="9525">
+                      <a:solidFill>
+                        <a:srgbClr val="888888"/>
+                      </a:solidFill>
+                      <a:prstDash val="solid"/>
+                    </a:lnR>
+                    <a:lnB w="9525">
+                      <a:solidFill>
+                        <a:srgbClr val="888888"/>
+                      </a:solidFill>
+                      <a:prstDash val="solid"/>
+                    </a:lnB>
                     <a:solidFill>
                       <a:srgbClr val="FFFFFF"/>
                     </a:solidFill>
@@ -2040,6 +3911,18 @@
                     </a:p>
                   </a:txBody>
                   <a:tcPr marL="91440" marR="91440" marT="45720" marB="45720">
+                    <a:lnR w="9525">
+                      <a:solidFill>
+                        <a:srgbClr val="888888"/>
+                      </a:solidFill>
+                      <a:prstDash val="solid"/>
+                    </a:lnR>
+                    <a:lnB w="9525">
+                      <a:solidFill>
+                        <a:srgbClr val="888888"/>
+                      </a:solidFill>
+                      <a:prstDash val="solid"/>
+                    </a:lnB>
                     <a:solidFill>
                       <a:srgbClr val="FFFFFF"/>
                     </a:solidFill>
@@ -2066,6 +3949,24 @@
                     </a:p>
                   </a:txBody>
                   <a:tcPr marL="91440" marR="91440" marT="45720" marB="45720">
+                    <a:lnL w="9525">
+                      <a:solidFill>
+                        <a:srgbClr val="888888"/>
+                      </a:solidFill>
+                      <a:prstDash val="solid"/>
+                    </a:lnL>
+                    <a:lnR w="9525">
+                      <a:solidFill>
+                        <a:srgbClr val="888888"/>
+                      </a:solidFill>
+                      <a:prstDash val="solid"/>
+                    </a:lnR>
+                    <a:lnB w="9525">
+                      <a:solidFill>
+                        <a:srgbClr val="888888"/>
+                      </a:solidFill>
+                      <a:prstDash val="solid"/>
+                    </a:lnB>
                     <a:solidFill>
                       <a:srgbClr val="FFFFFF"/>
                     </a:solidFill>
@@ -2090,6 +3991,18 @@
                     </a:p>
                   </a:txBody>
                   <a:tcPr marL="91440" marR="91440" marT="45720" marB="45720">
+                    <a:lnR w="9525">
+                      <a:solidFill>
+                        <a:srgbClr val="888888"/>
+                      </a:solidFill>
+                      <a:prstDash val="solid"/>
+                    </a:lnR>
+                    <a:lnB w="9525">
+                      <a:solidFill>
+                        <a:srgbClr val="888888"/>
+                      </a:solidFill>
+                      <a:prstDash val="solid"/>
+                    </a:lnB>
                     <a:solidFill>
                       <a:srgbClr val="FFFFFF"/>
                     </a:solidFill>
@@ -2103,7 +4016,7 @@
     </p:spTree>
     <p:extLst>
       <p:ext uri="{BB962C8B-B14F-4D97-AF65-F5344CB8AC3E}">
-        <p14:creationId xmlns:p14="http://schemas.microsoft.com/office/powerpoint/2010/main" val="1255064789"/>
+        <p14:creationId xmlns:p14="http://schemas.microsoft.com/office/powerpoint/2010/main" val="1705057814"/>
       </p:ext>
     </p:extLst>
   </p:cSld>
@@ -2131,10 +4044,10 @@
       </p:grpSpPr>
       <p:sp>
         <p:nvSpPr>
-          <p:cNvPr id="6" name="">
+          <p:cNvPr id="3" name="">
             <a:extLst xmlns:a="http://schemas.openxmlformats.org/drawingml/2006/main">
               <a:ext uri="{FF2B5EF4-FFF2-40B4-BE49-F238E27FC236}">
-                <a16:creationId xmlns:a16="http://schemas.microsoft.com/office/drawing/2014/main" id="{CD966D70-B22A-4374-8476-53AA8EE2FD32}"/>
+                <a16:creationId xmlns:a16="http://schemas.microsoft.com/office/drawing/2014/main" id="{13E3F5D5-A896-4959-892D-E4837937EDCF}"/>
               </a:ext>
             </a:extLst>
           </p:cNvPr>
@@ -2160,7 +4073,18 @@
           <a:bodyPr xmlns:a="http://schemas.openxmlformats.org/drawingml/2006/main" anchor="ctr">
             <a:noAutofit/>
           </a:bodyPr>
-          <a:lstStyle xmlns:a="http://schemas.openxmlformats.org/drawingml/2006/main"/>
+          <a:lstStyle xmlns:a="http://schemas.openxmlformats.org/drawingml/2006/main">
+            <a:defPPr algn="l">
+              <a:defRPr sz="2700" b="1">
+                <a:solidFill>
+                  <a:srgbClr val="161616"/>
+                </a:solidFill>
+                <a:latin typeface="Arial"/>
+                <a:ea typeface="Arial"/>
+                <a:cs typeface="Arial"/>
+              </a:defRPr>
+            </a:defPPr>
+          </a:lstStyle>
           <a:p xmlns:a="http://schemas.openxmlformats.org/drawingml/2006/main">
             <a:pPr algn="l">
               <a:defRPr sz="2700" b="1">
@@ -2181,243 +4105,535 @@
                 <a:ea typeface="Arial"/>
                 <a:cs typeface="Arial"/>
               </a:rPr>
-              <a:t>Формулы</a:t>
+              <a:t>Масса системы с упаковкой</a:t>
             </a:r>
           </a:p>
         </p:txBody>
       </p:sp>
-      <p:sp>
-        <p:nvSpPr>
+      <p:graphicFrame>
+        <p:nvGraphicFramePr>
           <p:cNvPr id="2" name="">
             <a:extLst xmlns:a="http://schemas.openxmlformats.org/drawingml/2006/main">
               <a:ext uri="{FF2B5EF4-FFF2-40B4-BE49-F238E27FC236}">
-                <a16:creationId xmlns:a16="http://schemas.microsoft.com/office/drawing/2014/main" id="{1762B8D3-793D-42C9-8E77-D04C061C0605}"/>
+                <a16:creationId xmlns:a16="http://schemas.microsoft.com/office/drawing/2014/main" id="{F50AADD2-2C38-4B39-9320-E9A0829F9A55}"/>
               </a:ext>
             </a:extLst>
           </p:cNvPr>
-          <p:cNvSpPr>
-            <a:spLocks xmlns:a="http://schemas.openxmlformats.org/drawingml/2006/main" noGrp="1"/>
-          </p:cNvSpPr>
+          <p:cNvGraphicFramePr/>
           <p:nvPr/>
-        </p:nvSpPr>
-        <p:spPr>
-          <a:xfrm xmlns:a="http://schemas.openxmlformats.org/drawingml/2006/main">
-            <a:off x="666750" y="1524000"/>
-            <a:ext cx="10763250" cy="914400"/>
-          </a:xfrm>
-          <a:prstGeom xmlns:a="http://schemas.openxmlformats.org/drawingml/2006/main" prst="rect">
-            <a:avLst/>
-          </a:prstGeom>
-          <a:noFill xmlns:a="http://schemas.openxmlformats.org/drawingml/2006/main"/>
-          <a:ln xmlns:a="http://schemas.openxmlformats.org/drawingml/2006/main" w="0">
-            <a:noFill/>
-          </a:ln>
-        </p:spPr>
-        <p:txBody>
-          <a:bodyPr xmlns:a="http://schemas.openxmlformats.org/drawingml/2006/main">
-            <a:noAutofit/>
-          </a:bodyPr>
-          <a:lstStyle xmlns:a="http://schemas.openxmlformats.org/drawingml/2006/main"/>
-          <a:p xmlns:a="http://schemas.openxmlformats.org/drawingml/2006/main">
-            <a:pPr>
-              <a:defRPr sz="2175" b="0">
-                <a:solidFill>
-                  <a:srgbClr val="161616"/>
-                </a:solidFill>
-                <a:latin typeface="Arial"/>
-                <a:ea typeface="Arial"/>
-                <a:cs typeface="Arial"/>
-              </a:defRPr>
-            </a:pPr>
-            <a:r>
-              <a:rPr sz="2175" b="0">
-                <a:solidFill>
-                  <a:srgbClr val="161616"/>
-                </a:solidFill>
-                <a:latin typeface="Arial"/>
-                <a:ea typeface="Arial"/>
-                <a:cs typeface="Arial"/>
-              </a:rPr>
-              <a:t>C = стоимость комплектующих + сборка + упаковка</a:t>
-            </a:r>
-          </a:p>
-        </p:txBody>
-      </p:sp>
-      <p:sp>
-        <p:nvSpPr>
-          <p:cNvPr id="3" name="">
-            <a:extLst xmlns:a="http://schemas.openxmlformats.org/drawingml/2006/main">
-              <a:ext uri="{FF2B5EF4-FFF2-40B4-BE49-F238E27FC236}">
-                <a16:creationId xmlns:a16="http://schemas.microsoft.com/office/drawing/2014/main" id="{51326388-880A-488F-A14E-1F7D18EA9E4C}"/>
-              </a:ext>
-            </a:extLst>
-          </p:cNvPr>
-          <p:cNvSpPr>
-            <a:spLocks xmlns:a="http://schemas.openxmlformats.org/drawingml/2006/main" noGrp="1"/>
-          </p:cNvSpPr>
-          <p:nvPr/>
-        </p:nvSpPr>
-        <p:spPr>
-          <a:xfrm xmlns:a="http://schemas.openxmlformats.org/drawingml/2006/main">
-            <a:off x="666750" y="2590800"/>
-            <a:ext cx="10763250" cy="914400"/>
-          </a:xfrm>
-          <a:prstGeom xmlns:a="http://schemas.openxmlformats.org/drawingml/2006/main" prst="rect">
-            <a:avLst/>
-          </a:prstGeom>
-          <a:noFill xmlns:a="http://schemas.openxmlformats.org/drawingml/2006/main"/>
-          <a:ln xmlns:a="http://schemas.openxmlformats.org/drawingml/2006/main" w="0">
-            <a:noFill/>
-          </a:ln>
-        </p:spPr>
-        <p:txBody>
-          <a:bodyPr xmlns:a="http://schemas.openxmlformats.org/drawingml/2006/main">
-            <a:noAutofit/>
-          </a:bodyPr>
-          <a:lstStyle xmlns:a="http://schemas.openxmlformats.org/drawingml/2006/main"/>
-          <a:p xmlns:a="http://schemas.openxmlformats.org/drawingml/2006/main">
-            <a:pPr>
-              <a:defRPr sz="2175" b="0">
-                <a:solidFill>
-                  <a:srgbClr val="161616"/>
-                </a:solidFill>
-                <a:latin typeface="Arial"/>
-                <a:ea typeface="Arial"/>
-                <a:cs typeface="Arial"/>
-              </a:defRPr>
-            </a:pPr>
-            <a:r>
-              <a:rPr sz="2175" b="0">
-                <a:solidFill>
-                  <a:srgbClr val="161616"/>
-                </a:solidFill>
-                <a:latin typeface="Arial"/>
-                <a:ea typeface="Arial"/>
-                <a:cs typeface="Arial"/>
-              </a:rPr>
-              <a:t>P = ceil(C × (1 + m) / s) × s</a:t>
-            </a:r>
-          </a:p>
-        </p:txBody>
-      </p:sp>
-      <p:sp>
-        <p:nvSpPr>
-          <p:cNvPr id="4" name="">
-            <a:extLst xmlns:a="http://schemas.openxmlformats.org/drawingml/2006/main">
-              <a:ext uri="{FF2B5EF4-FFF2-40B4-BE49-F238E27FC236}">
-                <a16:creationId xmlns:a16="http://schemas.microsoft.com/office/drawing/2014/main" id="{F5A67C97-7916-4544-B263-7C286C719D5B}"/>
-              </a:ext>
-            </a:extLst>
-          </p:cNvPr>
-          <p:cNvSpPr>
-            <a:spLocks xmlns:a="http://schemas.openxmlformats.org/drawingml/2006/main" noGrp="1"/>
-          </p:cNvSpPr>
-          <p:nvPr/>
-        </p:nvSpPr>
-        <p:spPr>
-          <a:xfrm xmlns:a="http://schemas.openxmlformats.org/drawingml/2006/main">
-            <a:off x="666750" y="3657600"/>
-            <a:ext cx="10763250" cy="914400"/>
-          </a:xfrm>
-          <a:prstGeom xmlns:a="http://schemas.openxmlformats.org/drawingml/2006/main" prst="rect">
-            <a:avLst/>
-          </a:prstGeom>
-          <a:noFill xmlns:a="http://schemas.openxmlformats.org/drawingml/2006/main"/>
-          <a:ln xmlns:a="http://schemas.openxmlformats.org/drawingml/2006/main" w="0">
-            <a:noFill/>
-          </a:ln>
-        </p:spPr>
-        <p:txBody>
-          <a:bodyPr xmlns:a="http://schemas.openxmlformats.org/drawingml/2006/main">
-            <a:noAutofit/>
-          </a:bodyPr>
-          <a:lstStyle xmlns:a="http://schemas.openxmlformats.org/drawingml/2006/main"/>
-          <a:p xmlns:a="http://schemas.openxmlformats.org/drawingml/2006/main">
-            <a:pPr>
-              <a:defRPr sz="2175" b="0">
-                <a:solidFill>
-                  <a:srgbClr val="161616"/>
-                </a:solidFill>
-                <a:latin typeface="Arial"/>
-                <a:ea typeface="Arial"/>
-                <a:cs typeface="Arial"/>
-              </a:defRPr>
-            </a:pPr>
-            <a:r>
-              <a:rPr sz="2175" b="0">
-                <a:solidFill>
-                  <a:srgbClr val="161616"/>
-                </a:solidFill>
-                <a:latin typeface="Arial"/>
-                <a:ea typeface="Arial"/>
-                <a:cs typeface="Arial"/>
-              </a:rPr>
-              <a:t>W = масса корпуса + масса слотов + упаковка</a:t>
-            </a:r>
-          </a:p>
-        </p:txBody>
-      </p:sp>
-      <p:sp>
-        <p:nvSpPr>
-          <p:cNvPr id="5" name="">
-            <a:extLst xmlns:a="http://schemas.openxmlformats.org/drawingml/2006/main">
-              <a:ext uri="{FF2B5EF4-FFF2-40B4-BE49-F238E27FC236}">
-                <a16:creationId xmlns:a16="http://schemas.microsoft.com/office/drawing/2014/main" id="{17914AD3-D8F7-428B-89CD-34990176BB5F}"/>
-              </a:ext>
-            </a:extLst>
-          </p:cNvPr>
-          <p:cNvSpPr>
-            <a:spLocks xmlns:a="http://schemas.openxmlformats.org/drawingml/2006/main" noGrp="1"/>
-          </p:cNvSpPr>
-          <p:nvPr/>
-        </p:nvSpPr>
-        <p:spPr>
-          <a:xfrm xmlns:a="http://schemas.openxmlformats.org/drawingml/2006/main">
-            <a:off x="666750" y="4724400"/>
-            <a:ext cx="10763250" cy="914400"/>
-          </a:xfrm>
-          <a:prstGeom xmlns:a="http://schemas.openxmlformats.org/drawingml/2006/main" prst="rect">
-            <a:avLst/>
-          </a:prstGeom>
-          <a:noFill xmlns:a="http://schemas.openxmlformats.org/drawingml/2006/main"/>
-          <a:ln xmlns:a="http://schemas.openxmlformats.org/drawingml/2006/main" w="0">
-            <a:noFill/>
-          </a:ln>
-        </p:spPr>
-        <p:txBody>
-          <a:bodyPr xmlns:a="http://schemas.openxmlformats.org/drawingml/2006/main">
-            <a:noAutofit/>
-          </a:bodyPr>
-          <a:lstStyle xmlns:a="http://schemas.openxmlformats.org/drawingml/2006/main"/>
-          <a:p xmlns:a="http://schemas.openxmlformats.org/drawingml/2006/main">
-            <a:pPr>
-              <a:defRPr sz="2175" b="0">
-                <a:solidFill>
-                  <a:srgbClr val="161616"/>
-                </a:solidFill>
-                <a:latin typeface="Arial"/>
-                <a:ea typeface="Arial"/>
-                <a:cs typeface="Arial"/>
-              </a:defRPr>
-            </a:pPr>
-            <a:r>
-              <a:rPr sz="2175" b="0">
-                <a:solidFill>
-                  <a:srgbClr val="161616"/>
-                </a:solidFill>
-                <a:latin typeface="Arial"/>
-                <a:ea typeface="Arial"/>
-                <a:cs typeface="Arial"/>
-              </a:rPr>
-              <a:t>Комиссия, налоги и доставка в учебный расчёт не включены.</a:t>
-            </a:r>
-          </a:p>
-        </p:txBody>
-      </p:sp>
+        </p:nvGraphicFramePr>
+        <p:xfrm>
+          <a:off xmlns:a="http://schemas.openxmlformats.org/drawingml/2006/main" x="571500" y="1428750"/>
+          <a:ext xmlns:a="http://schemas.openxmlformats.org/drawingml/2006/main" cx="11049000" cy="4572000"/>
+        </p:xfrm>
+        <a:graphic xmlns:a="http://schemas.openxmlformats.org/drawingml/2006/main">
+          <a:graphicData uri="http://schemas.openxmlformats.org/drawingml/2006/table">
+            <a:tbl>
+              <a:tblPr/>
+              <a:tblGrid>
+                <a:gridCol w="5048250"/>
+                <a:gridCol w="6000750"/>
+              </a:tblGrid>
+              <a:tr h="762000">
+                <a:tc>
+                  <a:txBody>
+                    <a:bodyPr/>
+                    <a:lstStyle/>
+                    <a:p>
+                      <a:r>
+                        <a:rPr sz="1800" b="1">
+                          <a:solidFill>
+                            <a:srgbClr val="161616"/>
+                          </a:solidFill>
+                          <a:latin typeface="Arial"/>
+                          <a:ea typeface="Arial"/>
+                          <a:cs typeface="Arial"/>
+                        </a:rPr>
+                        <a:t>Обозначение</a:t>
+                      </a:r>
+                    </a:p>
+                  </a:txBody>
+                  <a:tcPr marL="91440" marR="91440" marT="45720" marB="45720">
+                    <a:lnL w="9525">
+                      <a:solidFill>
+                        <a:srgbClr val="888888"/>
+                      </a:solidFill>
+                      <a:prstDash val="solid"/>
+                    </a:lnL>
+                    <a:lnR w="9525">
+                      <a:solidFill>
+                        <a:srgbClr val="888888"/>
+                      </a:solidFill>
+                      <a:prstDash val="solid"/>
+                    </a:lnR>
+                    <a:lnT w="9525">
+                      <a:solidFill>
+                        <a:srgbClr val="888888"/>
+                      </a:solidFill>
+                      <a:prstDash val="solid"/>
+                    </a:lnT>
+                    <a:lnB w="9525">
+                      <a:solidFill>
+                        <a:srgbClr val="888888"/>
+                      </a:solidFill>
+                      <a:prstDash val="solid"/>
+                    </a:lnB>
+                    <a:solidFill>
+                      <a:srgbClr val="F1F1F1"/>
+                    </a:solidFill>
+                  </a:tcPr>
+                </a:tc>
+                <a:tc>
+                  <a:txBody>
+                    <a:bodyPr/>
+                    <a:lstStyle/>
+                    <a:p>
+                      <a:r>
+                        <a:rPr sz="1800" b="1">
+                          <a:solidFill>
+                            <a:srgbClr val="161616"/>
+                          </a:solidFill>
+                          <a:latin typeface="Arial"/>
+                          <a:ea typeface="Arial"/>
+                          <a:cs typeface="Arial"/>
+                        </a:rPr>
+                        <a:t>Смысл</a:t>
+                      </a:r>
+                    </a:p>
+                  </a:txBody>
+                  <a:tcPr marL="91440" marR="91440" marT="45720" marB="45720">
+                    <a:lnR w="9525">
+                      <a:solidFill>
+                        <a:srgbClr val="888888"/>
+                      </a:solidFill>
+                      <a:prstDash val="solid"/>
+                    </a:lnR>
+                    <a:lnT w="9525">
+                      <a:solidFill>
+                        <a:srgbClr val="888888"/>
+                      </a:solidFill>
+                      <a:prstDash val="solid"/>
+                    </a:lnT>
+                    <a:lnB w="9525">
+                      <a:solidFill>
+                        <a:srgbClr val="888888"/>
+                      </a:solidFill>
+                      <a:prstDash val="solid"/>
+                    </a:lnB>
+                    <a:solidFill>
+                      <a:srgbClr val="F1F1F1"/>
+                    </a:solidFill>
+                  </a:tcPr>
+                </a:tc>
+              </a:tr>
+              <a:tr h="762000">
+                <a:tc>
+                  <a:txBody>
+                    <a:bodyPr/>
+                    <a:lstStyle/>
+                    <a:p>
+                      <a:r>
+                        <a:rPr sz="1800" b="0">
+                          <a:solidFill>
+                            <a:srgbClr val="161616"/>
+                          </a:solidFill>
+                          <a:latin typeface="Arial"/>
+                          <a:ea typeface="Arial"/>
+                          <a:cs typeface="Arial"/>
+                        </a:rPr>
+                        <a:t>W = wcase + Σ qᵢwᵢ + wpack</a:t>
+                      </a:r>
+                    </a:p>
+                  </a:txBody>
+                  <a:tcPr marL="91440" marR="91440" marT="45720" marB="45720">
+                    <a:lnL w="9525">
+                      <a:solidFill>
+                        <a:srgbClr val="888888"/>
+                      </a:solidFill>
+                      <a:prstDash val="solid"/>
+                    </a:lnL>
+                    <a:lnR w="9525">
+                      <a:solidFill>
+                        <a:srgbClr val="888888"/>
+                      </a:solidFill>
+                      <a:prstDash val="solid"/>
+                    </a:lnR>
+                    <a:lnB w="9525">
+                      <a:solidFill>
+                        <a:srgbClr val="888888"/>
+                      </a:solidFill>
+                      <a:prstDash val="solid"/>
+                    </a:lnB>
+                    <a:solidFill>
+                      <a:srgbClr val="FFFFFF"/>
+                    </a:solidFill>
+                  </a:tcPr>
+                </a:tc>
+                <a:tc>
+                  <a:txBody>
+                    <a:bodyPr/>
+                    <a:lstStyle/>
+                    <a:p>
+                      <a:r>
+                        <a:rPr sz="1800" b="0">
+                          <a:solidFill>
+                            <a:srgbClr val="161616"/>
+                          </a:solidFill>
+                          <a:latin typeface="Arial"/>
+                          <a:ea typeface="Arial"/>
+                          <a:cs typeface="Arial"/>
+                        </a:rPr>
+                        <a:t>Масса системы с упаковкой, кг</a:t>
+                      </a:r>
+                    </a:p>
+                  </a:txBody>
+                  <a:tcPr marL="91440" marR="91440" marT="45720" marB="45720">
+                    <a:lnR w="9525">
+                      <a:solidFill>
+                        <a:srgbClr val="888888"/>
+                      </a:solidFill>
+                      <a:prstDash val="solid"/>
+                    </a:lnR>
+                    <a:lnB w="9525">
+                      <a:solidFill>
+                        <a:srgbClr val="888888"/>
+                      </a:solidFill>
+                      <a:prstDash val="solid"/>
+                    </a:lnB>
+                    <a:solidFill>
+                      <a:srgbClr val="FFFFFF"/>
+                    </a:solidFill>
+                  </a:tcPr>
+                </a:tc>
+              </a:tr>
+              <a:tr h="762000">
+                <a:tc>
+                  <a:txBody>
+                    <a:bodyPr/>
+                    <a:lstStyle/>
+                    <a:p>
+                      <a:r>
+                        <a:rPr sz="1800" b="0">
+                          <a:solidFill>
+                            <a:srgbClr val="161616"/>
+                          </a:solidFill>
+                          <a:latin typeface="Arial"/>
+                          <a:ea typeface="Arial"/>
+                          <a:cs typeface="Arial"/>
+                        </a:rPr>
+                        <a:t>wcase</a:t>
+                      </a:r>
+                    </a:p>
+                  </a:txBody>
+                  <a:tcPr marL="91440" marR="91440" marT="45720" marB="45720">
+                    <a:lnL w="9525">
+                      <a:solidFill>
+                        <a:srgbClr val="888888"/>
+                      </a:solidFill>
+                      <a:prstDash val="solid"/>
+                    </a:lnL>
+                    <a:lnR w="9525">
+                      <a:solidFill>
+                        <a:srgbClr val="888888"/>
+                      </a:solidFill>
+                      <a:prstDash val="solid"/>
+                    </a:lnR>
+                    <a:lnB w="9525">
+                      <a:solidFill>
+                        <a:srgbClr val="888888"/>
+                      </a:solidFill>
+                      <a:prstDash val="solid"/>
+                    </a:lnB>
+                    <a:solidFill>
+                      <a:srgbClr val="FFFFFF"/>
+                    </a:solidFill>
+                  </a:tcPr>
+                </a:tc>
+                <a:tc>
+                  <a:txBody>
+                    <a:bodyPr/>
+                    <a:lstStyle/>
+                    <a:p>
+                      <a:r>
+                        <a:rPr sz="1800" b="0">
+                          <a:solidFill>
+                            <a:srgbClr val="161616"/>
+                          </a:solidFill>
+                          <a:latin typeface="Arial"/>
+                          <a:ea typeface="Arial"/>
+                          <a:cs typeface="Arial"/>
+                        </a:rPr>
+                        <a:t>Масса корпуса, кг</a:t>
+                      </a:r>
+                    </a:p>
+                  </a:txBody>
+                  <a:tcPr marL="91440" marR="91440" marT="45720" marB="45720">
+                    <a:lnR w="9525">
+                      <a:solidFill>
+                        <a:srgbClr val="888888"/>
+                      </a:solidFill>
+                      <a:prstDash val="solid"/>
+                    </a:lnR>
+                    <a:lnB w="9525">
+                      <a:solidFill>
+                        <a:srgbClr val="888888"/>
+                      </a:solidFill>
+                      <a:prstDash val="solid"/>
+                    </a:lnB>
+                    <a:solidFill>
+                      <a:srgbClr val="FFFFFF"/>
+                    </a:solidFill>
+                  </a:tcPr>
+                </a:tc>
+              </a:tr>
+              <a:tr h="762000">
+                <a:tc>
+                  <a:txBody>
+                    <a:bodyPr/>
+                    <a:lstStyle/>
+                    <a:p>
+                      <a:r>
+                        <a:rPr sz="1800" b="0">
+                          <a:solidFill>
+                            <a:srgbClr val="161616"/>
+                          </a:solidFill>
+                          <a:latin typeface="Arial"/>
+                          <a:ea typeface="Arial"/>
+                          <a:cs typeface="Arial"/>
+                        </a:rPr>
+                        <a:t>qᵢ и wᵢ</a:t>
+                      </a:r>
+                    </a:p>
+                  </a:txBody>
+                  <a:tcPr marL="91440" marR="91440" marT="45720" marB="45720">
+                    <a:lnL w="9525">
+                      <a:solidFill>
+                        <a:srgbClr val="888888"/>
+                      </a:solidFill>
+                      <a:prstDash val="solid"/>
+                    </a:lnL>
+                    <a:lnR w="9525">
+                      <a:solidFill>
+                        <a:srgbClr val="888888"/>
+                      </a:solidFill>
+                      <a:prstDash val="solid"/>
+                    </a:lnR>
+                    <a:lnB w="9525">
+                      <a:solidFill>
+                        <a:srgbClr val="888888"/>
+                      </a:solidFill>
+                      <a:prstDash val="solid"/>
+                    </a:lnB>
+                    <a:solidFill>
+                      <a:srgbClr val="FFFFFF"/>
+                    </a:solidFill>
+                  </a:tcPr>
+                </a:tc>
+                <a:tc>
+                  <a:txBody>
+                    <a:bodyPr/>
+                    <a:lstStyle/>
+                    <a:p>
+                      <a:r>
+                        <a:rPr sz="1800" b="0">
+                          <a:solidFill>
+                            <a:srgbClr val="161616"/>
+                          </a:solidFill>
+                          <a:latin typeface="Arial"/>
+                          <a:ea typeface="Arial"/>
+                          <a:cs typeface="Arial"/>
+                        </a:rPr>
+                        <a:t>Количество и масса единицы компонента</a:t>
+                      </a:r>
+                    </a:p>
+                  </a:txBody>
+                  <a:tcPr marL="91440" marR="91440" marT="45720" marB="45720">
+                    <a:lnR w="9525">
+                      <a:solidFill>
+                        <a:srgbClr val="888888"/>
+                      </a:solidFill>
+                      <a:prstDash val="solid"/>
+                    </a:lnR>
+                    <a:lnB w="9525">
+                      <a:solidFill>
+                        <a:srgbClr val="888888"/>
+                      </a:solidFill>
+                      <a:prstDash val="solid"/>
+                    </a:lnB>
+                    <a:solidFill>
+                      <a:srgbClr val="FFFFFF"/>
+                    </a:solidFill>
+                  </a:tcPr>
+                </a:tc>
+              </a:tr>
+              <a:tr h="762000">
+                <a:tc>
+                  <a:txBody>
+                    <a:bodyPr/>
+                    <a:lstStyle/>
+                    <a:p>
+                      <a:r>
+                        <a:rPr sz="1800" b="0">
+                          <a:solidFill>
+                            <a:srgbClr val="161616"/>
+                          </a:solidFill>
+                          <a:latin typeface="Arial"/>
+                          <a:ea typeface="Arial"/>
+                          <a:cs typeface="Arial"/>
+                        </a:rPr>
+                        <a:t>wpack</a:t>
+                      </a:r>
+                    </a:p>
+                  </a:txBody>
+                  <a:tcPr marL="91440" marR="91440" marT="45720" marB="45720">
+                    <a:lnL w="9525">
+                      <a:solidFill>
+                        <a:srgbClr val="888888"/>
+                      </a:solidFill>
+                      <a:prstDash val="solid"/>
+                    </a:lnL>
+                    <a:lnR w="9525">
+                      <a:solidFill>
+                        <a:srgbClr val="888888"/>
+                      </a:solidFill>
+                      <a:prstDash val="solid"/>
+                    </a:lnR>
+                    <a:lnB w="9525">
+                      <a:solidFill>
+                        <a:srgbClr val="888888"/>
+                      </a:solidFill>
+                      <a:prstDash val="solid"/>
+                    </a:lnB>
+                    <a:solidFill>
+                      <a:srgbClr val="FFFFFF"/>
+                    </a:solidFill>
+                  </a:tcPr>
+                </a:tc>
+                <a:tc>
+                  <a:txBody>
+                    <a:bodyPr/>
+                    <a:lstStyle/>
+                    <a:p>
+                      <a:r>
+                        <a:rPr sz="1800" b="0">
+                          <a:solidFill>
+                            <a:srgbClr val="161616"/>
+                          </a:solidFill>
+                          <a:latin typeface="Arial"/>
+                          <a:ea typeface="Arial"/>
+                          <a:cs typeface="Arial"/>
+                        </a:rPr>
+                        <a:t>Масса упаковки, кг</a:t>
+                      </a:r>
+                    </a:p>
+                  </a:txBody>
+                  <a:tcPr marL="91440" marR="91440" marT="45720" marB="45720">
+                    <a:lnR w="9525">
+                      <a:solidFill>
+                        <a:srgbClr val="888888"/>
+                      </a:solidFill>
+                      <a:prstDash val="solid"/>
+                    </a:lnR>
+                    <a:lnB w="9525">
+                      <a:solidFill>
+                        <a:srgbClr val="888888"/>
+                      </a:solidFill>
+                      <a:prstDash val="solid"/>
+                    </a:lnB>
+                    <a:solidFill>
+                      <a:srgbClr val="FFFFFF"/>
+                    </a:solidFill>
+                  </a:tcPr>
+                </a:tc>
+              </a:tr>
+              <a:tr h="762000">
+                <a:tc>
+                  <a:txBody>
+                    <a:bodyPr/>
+                    <a:lstStyle/>
+                    <a:p>
+                      <a:r>
+                        <a:rPr sz="1800" b="0">
+                          <a:solidFill>
+                            <a:srgbClr val="161616"/>
+                          </a:solidFill>
+                          <a:latin typeface="Arial"/>
+                          <a:ea typeface="Arial"/>
+                          <a:cs typeface="Arial"/>
+                        </a:rPr>
+                        <a:t>Σ qᵢwᵢ</a:t>
+                      </a:r>
+                    </a:p>
+                  </a:txBody>
+                  <a:tcPr marL="91440" marR="91440" marT="45720" marB="45720">
+                    <a:lnL w="9525">
+                      <a:solidFill>
+                        <a:srgbClr val="888888"/>
+                      </a:solidFill>
+                      <a:prstDash val="solid"/>
+                    </a:lnL>
+                    <a:lnR w="9525">
+                      <a:solidFill>
+                        <a:srgbClr val="888888"/>
+                      </a:solidFill>
+                      <a:prstDash val="solid"/>
+                    </a:lnR>
+                    <a:lnB w="9525">
+                      <a:solidFill>
+                        <a:srgbClr val="888888"/>
+                      </a:solidFill>
+                      <a:prstDash val="solid"/>
+                    </a:lnB>
+                    <a:solidFill>
+                      <a:srgbClr val="FFFFFF"/>
+                    </a:solidFill>
+                  </a:tcPr>
+                </a:tc>
+                <a:tc>
+                  <a:txBody>
+                    <a:bodyPr/>
+                    <a:lstStyle/>
+                    <a:p>
+                      <a:r>
+                        <a:rPr sz="1800" b="0">
+                          <a:solidFill>
+                            <a:srgbClr val="161616"/>
+                          </a:solidFill>
+                          <a:latin typeface="Arial"/>
+                          <a:ea typeface="Arial"/>
+                          <a:cs typeface="Arial"/>
+                        </a:rPr>
+                        <a:t>Масса слотов без повторного учёта корпуса</a:t>
+                      </a:r>
+                    </a:p>
+                  </a:txBody>
+                  <a:tcPr marL="91440" marR="91440" marT="45720" marB="45720">
+                    <a:lnR w="9525">
+                      <a:solidFill>
+                        <a:srgbClr val="888888"/>
+                      </a:solidFill>
+                      <a:prstDash val="solid"/>
+                    </a:lnR>
+                    <a:lnB w="9525">
+                      <a:solidFill>
+                        <a:srgbClr val="888888"/>
+                      </a:solidFill>
+                      <a:prstDash val="solid"/>
+                    </a:lnB>
+                    <a:solidFill>
+                      <a:srgbClr val="FFFFFF"/>
+                    </a:solidFill>
+                  </a:tcPr>
+                </a:tc>
+              </a:tr>
+            </a:tbl>
+          </a:graphicData>
+        </a:graphic>
+      </p:graphicFrame>
     </p:spTree>
     <p:extLst>
       <p:ext uri="{BB962C8B-B14F-4D97-AF65-F5344CB8AC3E}">
-        <p14:creationId xmlns:p14="http://schemas.microsoft.com/office/powerpoint/2010/main" val="1968409545"/>
+        <p14:creationId xmlns:p14="http://schemas.microsoft.com/office/powerpoint/2010/main" val="347012397"/>
       </p:ext>
     </p:extLst>
   </p:cSld>
@@ -2445,10 +4661,10 @@
       </p:grpSpPr>
       <p:sp>
         <p:nvSpPr>
-          <p:cNvPr id="10" name="">
+          <p:cNvPr id="3" name="">
             <a:extLst xmlns:a="http://schemas.openxmlformats.org/drawingml/2006/main">
               <a:ext uri="{FF2B5EF4-FFF2-40B4-BE49-F238E27FC236}">
-                <a16:creationId xmlns:a16="http://schemas.microsoft.com/office/drawing/2014/main" id="{4EF38108-DAC8-4535-A822-45A25C2EACF5}"/>
+                <a16:creationId xmlns:a16="http://schemas.microsoft.com/office/drawing/2014/main" id="{33DE9D96-176A-4956-99EE-7BFCBF6EBDDE}"/>
               </a:ext>
             </a:extLst>
           </p:cNvPr>
@@ -2474,7 +4690,18 @@
           <a:bodyPr xmlns:a="http://schemas.openxmlformats.org/drawingml/2006/main" anchor="ctr">
             <a:noAutofit/>
           </a:bodyPr>
-          <a:lstStyle xmlns:a="http://schemas.openxmlformats.org/drawingml/2006/main"/>
+          <a:lstStyle xmlns:a="http://schemas.openxmlformats.org/drawingml/2006/main">
+            <a:defPPr algn="l">
+              <a:defRPr sz="2700" b="1">
+                <a:solidFill>
+                  <a:srgbClr val="161616"/>
+                </a:solidFill>
+                <a:latin typeface="Arial"/>
+                <a:ea typeface="Arial"/>
+                <a:cs typeface="Arial"/>
+              </a:defRPr>
+            </a:defPPr>
+          </a:lstStyle>
           <a:p xmlns:a="http://schemas.openxmlformats.org/drawingml/2006/main">
             <a:pPr algn="l">
               <a:defRPr sz="2700" b="1">
@@ -2495,498 +4722,43 @@
                 <a:ea typeface="Arial"/>
                 <a:cs typeface="Arial"/>
               </a:rPr>
-              <a:t>Выбор предложения</a:t>
+              <a:t>Схема алгоритма расчёта цены и массы</a:t>
             </a:r>
           </a:p>
         </p:txBody>
       </p:sp>
-      <p:sp>
-        <p:nvSpPr>
+      <p:pic>
+        <p:nvPicPr>
           <p:cNvPr id="2" name="">
             <a:extLst xmlns:a="http://schemas.openxmlformats.org/drawingml/2006/main">
               <a:ext uri="{FF2B5EF4-FFF2-40B4-BE49-F238E27FC236}">
-                <a16:creationId xmlns:a16="http://schemas.microsoft.com/office/drawing/2014/main" id="{4D7DE98E-316E-445F-8431-EBB1F58F26F4}"/>
+                <a16:creationId xmlns:a16="http://schemas.microsoft.com/office/drawing/2014/main" id="{5A53C532-F583-42A8-BA61-D5B8622B4C08}"/>
               </a:ext>
             </a:extLst>
           </p:cNvPr>
-          <p:cNvSpPr>
-            <a:spLocks xmlns:a="http://schemas.openxmlformats.org/drawingml/2006/main" noGrp="1"/>
-          </p:cNvSpPr>
+          <p:cNvPicPr>
+            <a:picLocks xmlns:a="http://schemas.openxmlformats.org/drawingml/2006/main" noChangeAspect="1"/>
+          </p:cNvPicPr>
           <p:nvPr/>
-        </p:nvSpPr>
+        </p:nvPicPr>
+        <p:blipFill>
+          <a:blip xmlns:r="http://schemas.openxmlformats.org/officeDocument/2006/relationships" xmlns:a="http://schemas.openxmlformats.org/drawingml/2006/main" r:embed="R1b637b04846646cf"/>
+          <a:stretch xmlns:a="http://schemas.openxmlformats.org/drawingml/2006/main"/>
+        </p:blipFill>
         <p:spPr>
           <a:xfrm xmlns:a="http://schemas.openxmlformats.org/drawingml/2006/main">
-            <a:off x="714375" y="2238375"/>
-            <a:ext cx="2416969" cy="1428750"/>
-          </a:xfrm>
-          <a:prstGeom xmlns:a="http://schemas.openxmlformats.org/drawingml/2006/main" prst="roundRect">
-            <a:avLst>
-              <a:gd name="adj" fmla="val 5333"/>
-            </a:avLst>
-          </a:prstGeom>
-          <a:solidFill xmlns:a="http://schemas.openxmlformats.org/drawingml/2006/main">
-            <a:srgbClr val="FFFFFF"/>
-          </a:solidFill>
-          <a:ln xmlns:a="http://schemas.openxmlformats.org/drawingml/2006/main" w="19050">
-            <a:solidFill>
-              <a:srgbClr val="333333"/>
-            </a:solidFill>
-          </a:ln>
-        </p:spPr>
-        <p:txBody>
-          <a:bodyPr xmlns:a="http://schemas.openxmlformats.org/drawingml/2006/main" anchor="ctr"/>
-          <a:lstStyle xmlns:a="http://schemas.openxmlformats.org/drawingml/2006/main"/>
-          <a:p xmlns:a="http://schemas.openxmlformats.org/drawingml/2006/main">
-            <a:pPr algn="ctr">
-              <a:defRPr sz="1875">
-                <a:solidFill>
-                  <a:srgbClr val="111111"/>
-                </a:solidFill>
-                <a:latin typeface="Arial"/>
-                <a:ea typeface="Arial"/>
-                <a:cs typeface="Arial"/>
-              </a:defRPr>
-            </a:pPr>
-            <a:r>
-              <a:rPr sz="1875">
-                <a:solidFill>
-                  <a:srgbClr val="111111"/>
-                </a:solidFill>
-                <a:latin typeface="Arial"/>
-                <a:ea typeface="Arial"/>
-                <a:cs typeface="Arial"/>
-              </a:rPr>
-              <a:t>Разрешить</a:t>
-            </a:r>
-          </a:p>
-          <a:p xmlns:a="http://schemas.openxmlformats.org/drawingml/2006/main">
-            <a:pPr algn="ctr">
-              <a:defRPr sz="1875">
-                <a:solidFill>
-                  <a:srgbClr val="111111"/>
-                </a:solidFill>
-                <a:latin typeface="Arial"/>
-                <a:ea typeface="Arial"/>
-                <a:cs typeface="Arial"/>
-              </a:defRPr>
-            </a:pPr>
-            <a:r>
-              <a:rPr sz="1875">
-                <a:solidFill>
-                  <a:srgbClr val="111111"/>
-                </a:solidFill>
-                <a:latin typeface="Arial"/>
-                <a:ea typeface="Arial"/>
-                <a:cs typeface="Arial"/>
-              </a:rPr>
-              <a:t>группу</a:t>
-            </a:r>
-          </a:p>
-        </p:txBody>
-      </p:sp>
-      <p:sp>
-        <p:nvSpPr>
-          <p:cNvPr id="3" name="">
-            <a:extLst xmlns:a="http://schemas.openxmlformats.org/drawingml/2006/main">
-              <a:ext uri="{FF2B5EF4-FFF2-40B4-BE49-F238E27FC236}">
-                <a16:creationId xmlns:a16="http://schemas.microsoft.com/office/drawing/2014/main" id="{4D90DFAA-CCEA-47E5-AE7D-FCDFD5293ECF}"/>
-              </a:ext>
-            </a:extLst>
-          </p:cNvPr>
-          <p:cNvSpPr>
-            <a:spLocks xmlns:a="http://schemas.openxmlformats.org/drawingml/2006/main" noGrp="1"/>
-          </p:cNvSpPr>
-          <p:nvPr/>
-        </p:nvSpPr>
-        <p:spPr>
-          <a:xfrm xmlns:a="http://schemas.openxmlformats.org/drawingml/2006/main">
-            <a:off x="3188494" y="2800350"/>
-            <a:ext cx="228600" cy="266700"/>
-          </a:xfrm>
-          <a:prstGeom xmlns:a="http://schemas.openxmlformats.org/drawingml/2006/main" prst="rightArrow">
-            <a:avLst/>
-          </a:prstGeom>
-          <a:solidFill xmlns:a="http://schemas.openxmlformats.org/drawingml/2006/main">
-            <a:srgbClr val="444444"/>
-          </a:solidFill>
-          <a:ln xmlns:a="http://schemas.openxmlformats.org/drawingml/2006/main" w="0">
-            <a:noFill/>
-          </a:ln>
-        </p:spPr>
-      </p:sp>
-      <p:sp>
-        <p:nvSpPr>
-          <p:cNvPr id="4" name="">
-            <a:extLst xmlns:a="http://schemas.openxmlformats.org/drawingml/2006/main">
-              <a:ext uri="{FF2B5EF4-FFF2-40B4-BE49-F238E27FC236}">
-                <a16:creationId xmlns:a16="http://schemas.microsoft.com/office/drawing/2014/main" id="{930E8EDB-30DF-419B-BCDB-6B16F061B8A4}"/>
-              </a:ext>
-            </a:extLst>
-          </p:cNvPr>
-          <p:cNvSpPr>
-            <a:spLocks xmlns:a="http://schemas.openxmlformats.org/drawingml/2006/main" noGrp="1"/>
-          </p:cNvSpPr>
-          <p:nvPr/>
-        </p:nvSpPr>
-        <p:spPr>
-          <a:xfrm xmlns:a="http://schemas.openxmlformats.org/drawingml/2006/main">
-            <a:off x="3464719" y="2238375"/>
-            <a:ext cx="2416969" cy="1428750"/>
-          </a:xfrm>
-          <a:prstGeom xmlns:a="http://schemas.openxmlformats.org/drawingml/2006/main" prst="roundRect">
-            <a:avLst>
-              <a:gd name="adj" fmla="val 5333"/>
-            </a:avLst>
-          </a:prstGeom>
-          <a:solidFill xmlns:a="http://schemas.openxmlformats.org/drawingml/2006/main">
-            <a:srgbClr val="FFFFFF"/>
-          </a:solidFill>
-          <a:ln xmlns:a="http://schemas.openxmlformats.org/drawingml/2006/main" w="19050">
-            <a:solidFill>
-              <a:srgbClr val="333333"/>
-            </a:solidFill>
-          </a:ln>
-        </p:spPr>
-        <p:txBody>
-          <a:bodyPr xmlns:a="http://schemas.openxmlformats.org/drawingml/2006/main" anchor="ctr"/>
-          <a:lstStyle xmlns:a="http://schemas.openxmlformats.org/drawingml/2006/main"/>
-          <a:p xmlns:a="http://schemas.openxmlformats.org/drawingml/2006/main">
-            <a:pPr algn="ctr">
-              <a:defRPr sz="1875">
-                <a:solidFill>
-                  <a:srgbClr val="111111"/>
-                </a:solidFill>
-                <a:latin typeface="Arial"/>
-                <a:ea typeface="Arial"/>
-                <a:cs typeface="Arial"/>
-              </a:defRPr>
-            </a:pPr>
-            <a:r>
-              <a:rPr sz="1875">
-                <a:solidFill>
-                  <a:srgbClr val="111111"/>
-                </a:solidFill>
-                <a:latin typeface="Arial"/>
-                <a:ea typeface="Arial"/>
-                <a:cs typeface="Arial"/>
-              </a:rPr>
-              <a:t>Проверить</a:t>
-            </a:r>
-          </a:p>
-          <a:p xmlns:a="http://schemas.openxmlformats.org/drawingml/2006/main">
-            <a:pPr algn="ctr">
-              <a:defRPr sz="1875">
-                <a:solidFill>
-                  <a:srgbClr val="111111"/>
-                </a:solidFill>
-                <a:latin typeface="Arial"/>
-                <a:ea typeface="Arial"/>
-                <a:cs typeface="Arial"/>
-              </a:defRPr>
-            </a:pPr>
-            <a:r>
-              <a:rPr sz="1875">
-                <a:solidFill>
-                  <a:srgbClr val="111111"/>
-                </a:solidFill>
-                <a:latin typeface="Arial"/>
-                <a:ea typeface="Arial"/>
-                <a:cs typeface="Arial"/>
-              </a:rPr>
-              <a:t>совместимость</a:t>
-            </a:r>
-          </a:p>
-        </p:txBody>
-      </p:sp>
-      <p:sp>
-        <p:nvSpPr>
-          <p:cNvPr id="5" name="">
-            <a:extLst xmlns:a="http://schemas.openxmlformats.org/drawingml/2006/main">
-              <a:ext uri="{FF2B5EF4-FFF2-40B4-BE49-F238E27FC236}">
-                <a16:creationId xmlns:a16="http://schemas.microsoft.com/office/drawing/2014/main" id="{6C10AEBB-9EBA-4469-A04F-48CF6327FD21}"/>
-              </a:ext>
-            </a:extLst>
-          </p:cNvPr>
-          <p:cNvSpPr>
-            <a:spLocks xmlns:a="http://schemas.openxmlformats.org/drawingml/2006/main" noGrp="1"/>
-          </p:cNvSpPr>
-          <p:nvPr/>
-        </p:nvSpPr>
-        <p:spPr>
-          <a:xfrm xmlns:a="http://schemas.openxmlformats.org/drawingml/2006/main">
-            <a:off x="5938838" y="2800350"/>
-            <a:ext cx="228600" cy="266700"/>
-          </a:xfrm>
-          <a:prstGeom xmlns:a="http://schemas.openxmlformats.org/drawingml/2006/main" prst="rightArrow">
-            <a:avLst/>
-          </a:prstGeom>
-          <a:solidFill xmlns:a="http://schemas.openxmlformats.org/drawingml/2006/main">
-            <a:srgbClr val="444444"/>
-          </a:solidFill>
-          <a:ln xmlns:a="http://schemas.openxmlformats.org/drawingml/2006/main" w="0">
-            <a:noFill/>
-          </a:ln>
-        </p:spPr>
-      </p:sp>
-      <p:sp>
-        <p:nvSpPr>
-          <p:cNvPr id="6" name="">
-            <a:extLst xmlns:a="http://schemas.openxmlformats.org/drawingml/2006/main">
-              <a:ext uri="{FF2B5EF4-FFF2-40B4-BE49-F238E27FC236}">
-                <a16:creationId xmlns:a16="http://schemas.microsoft.com/office/drawing/2014/main" id="{FA6C31C4-C96B-43ED-8E5B-D433F24B70BA}"/>
-              </a:ext>
-            </a:extLst>
-          </p:cNvPr>
-          <p:cNvSpPr>
-            <a:spLocks xmlns:a="http://schemas.openxmlformats.org/drawingml/2006/main" noGrp="1"/>
-          </p:cNvSpPr>
-          <p:nvPr/>
-        </p:nvSpPr>
-        <p:spPr>
-          <a:xfrm xmlns:a="http://schemas.openxmlformats.org/drawingml/2006/main">
-            <a:off x="6215063" y="2238375"/>
-            <a:ext cx="2416969" cy="1428750"/>
-          </a:xfrm>
-          <a:prstGeom xmlns:a="http://schemas.openxmlformats.org/drawingml/2006/main" prst="roundRect">
-            <a:avLst>
-              <a:gd name="adj" fmla="val 5333"/>
-            </a:avLst>
-          </a:prstGeom>
-          <a:solidFill xmlns:a="http://schemas.openxmlformats.org/drawingml/2006/main">
-            <a:srgbClr val="FFFFFF"/>
-          </a:solidFill>
-          <a:ln xmlns:a="http://schemas.openxmlformats.org/drawingml/2006/main" w="19050">
-            <a:solidFill>
-              <a:srgbClr val="333333"/>
-            </a:solidFill>
-          </a:ln>
-        </p:spPr>
-        <p:txBody>
-          <a:bodyPr xmlns:a="http://schemas.openxmlformats.org/drawingml/2006/main" anchor="ctr"/>
-          <a:lstStyle xmlns:a="http://schemas.openxmlformats.org/drawingml/2006/main"/>
-          <a:p xmlns:a="http://schemas.openxmlformats.org/drawingml/2006/main">
-            <a:pPr algn="ctr">
-              <a:defRPr sz="1875">
-                <a:solidFill>
-                  <a:srgbClr val="111111"/>
-                </a:solidFill>
-                <a:latin typeface="Arial"/>
-                <a:ea typeface="Arial"/>
-                <a:cs typeface="Arial"/>
-              </a:defRPr>
-            </a:pPr>
-            <a:r>
-              <a:rPr sz="1875">
-                <a:solidFill>
-                  <a:srgbClr val="111111"/>
-                </a:solidFill>
-                <a:latin typeface="Arial"/>
-                <a:ea typeface="Arial"/>
-                <a:cs typeface="Arial"/>
-              </a:rPr>
-              <a:t>Отсеять</a:t>
-            </a:r>
-          </a:p>
-          <a:p xmlns:a="http://schemas.openxmlformats.org/drawingml/2006/main">
-            <a:pPr algn="ctr">
-              <a:defRPr sz="1875">
-                <a:solidFill>
-                  <a:srgbClr val="111111"/>
-                </a:solidFill>
-                <a:latin typeface="Arial"/>
-                <a:ea typeface="Arial"/>
-                <a:cs typeface="Arial"/>
-              </a:defRPr>
-            </a:pPr>
-            <a:r>
-              <a:rPr sz="1875">
-                <a:solidFill>
-                  <a:srgbClr val="111111"/>
-                </a:solidFill>
-                <a:latin typeface="Arial"/>
-                <a:ea typeface="Arial"/>
-                <a:cs typeface="Arial"/>
-              </a:rPr>
-              <a:t>устаревшие</a:t>
-            </a:r>
-          </a:p>
-        </p:txBody>
-      </p:sp>
-      <p:sp>
-        <p:nvSpPr>
-          <p:cNvPr id="7" name="">
-            <a:extLst xmlns:a="http://schemas.openxmlformats.org/drawingml/2006/main">
-              <a:ext uri="{FF2B5EF4-FFF2-40B4-BE49-F238E27FC236}">
-                <a16:creationId xmlns:a16="http://schemas.microsoft.com/office/drawing/2014/main" id="{C79C4B95-FBBC-48BB-91D4-C5DB4AF7183A}"/>
-              </a:ext>
-            </a:extLst>
-          </p:cNvPr>
-          <p:cNvSpPr>
-            <a:spLocks xmlns:a="http://schemas.openxmlformats.org/drawingml/2006/main" noGrp="1"/>
-          </p:cNvSpPr>
-          <p:nvPr/>
-        </p:nvSpPr>
-        <p:spPr>
-          <a:xfrm xmlns:a="http://schemas.openxmlformats.org/drawingml/2006/main">
-            <a:off x="8689181" y="2800350"/>
-            <a:ext cx="228600" cy="266700"/>
-          </a:xfrm>
-          <a:prstGeom xmlns:a="http://schemas.openxmlformats.org/drawingml/2006/main" prst="rightArrow">
-            <a:avLst/>
-          </a:prstGeom>
-          <a:solidFill xmlns:a="http://schemas.openxmlformats.org/drawingml/2006/main">
-            <a:srgbClr val="444444"/>
-          </a:solidFill>
-          <a:ln xmlns:a="http://schemas.openxmlformats.org/drawingml/2006/main" w="0">
-            <a:noFill/>
-          </a:ln>
-        </p:spPr>
-      </p:sp>
-      <p:sp>
-        <p:nvSpPr>
-          <p:cNvPr id="8" name="">
-            <a:extLst xmlns:a="http://schemas.openxmlformats.org/drawingml/2006/main">
-              <a:ext uri="{FF2B5EF4-FFF2-40B4-BE49-F238E27FC236}">
-                <a16:creationId xmlns:a16="http://schemas.microsoft.com/office/drawing/2014/main" id="{F9D8510E-DAE3-42AE-8FDB-28E3ED000938}"/>
-              </a:ext>
-            </a:extLst>
-          </p:cNvPr>
-          <p:cNvSpPr>
-            <a:spLocks xmlns:a="http://schemas.openxmlformats.org/drawingml/2006/main" noGrp="1"/>
-          </p:cNvSpPr>
-          <p:nvPr/>
-        </p:nvSpPr>
-        <p:spPr>
-          <a:xfrm xmlns:a="http://schemas.openxmlformats.org/drawingml/2006/main">
-            <a:off x="8965406" y="2238375"/>
-            <a:ext cx="2416969" cy="1428750"/>
-          </a:xfrm>
-          <a:prstGeom xmlns:a="http://schemas.openxmlformats.org/drawingml/2006/main" prst="roundRect">
-            <a:avLst>
-              <a:gd name="adj" fmla="val 5333"/>
-            </a:avLst>
-          </a:prstGeom>
-          <a:solidFill xmlns:a="http://schemas.openxmlformats.org/drawingml/2006/main">
-            <a:srgbClr val="FFFFFF"/>
-          </a:solidFill>
-          <a:ln xmlns:a="http://schemas.openxmlformats.org/drawingml/2006/main" w="19050">
-            <a:solidFill>
-              <a:srgbClr val="333333"/>
-            </a:solidFill>
-          </a:ln>
-        </p:spPr>
-        <p:txBody>
-          <a:bodyPr xmlns:a="http://schemas.openxmlformats.org/drawingml/2006/main" anchor="ctr"/>
-          <a:lstStyle xmlns:a="http://schemas.openxmlformats.org/drawingml/2006/main"/>
-          <a:p xmlns:a="http://schemas.openxmlformats.org/drawingml/2006/main">
-            <a:pPr algn="ctr">
-              <a:defRPr sz="1875">
-                <a:solidFill>
-                  <a:srgbClr val="111111"/>
-                </a:solidFill>
-                <a:latin typeface="Arial"/>
-                <a:ea typeface="Arial"/>
-                <a:cs typeface="Arial"/>
-              </a:defRPr>
-            </a:pPr>
-            <a:r>
-              <a:rPr sz="1875">
-                <a:solidFill>
-                  <a:srgbClr val="111111"/>
-                </a:solidFill>
-                <a:latin typeface="Arial"/>
-                <a:ea typeface="Arial"/>
-                <a:cs typeface="Arial"/>
-              </a:rPr>
-              <a:t>Выбрать</a:t>
-            </a:r>
-          </a:p>
-          <a:p xmlns:a="http://schemas.openxmlformats.org/drawingml/2006/main">
-            <a:pPr algn="ctr">
-              <a:defRPr sz="1875">
-                <a:solidFill>
-                  <a:srgbClr val="111111"/>
-                </a:solidFill>
-                <a:latin typeface="Arial"/>
-                <a:ea typeface="Arial"/>
-                <a:cs typeface="Arial"/>
-              </a:defRPr>
-            </a:pPr>
-            <a:r>
-              <a:rPr sz="1875">
-                <a:solidFill>
-                  <a:srgbClr val="111111"/>
-                </a:solidFill>
-                <a:latin typeface="Arial"/>
-                <a:ea typeface="Arial"/>
-                <a:cs typeface="Arial"/>
-              </a:rPr>
-              <a:t>по приоритету</a:t>
-            </a:r>
-          </a:p>
-        </p:txBody>
-      </p:sp>
-      <p:sp>
-        <p:nvSpPr>
-          <p:cNvPr id="9" name="">
-            <a:extLst xmlns:a="http://schemas.openxmlformats.org/drawingml/2006/main">
-              <a:ext uri="{FF2B5EF4-FFF2-40B4-BE49-F238E27FC236}">
-                <a16:creationId xmlns:a16="http://schemas.microsoft.com/office/drawing/2014/main" id="{45564341-9A5F-476F-9736-9504DF8A0DF6}"/>
-              </a:ext>
-            </a:extLst>
-          </p:cNvPr>
-          <p:cNvSpPr>
-            <a:spLocks xmlns:a="http://schemas.openxmlformats.org/drawingml/2006/main" noGrp="1"/>
-          </p:cNvSpPr>
-          <p:nvPr/>
-        </p:nvSpPr>
-        <p:spPr>
-          <a:xfrm xmlns:a="http://schemas.openxmlformats.org/drawingml/2006/main">
-            <a:off x="714375" y="4429125"/>
-            <a:ext cx="10572750" cy="1285875"/>
+            <a:off x="4020642" y="1285875"/>
+            <a:ext cx="4150716" cy="5000625"/>
           </a:xfrm>
           <a:prstGeom xmlns:a="http://schemas.openxmlformats.org/drawingml/2006/main" prst="rect">
             <a:avLst/>
           </a:prstGeom>
-          <a:noFill xmlns:a="http://schemas.openxmlformats.org/drawingml/2006/main"/>
-          <a:ln xmlns:a="http://schemas.openxmlformats.org/drawingml/2006/main" w="0">
-            <a:noFill/>
-          </a:ln>
         </p:spPr>
-        <p:txBody>
-          <a:bodyPr xmlns:a="http://schemas.openxmlformats.org/drawingml/2006/main">
-            <a:noAutofit/>
-          </a:bodyPr>
-          <a:lstStyle xmlns:a="http://schemas.openxmlformats.org/drawingml/2006/main"/>
-          <a:p xmlns:a="http://schemas.openxmlformats.org/drawingml/2006/main">
-            <a:pPr>
-              <a:defRPr sz="2175" b="0">
-                <a:solidFill>
-                  <a:srgbClr val="161616"/>
-                </a:solidFill>
-                <a:latin typeface="Arial"/>
-                <a:ea typeface="Arial"/>
-                <a:cs typeface="Arial"/>
-              </a:defRPr>
-            </a:pPr>
-            <a:r>
-              <a:rPr sz="2175" b="0">
-                <a:solidFill>
-                  <a:srgbClr val="161616"/>
-                </a:solidFill>
-                <a:latin typeface="Arial"/>
-                <a:ea typeface="Arial"/>
-                <a:cs typeface="Arial"/>
-              </a:rPr>
-              <a:t>Далее учитываются цена, дата и ID. Закреплённый SKU ограничивает множество кандидатов.</a:t>
-            </a:r>
-          </a:p>
-        </p:txBody>
-      </p:sp>
+      </p:pic>
     </p:spTree>
     <p:extLst>
       <p:ext uri="{BB962C8B-B14F-4D97-AF65-F5344CB8AC3E}">
-        <p14:creationId xmlns:p14="http://schemas.microsoft.com/office/powerpoint/2010/main" val="1254341610"/>
+        <p14:creationId xmlns:p14="http://schemas.microsoft.com/office/powerpoint/2010/main" val="1229090160"/>
       </p:ext>
     </p:extLst>
   </p:cSld>
@@ -3014,10 +4786,10 @@
       </p:grpSpPr>
       <p:sp>
         <p:nvSpPr>
-          <p:cNvPr id="10" name="">
+          <p:cNvPr id="3" name="">
             <a:extLst xmlns:a="http://schemas.openxmlformats.org/drawingml/2006/main">
               <a:ext uri="{FF2B5EF4-FFF2-40B4-BE49-F238E27FC236}">
-                <a16:creationId xmlns:a16="http://schemas.microsoft.com/office/drawing/2014/main" id="{7288B47F-D584-493F-ADA9-EE85020B5DD7}"/>
+                <a16:creationId xmlns:a16="http://schemas.microsoft.com/office/drawing/2014/main" id="{9485E695-19FD-4AAE-B5FD-75EE1C024C94}"/>
               </a:ext>
             </a:extLst>
           </p:cNvPr>
@@ -3043,7 +4815,18 @@
           <a:bodyPr xmlns:a="http://schemas.openxmlformats.org/drawingml/2006/main" anchor="ctr">
             <a:noAutofit/>
           </a:bodyPr>
-          <a:lstStyle xmlns:a="http://schemas.openxmlformats.org/drawingml/2006/main"/>
+          <a:lstStyle xmlns:a="http://schemas.openxmlformats.org/drawingml/2006/main">
+            <a:defPPr algn="l">
+              <a:defRPr sz="2700" b="1">
+                <a:solidFill>
+                  <a:srgbClr val="161616"/>
+                </a:solidFill>
+                <a:latin typeface="Arial"/>
+                <a:ea typeface="Arial"/>
+                <a:cs typeface="Arial"/>
+              </a:defRPr>
+            </a:defPPr>
+          </a:lstStyle>
           <a:p xmlns:a="http://schemas.openxmlformats.org/drawingml/2006/main">
             <a:pPr algn="l">
               <a:defRPr sz="2700" b="1">
@@ -3064,452 +4847,43 @@
                 <a:ea typeface="Arial"/>
                 <a:cs typeface="Arial"/>
               </a:rPr>
-              <a:t>Массовая замена</a:t>
+              <a:t>Схема алгоритма выбора предложения</a:t>
             </a:r>
           </a:p>
         </p:txBody>
       </p:sp>
-      <p:sp>
-        <p:nvSpPr>
+      <p:pic>
+        <p:nvPicPr>
           <p:cNvPr id="2" name="">
             <a:extLst xmlns:a="http://schemas.openxmlformats.org/drawingml/2006/main">
               <a:ext uri="{FF2B5EF4-FFF2-40B4-BE49-F238E27FC236}">
-                <a16:creationId xmlns:a16="http://schemas.microsoft.com/office/drawing/2014/main" id="{BD16A4A8-707A-4219-9F39-5732C9C1F6D5}"/>
+                <a16:creationId xmlns:a16="http://schemas.microsoft.com/office/drawing/2014/main" id="{D7B39B01-D142-432A-838D-B459450348F1}"/>
               </a:ext>
             </a:extLst>
           </p:cNvPr>
-          <p:cNvSpPr>
-            <a:spLocks xmlns:a="http://schemas.openxmlformats.org/drawingml/2006/main" noGrp="1"/>
-          </p:cNvSpPr>
+          <p:cNvPicPr>
+            <a:picLocks xmlns:a="http://schemas.openxmlformats.org/drawingml/2006/main" noChangeAspect="1"/>
+          </p:cNvPicPr>
           <p:nvPr/>
-        </p:nvSpPr>
+        </p:nvPicPr>
+        <p:blipFill>
+          <a:blip xmlns:r="http://schemas.openxmlformats.org/officeDocument/2006/relationships" xmlns:a="http://schemas.openxmlformats.org/drawingml/2006/main" r:embed="R431b0c70f5064ece"/>
+          <a:stretch xmlns:a="http://schemas.openxmlformats.org/drawingml/2006/main"/>
+        </p:blipFill>
         <p:spPr>
           <a:xfrm xmlns:a="http://schemas.openxmlformats.org/drawingml/2006/main">
-            <a:off x="714375" y="2238375"/>
-            <a:ext cx="2416969" cy="1428750"/>
-          </a:xfrm>
-          <a:prstGeom xmlns:a="http://schemas.openxmlformats.org/drawingml/2006/main" prst="roundRect">
-            <a:avLst>
-              <a:gd name="adj" fmla="val 5333"/>
-            </a:avLst>
-          </a:prstGeom>
-          <a:solidFill xmlns:a="http://schemas.openxmlformats.org/drawingml/2006/main">
-            <a:srgbClr val="FFFFFF"/>
-          </a:solidFill>
-          <a:ln xmlns:a="http://schemas.openxmlformats.org/drawingml/2006/main" w="19050">
-            <a:solidFill>
-              <a:srgbClr val="333333"/>
-            </a:solidFill>
-          </a:ln>
-        </p:spPr>
-        <p:txBody>
-          <a:bodyPr xmlns:a="http://schemas.openxmlformats.org/drawingml/2006/main" anchor="ctr"/>
-          <a:lstStyle xmlns:a="http://schemas.openxmlformats.org/drawingml/2006/main"/>
-          <a:p xmlns:a="http://schemas.openxmlformats.org/drawingml/2006/main">
-            <a:pPr algn="ctr">
-              <a:defRPr sz="1875">
-                <a:solidFill>
-                  <a:srgbClr val="111111"/>
-                </a:solidFill>
-                <a:latin typeface="Arial"/>
-                <a:ea typeface="Arial"/>
-                <a:cs typeface="Arial"/>
-              </a:defRPr>
-            </a:pPr>
-            <a:r>
-              <a:rPr sz="1875">
-                <a:solidFill>
-                  <a:srgbClr val="111111"/>
-                </a:solidFill>
-                <a:latin typeface="Arial"/>
-                <a:ea typeface="Arial"/>
-                <a:cs typeface="Arial"/>
-              </a:rPr>
-              <a:t>Предпросмотр</a:t>
-            </a:r>
-          </a:p>
-        </p:txBody>
-      </p:sp>
-      <p:sp>
-        <p:nvSpPr>
-          <p:cNvPr id="3" name="">
-            <a:extLst xmlns:a="http://schemas.openxmlformats.org/drawingml/2006/main">
-              <a:ext uri="{FF2B5EF4-FFF2-40B4-BE49-F238E27FC236}">
-                <a16:creationId xmlns:a16="http://schemas.microsoft.com/office/drawing/2014/main" id="{1C3B4A7D-6B28-43E2-9771-2B524B8E313B}"/>
-              </a:ext>
-            </a:extLst>
-          </p:cNvPr>
-          <p:cNvSpPr>
-            <a:spLocks xmlns:a="http://schemas.openxmlformats.org/drawingml/2006/main" noGrp="1"/>
-          </p:cNvSpPr>
-          <p:nvPr/>
-        </p:nvSpPr>
-        <p:spPr>
-          <a:xfrm xmlns:a="http://schemas.openxmlformats.org/drawingml/2006/main">
-            <a:off x="3188494" y="2800350"/>
-            <a:ext cx="228600" cy="266700"/>
-          </a:xfrm>
-          <a:prstGeom xmlns:a="http://schemas.openxmlformats.org/drawingml/2006/main" prst="rightArrow">
-            <a:avLst/>
-          </a:prstGeom>
-          <a:solidFill xmlns:a="http://schemas.openxmlformats.org/drawingml/2006/main">
-            <a:srgbClr val="444444"/>
-          </a:solidFill>
-          <a:ln xmlns:a="http://schemas.openxmlformats.org/drawingml/2006/main" w="0">
-            <a:noFill/>
-          </a:ln>
-        </p:spPr>
-      </p:sp>
-      <p:sp>
-        <p:nvSpPr>
-          <p:cNvPr id="4" name="">
-            <a:extLst xmlns:a="http://schemas.openxmlformats.org/drawingml/2006/main">
-              <a:ext uri="{FF2B5EF4-FFF2-40B4-BE49-F238E27FC236}">
-                <a16:creationId xmlns:a16="http://schemas.microsoft.com/office/drawing/2014/main" id="{36696420-63EC-46D7-80A5-AD0CEB87592C}"/>
-              </a:ext>
-            </a:extLst>
-          </p:cNvPr>
-          <p:cNvSpPr>
-            <a:spLocks xmlns:a="http://schemas.openxmlformats.org/drawingml/2006/main" noGrp="1"/>
-          </p:cNvSpPr>
-          <p:nvPr/>
-        </p:nvSpPr>
-        <p:spPr>
-          <a:xfrm xmlns:a="http://schemas.openxmlformats.org/drawingml/2006/main">
-            <a:off x="3464719" y="2238375"/>
-            <a:ext cx="2416969" cy="1428750"/>
-          </a:xfrm>
-          <a:prstGeom xmlns:a="http://schemas.openxmlformats.org/drawingml/2006/main" prst="roundRect">
-            <a:avLst>
-              <a:gd name="adj" fmla="val 5333"/>
-            </a:avLst>
-          </a:prstGeom>
-          <a:solidFill xmlns:a="http://schemas.openxmlformats.org/drawingml/2006/main">
-            <a:srgbClr val="FFFFFF"/>
-          </a:solidFill>
-          <a:ln xmlns:a="http://schemas.openxmlformats.org/drawingml/2006/main" w="19050">
-            <a:solidFill>
-              <a:srgbClr val="333333"/>
-            </a:solidFill>
-          </a:ln>
-        </p:spPr>
-        <p:txBody>
-          <a:bodyPr xmlns:a="http://schemas.openxmlformats.org/drawingml/2006/main" anchor="ctr"/>
-          <a:lstStyle xmlns:a="http://schemas.openxmlformats.org/drawingml/2006/main"/>
-          <a:p xmlns:a="http://schemas.openxmlformats.org/drawingml/2006/main">
-            <a:pPr algn="ctr">
-              <a:defRPr sz="1875">
-                <a:solidFill>
-                  <a:srgbClr val="111111"/>
-                </a:solidFill>
-                <a:latin typeface="Arial"/>
-                <a:ea typeface="Arial"/>
-                <a:cs typeface="Arial"/>
-              </a:defRPr>
-            </a:pPr>
-            <a:r>
-              <a:rPr sz="1875">
-                <a:solidFill>
-                  <a:srgbClr val="111111"/>
-                </a:solidFill>
-                <a:latin typeface="Arial"/>
-                <a:ea typeface="Arial"/>
-                <a:cs typeface="Arial"/>
-              </a:rPr>
-              <a:t>Подтверждение</a:t>
-            </a:r>
-          </a:p>
-        </p:txBody>
-      </p:sp>
-      <p:sp>
-        <p:nvSpPr>
-          <p:cNvPr id="5" name="">
-            <a:extLst xmlns:a="http://schemas.openxmlformats.org/drawingml/2006/main">
-              <a:ext uri="{FF2B5EF4-FFF2-40B4-BE49-F238E27FC236}">
-                <a16:creationId xmlns:a16="http://schemas.microsoft.com/office/drawing/2014/main" id="{7F69C5C9-38AA-4845-A3EF-0E217E3DBEDD}"/>
-              </a:ext>
-            </a:extLst>
-          </p:cNvPr>
-          <p:cNvSpPr>
-            <a:spLocks xmlns:a="http://schemas.openxmlformats.org/drawingml/2006/main" noGrp="1"/>
-          </p:cNvSpPr>
-          <p:nvPr/>
-        </p:nvSpPr>
-        <p:spPr>
-          <a:xfrm xmlns:a="http://schemas.openxmlformats.org/drawingml/2006/main">
-            <a:off x="5938838" y="2800350"/>
-            <a:ext cx="228600" cy="266700"/>
-          </a:xfrm>
-          <a:prstGeom xmlns:a="http://schemas.openxmlformats.org/drawingml/2006/main" prst="rightArrow">
-            <a:avLst/>
-          </a:prstGeom>
-          <a:solidFill xmlns:a="http://schemas.openxmlformats.org/drawingml/2006/main">
-            <a:srgbClr val="444444"/>
-          </a:solidFill>
-          <a:ln xmlns:a="http://schemas.openxmlformats.org/drawingml/2006/main" w="0">
-            <a:noFill/>
-          </a:ln>
-        </p:spPr>
-      </p:sp>
-      <p:sp>
-        <p:nvSpPr>
-          <p:cNvPr id="6" name="">
-            <a:extLst xmlns:a="http://schemas.openxmlformats.org/drawingml/2006/main">
-              <a:ext uri="{FF2B5EF4-FFF2-40B4-BE49-F238E27FC236}">
-                <a16:creationId xmlns:a16="http://schemas.microsoft.com/office/drawing/2014/main" id="{9387304D-DF4F-4CA2-A010-EF4DF2EBA231}"/>
-              </a:ext>
-            </a:extLst>
-          </p:cNvPr>
-          <p:cNvSpPr>
-            <a:spLocks xmlns:a="http://schemas.openxmlformats.org/drawingml/2006/main" noGrp="1"/>
-          </p:cNvSpPr>
-          <p:nvPr/>
-        </p:nvSpPr>
-        <p:spPr>
-          <a:xfrm xmlns:a="http://schemas.openxmlformats.org/drawingml/2006/main">
-            <a:off x="6215063" y="2238375"/>
-            <a:ext cx="2416969" cy="1428750"/>
-          </a:xfrm>
-          <a:prstGeom xmlns:a="http://schemas.openxmlformats.org/drawingml/2006/main" prst="roundRect">
-            <a:avLst>
-              <a:gd name="adj" fmla="val 5333"/>
-            </a:avLst>
-          </a:prstGeom>
-          <a:solidFill xmlns:a="http://schemas.openxmlformats.org/drawingml/2006/main">
-            <a:srgbClr val="FFFFFF"/>
-          </a:solidFill>
-          <a:ln xmlns:a="http://schemas.openxmlformats.org/drawingml/2006/main" w="19050">
-            <a:solidFill>
-              <a:srgbClr val="333333"/>
-            </a:solidFill>
-          </a:ln>
-        </p:spPr>
-        <p:txBody>
-          <a:bodyPr xmlns:a="http://schemas.openxmlformats.org/drawingml/2006/main" anchor="ctr"/>
-          <a:lstStyle xmlns:a="http://schemas.openxmlformats.org/drawingml/2006/main"/>
-          <a:p xmlns:a="http://schemas.openxmlformats.org/drawingml/2006/main">
-            <a:pPr algn="ctr">
-              <a:defRPr sz="1875">
-                <a:solidFill>
-                  <a:srgbClr val="111111"/>
-                </a:solidFill>
-                <a:latin typeface="Arial"/>
-                <a:ea typeface="Arial"/>
-                <a:cs typeface="Arial"/>
-              </a:defRPr>
-            </a:pPr>
-            <a:r>
-              <a:rPr sz="1875">
-                <a:solidFill>
-                  <a:srgbClr val="111111"/>
-                </a:solidFill>
-                <a:latin typeface="Arial"/>
-                <a:ea typeface="Arial"/>
-                <a:cs typeface="Arial"/>
-              </a:rPr>
-              <a:t>Проверка</a:t>
-            </a:r>
-          </a:p>
-          <a:p xmlns:a="http://schemas.openxmlformats.org/drawingml/2006/main">
-            <a:pPr algn="ctr">
-              <a:defRPr sz="1875">
-                <a:solidFill>
-                  <a:srgbClr val="111111"/>
-                </a:solidFill>
-                <a:latin typeface="Arial"/>
-                <a:ea typeface="Arial"/>
-                <a:cs typeface="Arial"/>
-              </a:defRPr>
-            </a:pPr>
-            <a:r>
-              <a:rPr sz="1875">
-                <a:solidFill>
-                  <a:srgbClr val="111111"/>
-                </a:solidFill>
-                <a:latin typeface="Arial"/>
-                <a:ea typeface="Arial"/>
-                <a:cs typeface="Arial"/>
-              </a:rPr>
-              <a:t>версий</a:t>
-            </a:r>
-          </a:p>
-        </p:txBody>
-      </p:sp>
-      <p:sp>
-        <p:nvSpPr>
-          <p:cNvPr id="7" name="">
-            <a:extLst xmlns:a="http://schemas.openxmlformats.org/drawingml/2006/main">
-              <a:ext uri="{FF2B5EF4-FFF2-40B4-BE49-F238E27FC236}">
-                <a16:creationId xmlns:a16="http://schemas.microsoft.com/office/drawing/2014/main" id="{7F781E2F-A504-4120-A2E9-11AF2C6E1D3F}"/>
-              </a:ext>
-            </a:extLst>
-          </p:cNvPr>
-          <p:cNvSpPr>
-            <a:spLocks xmlns:a="http://schemas.openxmlformats.org/drawingml/2006/main" noGrp="1"/>
-          </p:cNvSpPr>
-          <p:nvPr/>
-        </p:nvSpPr>
-        <p:spPr>
-          <a:xfrm xmlns:a="http://schemas.openxmlformats.org/drawingml/2006/main">
-            <a:off x="8689181" y="2800350"/>
-            <a:ext cx="228600" cy="266700"/>
-          </a:xfrm>
-          <a:prstGeom xmlns:a="http://schemas.openxmlformats.org/drawingml/2006/main" prst="rightArrow">
-            <a:avLst/>
-          </a:prstGeom>
-          <a:solidFill xmlns:a="http://schemas.openxmlformats.org/drawingml/2006/main">
-            <a:srgbClr val="444444"/>
-          </a:solidFill>
-          <a:ln xmlns:a="http://schemas.openxmlformats.org/drawingml/2006/main" w="0">
-            <a:noFill/>
-          </a:ln>
-        </p:spPr>
-      </p:sp>
-      <p:sp>
-        <p:nvSpPr>
-          <p:cNvPr id="8" name="">
-            <a:extLst xmlns:a="http://schemas.openxmlformats.org/drawingml/2006/main">
-              <a:ext uri="{FF2B5EF4-FFF2-40B4-BE49-F238E27FC236}">
-                <a16:creationId xmlns:a16="http://schemas.microsoft.com/office/drawing/2014/main" id="{6DF7849F-4CFC-4B76-874A-17D98A6C971D}"/>
-              </a:ext>
-            </a:extLst>
-          </p:cNvPr>
-          <p:cNvSpPr>
-            <a:spLocks xmlns:a="http://schemas.openxmlformats.org/drawingml/2006/main" noGrp="1"/>
-          </p:cNvSpPr>
-          <p:nvPr/>
-        </p:nvSpPr>
-        <p:spPr>
-          <a:xfrm xmlns:a="http://schemas.openxmlformats.org/drawingml/2006/main">
-            <a:off x="8965406" y="2238375"/>
-            <a:ext cx="2416969" cy="1428750"/>
-          </a:xfrm>
-          <a:prstGeom xmlns:a="http://schemas.openxmlformats.org/drawingml/2006/main" prst="roundRect">
-            <a:avLst>
-              <a:gd name="adj" fmla="val 5333"/>
-            </a:avLst>
-          </a:prstGeom>
-          <a:solidFill xmlns:a="http://schemas.openxmlformats.org/drawingml/2006/main">
-            <a:srgbClr val="FFFFFF"/>
-          </a:solidFill>
-          <a:ln xmlns:a="http://schemas.openxmlformats.org/drawingml/2006/main" w="19050">
-            <a:solidFill>
-              <a:srgbClr val="333333"/>
-            </a:solidFill>
-          </a:ln>
-        </p:spPr>
-        <p:txBody>
-          <a:bodyPr xmlns:a="http://schemas.openxmlformats.org/drawingml/2006/main" anchor="ctr"/>
-          <a:lstStyle xmlns:a="http://schemas.openxmlformats.org/drawingml/2006/main"/>
-          <a:p xmlns:a="http://schemas.openxmlformats.org/drawingml/2006/main">
-            <a:pPr algn="ctr">
-              <a:defRPr sz="1875">
-                <a:solidFill>
-                  <a:srgbClr val="111111"/>
-                </a:solidFill>
-                <a:latin typeface="Arial"/>
-                <a:ea typeface="Arial"/>
-                <a:cs typeface="Arial"/>
-              </a:defRPr>
-            </a:pPr>
-            <a:r>
-              <a:rPr sz="1875">
-                <a:solidFill>
-                  <a:srgbClr val="111111"/>
-                </a:solidFill>
-                <a:latin typeface="Arial"/>
-                <a:ea typeface="Arial"/>
-                <a:cs typeface="Arial"/>
-              </a:rPr>
-              <a:t>Новая версия</a:t>
-            </a:r>
-          </a:p>
-          <a:p xmlns:a="http://schemas.openxmlformats.org/drawingml/2006/main">
-            <a:pPr algn="ctr">
-              <a:defRPr sz="1875">
-                <a:solidFill>
-                  <a:srgbClr val="111111"/>
-                </a:solidFill>
-                <a:latin typeface="Arial"/>
-                <a:ea typeface="Arial"/>
-                <a:cs typeface="Arial"/>
-              </a:defRPr>
-            </a:pPr>
-            <a:r>
-              <a:rPr sz="1875">
-                <a:solidFill>
-                  <a:srgbClr val="111111"/>
-                </a:solidFill>
-                <a:latin typeface="Arial"/>
-                <a:ea typeface="Arial"/>
-                <a:cs typeface="Arial"/>
-              </a:rPr>
-              <a:t>и пересчёт</a:t>
-            </a:r>
-          </a:p>
-        </p:txBody>
-      </p:sp>
-      <p:sp>
-        <p:nvSpPr>
-          <p:cNvPr id="9" name="">
-            <a:extLst xmlns:a="http://schemas.openxmlformats.org/drawingml/2006/main">
-              <a:ext uri="{FF2B5EF4-FFF2-40B4-BE49-F238E27FC236}">
-                <a16:creationId xmlns:a16="http://schemas.microsoft.com/office/drawing/2014/main" id="{4CFE2317-B0B0-4D68-A93B-E21B3AD0F9AF}"/>
-              </a:ext>
-            </a:extLst>
-          </p:cNvPr>
-          <p:cNvSpPr>
-            <a:spLocks xmlns:a="http://schemas.openxmlformats.org/drawingml/2006/main" noGrp="1"/>
-          </p:cNvSpPr>
-          <p:nvPr/>
-        </p:nvSpPr>
-        <p:spPr>
-          <a:xfrm xmlns:a="http://schemas.openxmlformats.org/drawingml/2006/main">
-            <a:off x="714375" y="4429125"/>
-            <a:ext cx="10572750" cy="1285875"/>
+            <a:off x="4139720" y="1285875"/>
+            <a:ext cx="3912561" cy="5000625"/>
           </a:xfrm>
           <a:prstGeom xmlns:a="http://schemas.openxmlformats.org/drawingml/2006/main" prst="rect">
             <a:avLst/>
           </a:prstGeom>
-          <a:noFill xmlns:a="http://schemas.openxmlformats.org/drawingml/2006/main"/>
-          <a:ln xmlns:a="http://schemas.openxmlformats.org/drawingml/2006/main" w="0">
-            <a:noFill/>
-          </a:ln>
         </p:spPr>
-        <p:txBody>
-          <a:bodyPr xmlns:a="http://schemas.openxmlformats.org/drawingml/2006/main">
-            <a:noAutofit/>
-          </a:bodyPr>
-          <a:lstStyle xmlns:a="http://schemas.openxmlformats.org/drawingml/2006/main"/>
-          <a:p xmlns:a="http://schemas.openxmlformats.org/drawingml/2006/main">
-            <a:pPr>
-              <a:defRPr sz="2175" b="0">
-                <a:solidFill>
-                  <a:srgbClr val="161616"/>
-                </a:solidFill>
-                <a:latin typeface="Arial"/>
-                <a:ea typeface="Arial"/>
-                <a:cs typeface="Arial"/>
-              </a:defRPr>
-            </a:pPr>
-            <a:r>
-              <a:rPr sz="2175" b="0">
-                <a:solidFill>
-                  <a:srgbClr val="161616"/>
-                </a:solidFill>
-                <a:latin typeface="Arial"/>
-                <a:ea typeface="Arial"/>
-                <a:cs typeface="Arial"/>
-              </a:rPr>
-              <a:t>Одна транзакция на модельный ряд. Конфликт откатывает только её изменение. Карточки изменённых рядов становятся STALE.</a:t>
-            </a:r>
-          </a:p>
-        </p:txBody>
-      </p:sp>
+      </p:pic>
     </p:spTree>
     <p:extLst>
       <p:ext uri="{BB962C8B-B14F-4D97-AF65-F5344CB8AC3E}">
-        <p14:creationId xmlns:p14="http://schemas.microsoft.com/office/powerpoint/2010/main" val="1429075156"/>
+        <p14:creationId xmlns:p14="http://schemas.microsoft.com/office/powerpoint/2010/main" val="2056537165"/>
       </p:ext>
     </p:extLst>
   </p:cSld>
@@ -3537,10 +4911,10 @@
       </p:grpSpPr>
       <p:sp>
         <p:nvSpPr>
-          <p:cNvPr id="6" name="">
+          <p:cNvPr id="3" name="">
             <a:extLst xmlns:a="http://schemas.openxmlformats.org/drawingml/2006/main">
               <a:ext uri="{FF2B5EF4-FFF2-40B4-BE49-F238E27FC236}">
-                <a16:creationId xmlns:a16="http://schemas.microsoft.com/office/drawing/2014/main" id="{69449C04-0452-4DA6-882F-EA876D964390}"/>
+                <a16:creationId xmlns:a16="http://schemas.microsoft.com/office/drawing/2014/main" id="{A3160B6A-7773-4F48-834E-02871DE09488}"/>
               </a:ext>
             </a:extLst>
           </p:cNvPr>
@@ -3566,7 +4940,18 @@
           <a:bodyPr xmlns:a="http://schemas.openxmlformats.org/drawingml/2006/main" anchor="ctr">
             <a:noAutofit/>
           </a:bodyPr>
-          <a:lstStyle xmlns:a="http://schemas.openxmlformats.org/drawingml/2006/main"/>
+          <a:lstStyle xmlns:a="http://schemas.openxmlformats.org/drawingml/2006/main">
+            <a:defPPr algn="l">
+              <a:defRPr sz="2700" b="1">
+                <a:solidFill>
+                  <a:srgbClr val="161616"/>
+                </a:solidFill>
+                <a:latin typeface="Arial"/>
+                <a:ea typeface="Arial"/>
+                <a:cs typeface="Arial"/>
+              </a:defRPr>
+            </a:defPPr>
+          </a:lstStyle>
           <a:p xmlns:a="http://schemas.openxmlformats.org/drawingml/2006/main">
             <a:pPr algn="l">
               <a:defRPr sz="2700" b="1">
@@ -3587,243 +4972,43 @@
                 <a:ea typeface="Arial"/>
                 <a:cs typeface="Arial"/>
               </a:rPr>
-              <a:t>Граничные случаи</a:t>
+              <a:t>Схема алгоритма массовой замены</a:t>
             </a:r>
           </a:p>
         </p:txBody>
       </p:sp>
-      <p:sp>
-        <p:nvSpPr>
+      <p:pic>
+        <p:nvPicPr>
           <p:cNvPr id="2" name="">
             <a:extLst xmlns:a="http://schemas.openxmlformats.org/drawingml/2006/main">
               <a:ext uri="{FF2B5EF4-FFF2-40B4-BE49-F238E27FC236}">
-                <a16:creationId xmlns:a16="http://schemas.microsoft.com/office/drawing/2014/main" id="{603701E8-0AE4-45B3-B9FA-48133CFAF376}"/>
+                <a16:creationId xmlns:a16="http://schemas.microsoft.com/office/drawing/2014/main" id="{9EA7275A-75A3-4951-B564-4CFF0BC80D7B}"/>
               </a:ext>
             </a:extLst>
           </p:cNvPr>
-          <p:cNvSpPr>
-            <a:spLocks xmlns:a="http://schemas.openxmlformats.org/drawingml/2006/main" noGrp="1"/>
-          </p:cNvSpPr>
+          <p:cNvPicPr>
+            <a:picLocks xmlns:a="http://schemas.openxmlformats.org/drawingml/2006/main" noChangeAspect="1"/>
+          </p:cNvPicPr>
           <p:nvPr/>
-        </p:nvSpPr>
+        </p:nvPicPr>
+        <p:blipFill>
+          <a:blip xmlns:r="http://schemas.openxmlformats.org/officeDocument/2006/relationships" xmlns:a="http://schemas.openxmlformats.org/drawingml/2006/main" r:embed="R00faac2670a44477"/>
+          <a:stretch xmlns:a="http://schemas.openxmlformats.org/drawingml/2006/main"/>
+        </p:blipFill>
         <p:spPr>
           <a:xfrm xmlns:a="http://schemas.openxmlformats.org/drawingml/2006/main">
-            <a:off x="666750" y="1524000"/>
-            <a:ext cx="10763250" cy="914400"/>
+            <a:off x="3375453" y="1285875"/>
+            <a:ext cx="5441095" cy="5000625"/>
           </a:xfrm>
           <a:prstGeom xmlns:a="http://schemas.openxmlformats.org/drawingml/2006/main" prst="rect">
             <a:avLst/>
           </a:prstGeom>
-          <a:noFill xmlns:a="http://schemas.openxmlformats.org/drawingml/2006/main"/>
-          <a:ln xmlns:a="http://schemas.openxmlformats.org/drawingml/2006/main" w="0">
-            <a:noFill/>
-          </a:ln>
         </p:spPr>
-        <p:txBody>
-          <a:bodyPr xmlns:a="http://schemas.openxmlformats.org/drawingml/2006/main">
-            <a:noAutofit/>
-          </a:bodyPr>
-          <a:lstStyle xmlns:a="http://schemas.openxmlformats.org/drawingml/2006/main"/>
-          <a:p xmlns:a="http://schemas.openxmlformats.org/drawingml/2006/main">
-            <a:pPr>
-              <a:defRPr sz="2175" b="0">
-                <a:solidFill>
-                  <a:srgbClr val="161616"/>
-                </a:solidFill>
-                <a:latin typeface="Arial"/>
-                <a:ea typeface="Arial"/>
-                <a:cs typeface="Arial"/>
-              </a:defRPr>
-            </a:pPr>
-            <a:r>
-              <a:rPr sz="2175" b="0">
-                <a:solidFill>
-                  <a:srgbClr val="161616"/>
-                </a:solidFill>
-                <a:latin typeface="Arial"/>
-                <a:ea typeface="Arial"/>
-                <a:cs typeface="Arial"/>
-              </a:rPr>
-              <a:t>Пустой состав и неизвестная масса блокируют готовность.</a:t>
-            </a:r>
-          </a:p>
-        </p:txBody>
-      </p:sp>
-      <p:sp>
-        <p:nvSpPr>
-          <p:cNvPr id="3" name="">
-            <a:extLst xmlns:a="http://schemas.openxmlformats.org/drawingml/2006/main">
-              <a:ext uri="{FF2B5EF4-FFF2-40B4-BE49-F238E27FC236}">
-                <a16:creationId xmlns:a16="http://schemas.microsoft.com/office/drawing/2014/main" id="{C4E88922-8B62-41FC-A4FF-87E410DFF536}"/>
-              </a:ext>
-            </a:extLst>
-          </p:cNvPr>
-          <p:cNvSpPr>
-            <a:spLocks xmlns:a="http://schemas.openxmlformats.org/drawingml/2006/main" noGrp="1"/>
-          </p:cNvSpPr>
-          <p:nvPr/>
-        </p:nvSpPr>
-        <p:spPr>
-          <a:xfrm xmlns:a="http://schemas.openxmlformats.org/drawingml/2006/main">
-            <a:off x="666750" y="2590800"/>
-            <a:ext cx="10763250" cy="914400"/>
-          </a:xfrm>
-          <a:prstGeom xmlns:a="http://schemas.openxmlformats.org/drawingml/2006/main" prst="rect">
-            <a:avLst/>
-          </a:prstGeom>
-          <a:noFill xmlns:a="http://schemas.openxmlformats.org/drawingml/2006/main"/>
-          <a:ln xmlns:a="http://schemas.openxmlformats.org/drawingml/2006/main" w="0">
-            <a:noFill/>
-          </a:ln>
-        </p:spPr>
-        <p:txBody>
-          <a:bodyPr xmlns:a="http://schemas.openxmlformats.org/drawingml/2006/main">
-            <a:noAutofit/>
-          </a:bodyPr>
-          <a:lstStyle xmlns:a="http://schemas.openxmlformats.org/drawingml/2006/main"/>
-          <a:p xmlns:a="http://schemas.openxmlformats.org/drawingml/2006/main">
-            <a:pPr>
-              <a:defRPr sz="2175" b="0">
-                <a:solidFill>
-                  <a:srgbClr val="161616"/>
-                </a:solidFill>
-                <a:latin typeface="Arial"/>
-                <a:ea typeface="Arial"/>
-                <a:cs typeface="Arial"/>
-              </a:defRPr>
-            </a:pPr>
-            <a:r>
-              <a:rPr sz="2175" b="0">
-                <a:solidFill>
-                  <a:srgbClr val="161616"/>
-                </a:solidFill>
-                <a:latin typeface="Arial"/>
-                <a:ea typeface="Arial"/>
-                <a:cs typeface="Arial"/>
-              </a:rPr>
-              <a:t>При отсутствии наблюдений показатель выводится как «нет данных».</a:t>
-            </a:r>
-          </a:p>
-        </p:txBody>
-      </p:sp>
-      <p:sp>
-        <p:nvSpPr>
-          <p:cNvPr id="4" name="">
-            <a:extLst xmlns:a="http://schemas.openxmlformats.org/drawingml/2006/main">
-              <a:ext uri="{FF2B5EF4-FFF2-40B4-BE49-F238E27FC236}">
-                <a16:creationId xmlns:a16="http://schemas.microsoft.com/office/drawing/2014/main" id="{42D72821-E23A-49F0-B23D-E985FAFED1FB}"/>
-              </a:ext>
-            </a:extLst>
-          </p:cNvPr>
-          <p:cNvSpPr>
-            <a:spLocks xmlns:a="http://schemas.openxmlformats.org/drawingml/2006/main" noGrp="1"/>
-          </p:cNvSpPr>
-          <p:nvPr/>
-        </p:nvSpPr>
-        <p:spPr>
-          <a:xfrm xmlns:a="http://schemas.openxmlformats.org/drawingml/2006/main">
-            <a:off x="666750" y="3657600"/>
-            <a:ext cx="10763250" cy="914400"/>
-          </a:xfrm>
-          <a:prstGeom xmlns:a="http://schemas.openxmlformats.org/drawingml/2006/main" prst="rect">
-            <a:avLst/>
-          </a:prstGeom>
-          <a:noFill xmlns:a="http://schemas.openxmlformats.org/drawingml/2006/main"/>
-          <a:ln xmlns:a="http://schemas.openxmlformats.org/drawingml/2006/main" w="0">
-            <a:noFill/>
-          </a:ln>
-        </p:spPr>
-        <p:txBody>
-          <a:bodyPr xmlns:a="http://schemas.openxmlformats.org/drawingml/2006/main">
-            <a:noAutofit/>
-          </a:bodyPr>
-          <a:lstStyle xmlns:a="http://schemas.openxmlformats.org/drawingml/2006/main"/>
-          <a:p xmlns:a="http://schemas.openxmlformats.org/drawingml/2006/main">
-            <a:pPr>
-              <a:defRPr sz="2175" b="0">
-                <a:solidFill>
-                  <a:srgbClr val="161616"/>
-                </a:solidFill>
-                <a:latin typeface="Arial"/>
-                <a:ea typeface="Arial"/>
-                <a:cs typeface="Arial"/>
-              </a:defRPr>
-            </a:pPr>
-            <a:r>
-              <a:rPr sz="2175" b="0">
-                <a:solidFill>
-                  <a:srgbClr val="161616"/>
-                </a:solidFill>
-                <a:latin typeface="Arial"/>
-                <a:ea typeface="Arial"/>
-                <a:cs typeface="Arial"/>
-              </a:rPr>
-              <a:t>Возраст предложения не должен быть отрицательным или превышать TTL.</a:t>
-            </a:r>
-          </a:p>
-        </p:txBody>
-      </p:sp>
-      <p:sp>
-        <p:nvSpPr>
-          <p:cNvPr id="5" name="">
-            <a:extLst xmlns:a="http://schemas.openxmlformats.org/drawingml/2006/main">
-              <a:ext uri="{FF2B5EF4-FFF2-40B4-BE49-F238E27FC236}">
-                <a16:creationId xmlns:a16="http://schemas.microsoft.com/office/drawing/2014/main" id="{591F7C11-F093-4D10-ACD2-2EF1DE5EAFD4}"/>
-              </a:ext>
-            </a:extLst>
-          </p:cNvPr>
-          <p:cNvSpPr>
-            <a:spLocks xmlns:a="http://schemas.openxmlformats.org/drawingml/2006/main" noGrp="1"/>
-          </p:cNvSpPr>
-          <p:nvPr/>
-        </p:nvSpPr>
-        <p:spPr>
-          <a:xfrm xmlns:a="http://schemas.openxmlformats.org/drawingml/2006/main">
-            <a:off x="666750" y="4724400"/>
-            <a:ext cx="10763250" cy="914400"/>
-          </a:xfrm>
-          <a:prstGeom xmlns:a="http://schemas.openxmlformats.org/drawingml/2006/main" prst="rect">
-            <a:avLst/>
-          </a:prstGeom>
-          <a:noFill xmlns:a="http://schemas.openxmlformats.org/drawingml/2006/main"/>
-          <a:ln xmlns:a="http://schemas.openxmlformats.org/drawingml/2006/main" w="0">
-            <a:noFill/>
-          </a:ln>
-        </p:spPr>
-        <p:txBody>
-          <a:bodyPr xmlns:a="http://schemas.openxmlformats.org/drawingml/2006/main">
-            <a:noAutofit/>
-          </a:bodyPr>
-          <a:lstStyle xmlns:a="http://schemas.openxmlformats.org/drawingml/2006/main"/>
-          <a:p xmlns:a="http://schemas.openxmlformats.org/drawingml/2006/main">
-            <a:pPr>
-              <a:defRPr sz="2175" b="0">
-                <a:solidFill>
-                  <a:srgbClr val="161616"/>
-                </a:solidFill>
-                <a:latin typeface="Arial"/>
-                <a:ea typeface="Arial"/>
-                <a:cs typeface="Arial"/>
-              </a:defRPr>
-            </a:pPr>
-            <a:r>
-              <a:rPr sz="2175" b="0">
-                <a:solidFill>
-                  <a:srgbClr val="161616"/>
-                </a:solidFill>
-                <a:latin typeface="Arial"/>
-                <a:ea typeface="Arial"/>
-                <a:cs typeface="Arial"/>
-              </a:rPr>
-              <a:t>Производительность пакета 1000 модельных рядов пока является целевым требованием.</a:t>
-            </a:r>
-          </a:p>
-        </p:txBody>
-      </p:sp>
+      </p:pic>
     </p:spTree>
     <p:extLst>
       <p:ext uri="{BB962C8B-B14F-4D97-AF65-F5344CB8AC3E}">
-        <p14:creationId xmlns:p14="http://schemas.microsoft.com/office/powerpoint/2010/main" val="220510501"/>
+        <p14:creationId xmlns:p14="http://schemas.microsoft.com/office/powerpoint/2010/main" val="2005337735"/>
       </p:ext>
     </p:extLst>
   </p:cSld>
@@ -3871,16 +5056,16 @@
         <a:srgbClr val="96607D"/>
       </a:folHlink>
     </a:clrScheme>
-    <a:fontScheme name="Office">
+    <a:fontScheme name="">
       <a:majorFont>
-        <a:latin typeface="Calibri Light"/>
-        <a:ea typeface="Calibri Light"/>
-        <a:cs typeface="Calibri Light"/>
+        <a:latin typeface="Aptos"/>
+        <a:ea typeface=""/>
+        <a:cs typeface=""/>
       </a:majorFont>
       <a:minorFont>
-        <a:latin typeface="Calibri"/>
-        <a:ea typeface="Calibri"/>
-        <a:cs typeface="Calibri"/>
+        <a:latin typeface="Aptos"/>
+        <a:ea typeface=""/>
+        <a:cs typeface=""/>
       </a:minorFont>
     </a:fontScheme>
     <a:fmtScheme name="ChatGPT">
